--- a/Collection_Equinoxe_2026_Forecast.pptx
+++ b/Collection_Equinoxe_2026_Forecast.pptx
@@ -1,11 +1,11 @@
 
 <file path=ppt/presentation.xml><?xml version="1.0" encoding="utf-8"?>
-<p:presentation xmlns:a="http://schemas.openxmlformats.org/drawingml/2006/main" xmlns:r="http://schemas.openxmlformats.org/officeDocument/2006/relationships" xmlns:p="http://schemas.openxmlformats.org/presentationml/2006/main" saveSubsetFonts="1">
+<p:presentation xmlns:a="http://schemas.openxmlformats.org/drawingml/2006/main" xmlns:r="http://schemas.openxmlformats.org/officeDocument/2006/relationships" xmlns:p="http://schemas.openxmlformats.org/presentationml/2006/main">
   <p:sldMasterIdLst>
     <p:sldMasterId id="2147483648" r:id="rId1"/>
   </p:sldMasterIdLst>
   <p:notesMasterIdLst>
-    <p:notesMasterId r:id="rId8"/>
+    <p:notesMasterId r:id="rId9"/>
   </p:notesMasterIdLst>
   <p:sldIdLst>
     <p:sldId id="256" r:id="rId2"/>
@@ -14,6 +14,7 @@
     <p:sldId id="259" r:id="rId5"/>
     <p:sldId id="260" r:id="rId6"/>
     <p:sldId id="261" r:id="rId7"/>
+    <p:sldId id="262" r:id="rId8"/>
   </p:sldIdLst>
   <p:sldSz cx="12192000" cy="6858000"/>
   <p:notesSz cx="6858000" cy="9144000"/>
@@ -120,6 +121,905 @@
 </p:presentation>
 </file>
 
+<file path=ppt/charts/chart1.xml><?xml version="1.0" encoding="utf-8"?>
+<c:chartSpace xmlns:c="http://schemas.openxmlformats.org/drawingml/2006/chart" xmlns:a="http://schemas.openxmlformats.org/drawingml/2006/main" xmlns:r="http://schemas.openxmlformats.org/officeDocument/2006/relationships" xmlns:c16r2="http://schemas.microsoft.com/office/drawing/2015/06/chart">
+  <c:date1904 val="1"/>
+  <c:lang val="en-US"/>
+  <c:roundedCorners val="1"/>
+  <c:style val="2"/>
+  <c:chart>
+    <c:title>
+      <c:tx>
+        <c:rich>
+          <a:bodyPr/>
+          <a:lstStyle/>
+          <a:p>
+            <a:r>
+              <a:rPr lang="en-US" sz="1500" b="1">
+                <a:solidFill>
+                  <a:srgbClr val="000000"/>
+                </a:solidFill>
+              </a:rPr>
+              <a:t>Portfolio median vs. same-unit growth</a:t>
+            </a:r>
+          </a:p>
+        </c:rich>
+      </c:tx>
+      <c:overlay val="1"/>
+    </c:title>
+    <c:autoTitleDeleted val="0"/>
+    <c:plotArea>
+      <c:layout/>
+      <c:lineChart>
+        <c:grouping val="standard"/>
+        <c:varyColors val="1"/>
+        <c:ser>
+          <c:idx val="0"/>
+          <c:order val="0"/>
+          <c:tx>
+            <c:v>Naive portfolio median</c:v>
+          </c:tx>
+          <c:spPr>
+            <a:ln w="28575">
+              <a:solidFill>
+                <a:srgbClr val="2878B8"/>
+              </a:solidFill>
+              <a:prstDash val="dash"/>
+            </a:ln>
+          </c:spPr>
+          <c:marker>
+            <c:symbol val="circle"/>
+            <c:size val="8"/>
+          </c:marker>
+          <c:cat>
+            <c:numLit>
+              <c:formatCode>General</c:formatCode>
+              <c:ptCount val="5"/>
+              <c:pt idx="0">
+                <c:v>2021</c:v>
+              </c:pt>
+              <c:pt idx="1">
+                <c:v>2022</c:v>
+              </c:pt>
+              <c:pt idx="2">
+                <c:v>2023</c:v>
+              </c:pt>
+              <c:pt idx="3">
+                <c:v>2024</c:v>
+              </c:pt>
+              <c:pt idx="4">
+                <c:v>2025</c:v>
+              </c:pt>
+            </c:numLit>
+          </c:cat>
+          <c:val>
+            <c:numLit>
+              <c:formatCode>0.0</c:formatCode>
+              <c:ptCount val="5"/>
+              <c:pt idx="0">
+                <c:v>4.2300000000000004</c:v>
+              </c:pt>
+              <c:pt idx="1">
+                <c:v>3.38</c:v>
+              </c:pt>
+              <c:pt idx="2">
+                <c:v>10.85</c:v>
+              </c:pt>
+              <c:pt idx="3">
+                <c:v>4.4800000000000004</c:v>
+              </c:pt>
+              <c:pt idx="4">
+                <c:v>4.0599999999999996</c:v>
+              </c:pt>
+            </c:numLit>
+          </c:val>
+          <c:smooth val="1"/>
+          <c:extLst>
+            <c:ext xmlns:c16="http://schemas.microsoft.com/office/drawing/2014/chart" uri="{C3380CC4-5D6E-409C-BE32-E72D297353CC}">
+              <c16:uniqueId val="{00000000-57D2-4193-9B58-40D528571E31}"/>
+            </c:ext>
+          </c:extLst>
+        </c:ser>
+        <c:ser>
+          <c:idx val="1"/>
+          <c:order val="1"/>
+          <c:tx>
+            <c:v>Same-unit contractual</c:v>
+          </c:tx>
+          <c:spPr>
+            <a:ln w="28575">
+              <a:solidFill>
+                <a:srgbClr val="FF7F0E"/>
+              </a:solidFill>
+              <a:prstDash val="solid"/>
+            </a:ln>
+          </c:spPr>
+          <c:marker>
+            <c:symbol val="square"/>
+            <c:size val="8"/>
+          </c:marker>
+          <c:cat>
+            <c:numLit>
+              <c:formatCode>General</c:formatCode>
+              <c:ptCount val="5"/>
+              <c:pt idx="0">
+                <c:v>2021</c:v>
+              </c:pt>
+              <c:pt idx="1">
+                <c:v>2022</c:v>
+              </c:pt>
+              <c:pt idx="2">
+                <c:v>2023</c:v>
+              </c:pt>
+              <c:pt idx="3">
+                <c:v>2024</c:v>
+              </c:pt>
+              <c:pt idx="4">
+                <c:v>2025</c:v>
+              </c:pt>
+            </c:numLit>
+          </c:cat>
+          <c:val>
+            <c:numLit>
+              <c:formatCode>0.0</c:formatCode>
+              <c:ptCount val="5"/>
+              <c:pt idx="0">
+                <c:v>4.46</c:v>
+              </c:pt>
+              <c:pt idx="1">
+                <c:v>5.4</c:v>
+              </c:pt>
+              <c:pt idx="2">
+                <c:v>2.29</c:v>
+              </c:pt>
+              <c:pt idx="3">
+                <c:v>3.39</c:v>
+              </c:pt>
+              <c:pt idx="4">
+                <c:v>7.04</c:v>
+              </c:pt>
+            </c:numLit>
+          </c:val>
+          <c:smooth val="1"/>
+          <c:extLst>
+            <c:ext xmlns:c16="http://schemas.microsoft.com/office/drawing/2014/chart" uri="{C3380CC4-5D6E-409C-BE32-E72D297353CC}">
+              <c16:uniqueId val="{00000001-57D2-4193-9B58-40D528571E31}"/>
+            </c:ext>
+          </c:extLst>
+        </c:ser>
+        <c:dLbls>
+          <c:showLegendKey val="0"/>
+          <c:showVal val="0"/>
+          <c:showCatName val="0"/>
+          <c:showSerName val="0"/>
+          <c:showPercent val="0"/>
+          <c:showBubbleSize val="0"/>
+        </c:dLbls>
+        <c:marker val="1"/>
+        <c:smooth val="0"/>
+        <c:axId val="48650112"/>
+        <c:axId val="48672768"/>
+      </c:lineChart>
+      <c:catAx>
+        <c:axId val="48650112"/>
+        <c:scaling>
+          <c:orientation val="minMax"/>
+        </c:scaling>
+        <c:delete val="0"/>
+        <c:axPos val="b"/>
+        <c:numFmt formatCode="General" sourceLinked="1"/>
+        <c:majorTickMark val="none"/>
+        <c:minorTickMark val="none"/>
+        <c:tickLblPos val="nextTo"/>
+        <c:spPr>
+          <a:ln w="9525">
+            <a:solidFill>
+              <a:srgbClr val="B8BCC4"/>
+            </a:solidFill>
+            <a:prstDash val="solid"/>
+          </a:ln>
+        </c:spPr>
+        <c:txPr>
+          <a:bodyPr anchorCtr="1"/>
+          <a:lstStyle/>
+          <a:p>
+            <a:pPr>
+              <a:defRPr sz="1200">
+                <a:solidFill>
+                  <a:srgbClr val="4C525B"/>
+                </a:solidFill>
+              </a:defRPr>
+            </a:pPr>
+            <a:endParaRPr lang="fr-FR"/>
+          </a:p>
+        </c:txPr>
+        <c:crossAx val="48672768"/>
+        <c:crosses val="autoZero"/>
+        <c:auto val="1"/>
+        <c:lblAlgn val="ctr"/>
+        <c:lblOffset val="100"/>
+        <c:noMultiLvlLbl val="0"/>
+      </c:catAx>
+      <c:valAx>
+        <c:axId val="48672768"/>
+        <c:scaling>
+          <c:orientation val="minMax"/>
+          <c:max val="12"/>
+          <c:min val="0"/>
+        </c:scaling>
+        <c:delete val="0"/>
+        <c:axPos val="l"/>
+        <c:majorGridlines>
+          <c:spPr>
+            <a:ln w="9525">
+              <a:solidFill>
+                <a:srgbClr val="E1E3E6"/>
+              </a:solidFill>
+              <a:prstDash val="solid"/>
+            </a:ln>
+          </c:spPr>
+        </c:majorGridlines>
+        <c:title>
+          <c:tx>
+            <c:rich>
+              <a:bodyPr/>
+              <a:lstStyle/>
+              <a:p>
+                <a:r>
+                  <a:rPr lang="fr-CA" sz="1200">
+                    <a:solidFill>
+                      <a:srgbClr val="4C525B"/>
+                    </a:solidFill>
+                  </a:rPr>
+                  <a:t>Annual growth (%)</a:t>
+                </a:r>
+              </a:p>
+            </c:rich>
+          </c:tx>
+          <c:overlay val="1"/>
+        </c:title>
+        <c:numFmt formatCode="0.0" sourceLinked="1"/>
+        <c:majorTickMark val="none"/>
+        <c:minorTickMark val="none"/>
+        <c:tickLblPos val="nextTo"/>
+        <c:spPr>
+          <a:ln w="9525">
+            <a:solidFill>
+              <a:srgbClr val="D4D4D4"/>
+            </a:solidFill>
+            <a:prstDash val="solid"/>
+          </a:ln>
+        </c:spPr>
+        <c:txPr>
+          <a:bodyPr anchorCtr="1"/>
+          <a:lstStyle/>
+          <a:p>
+            <a:pPr>
+              <a:defRPr sz="1200">
+                <a:solidFill>
+                  <a:srgbClr val="4C525B"/>
+                </a:solidFill>
+              </a:defRPr>
+            </a:pPr>
+            <a:endParaRPr lang="fr-FR"/>
+          </a:p>
+        </c:txPr>
+        <c:crossAx val="48650112"/>
+        <c:crosses val="autoZero"/>
+        <c:crossBetween val="between"/>
+        <c:majorUnit val="2"/>
+      </c:valAx>
+      <c:spPr>
+        <a:solidFill>
+          <a:srgbClr val="FFFFFF"/>
+        </a:solidFill>
+        <a:ln w="0">
+          <a:solidFill>
+            <a:srgbClr val="FFFFFF"/>
+          </a:solidFill>
+          <a:prstDash val="solid"/>
+        </a:ln>
+      </c:spPr>
+    </c:plotArea>
+    <c:legend>
+      <c:legendPos val="b"/>
+      <c:overlay val="0"/>
+      <c:txPr>
+        <a:bodyPr anchorCtr="1"/>
+        <a:lstStyle/>
+        <a:p>
+          <a:pPr>
+            <a:defRPr sz="1125">
+              <a:solidFill>
+                <a:srgbClr val="4C525B"/>
+              </a:solidFill>
+            </a:defRPr>
+          </a:pPr>
+          <a:endParaRPr lang="fr-FR"/>
+        </a:p>
+      </c:txPr>
+    </c:legend>
+    <c:plotVisOnly val="1"/>
+    <c:dispBlanksAs val="zero"/>
+    <c:showDLblsOverMax val="1"/>
+  </c:chart>
+  <c:spPr>
+    <a:solidFill>
+      <a:srgbClr val="FFFFFF"/>
+    </a:solidFill>
+    <a:ln w="0">
+      <a:solidFill>
+        <a:srgbClr val="FFFFFF"/>
+      </a:solidFill>
+      <a:prstDash val="solid"/>
+    </a:ln>
+  </c:spPr>
+</c:chartSpace>
+</file>
+
+<file path=ppt/charts/chart2.xml><?xml version="1.0" encoding="utf-8"?>
+<c:chartSpace xmlns:c="http://schemas.openxmlformats.org/drawingml/2006/chart" xmlns:a="http://schemas.openxmlformats.org/drawingml/2006/main" xmlns:r="http://schemas.openxmlformats.org/officeDocument/2006/relationships" xmlns:c16r2="http://schemas.microsoft.com/office/drawing/2015/06/chart">
+  <c:date1904 val="1"/>
+  <c:lang val="en-US"/>
+  <c:roundedCorners val="1"/>
+  <c:style val="2"/>
+  <c:chart>
+    <c:title>
+      <c:tx>
+        <c:rich>
+          <a:bodyPr/>
+          <a:lstStyle/>
+          <a:p>
+            <a:r>
+              <a:rPr lang="fr-CA" sz="1500" b="1">
+                <a:solidFill>
+                  <a:srgbClr val="000000"/>
+                </a:solidFill>
+              </a:rPr>
+              <a:t>Same-unit effective-rent growth</a:t>
+            </a:r>
+          </a:p>
+        </c:rich>
+      </c:tx>
+      <c:overlay val="1"/>
+    </c:title>
+    <c:autoTitleDeleted val="0"/>
+    <c:plotArea>
+      <c:layout/>
+      <c:lineChart>
+        <c:grouping val="standard"/>
+        <c:varyColors val="1"/>
+        <c:ser>
+          <c:idx val="0"/>
+          <c:order val="0"/>
+          <c:tx>
+            <c:v>Effective-rent growth</c:v>
+          </c:tx>
+          <c:spPr>
+            <a:ln w="28575">
+              <a:solidFill>
+                <a:srgbClr val="3D8DFF"/>
+              </a:solidFill>
+              <a:prstDash val="solid"/>
+            </a:ln>
+          </c:spPr>
+          <c:marker>
+            <c:symbol val="circle"/>
+            <c:size val="8"/>
+          </c:marker>
+          <c:cat>
+            <c:numLit>
+              <c:formatCode>General</c:formatCode>
+              <c:ptCount val="5"/>
+              <c:pt idx="0">
+                <c:v>2021</c:v>
+              </c:pt>
+              <c:pt idx="1">
+                <c:v>2022</c:v>
+              </c:pt>
+              <c:pt idx="2">
+                <c:v>2023</c:v>
+              </c:pt>
+              <c:pt idx="3">
+                <c:v>2024</c:v>
+              </c:pt>
+              <c:pt idx="4">
+                <c:v>2025</c:v>
+              </c:pt>
+            </c:numLit>
+          </c:cat>
+          <c:val>
+            <c:numLit>
+              <c:formatCode>0.0</c:formatCode>
+              <c:ptCount val="5"/>
+              <c:pt idx="0">
+                <c:v>3.54</c:v>
+              </c:pt>
+              <c:pt idx="1">
+                <c:v>4.59</c:v>
+              </c:pt>
+              <c:pt idx="2">
+                <c:v>2.02</c:v>
+              </c:pt>
+              <c:pt idx="3">
+                <c:v>1.77</c:v>
+              </c:pt>
+              <c:pt idx="4">
+                <c:v>3.58</c:v>
+              </c:pt>
+            </c:numLit>
+          </c:val>
+          <c:smooth val="1"/>
+          <c:extLst>
+            <c:ext xmlns:c16="http://schemas.microsoft.com/office/drawing/2014/chart" uri="{C3380CC4-5D6E-409C-BE32-E72D297353CC}">
+              <c16:uniqueId val="{00000000-3308-4989-99BD-0E001377AF3E}"/>
+            </c:ext>
+          </c:extLst>
+        </c:ser>
+        <c:dLbls>
+          <c:showLegendKey val="0"/>
+          <c:showVal val="0"/>
+          <c:showCatName val="0"/>
+          <c:showSerName val="0"/>
+          <c:showPercent val="0"/>
+          <c:showBubbleSize val="0"/>
+        </c:dLbls>
+        <c:marker val="1"/>
+        <c:smooth val="0"/>
+        <c:axId val="48650112"/>
+        <c:axId val="48672768"/>
+      </c:lineChart>
+      <c:catAx>
+        <c:axId val="48650112"/>
+        <c:scaling>
+          <c:orientation val="minMax"/>
+        </c:scaling>
+        <c:delete val="0"/>
+        <c:axPos val="b"/>
+        <c:numFmt formatCode="General" sourceLinked="1"/>
+        <c:majorTickMark val="none"/>
+        <c:minorTickMark val="none"/>
+        <c:tickLblPos val="nextTo"/>
+        <c:spPr>
+          <a:ln w="9525">
+            <a:solidFill>
+              <a:srgbClr val="B8BCC4"/>
+            </a:solidFill>
+            <a:prstDash val="solid"/>
+          </a:ln>
+        </c:spPr>
+        <c:txPr>
+          <a:bodyPr anchorCtr="1"/>
+          <a:lstStyle/>
+          <a:p>
+            <a:pPr>
+              <a:defRPr sz="1200">
+                <a:solidFill>
+                  <a:srgbClr val="4C525B"/>
+                </a:solidFill>
+              </a:defRPr>
+            </a:pPr>
+            <a:endParaRPr lang="fr-FR"/>
+          </a:p>
+        </c:txPr>
+        <c:crossAx val="48672768"/>
+        <c:crosses val="autoZero"/>
+        <c:auto val="1"/>
+        <c:lblAlgn val="ctr"/>
+        <c:lblOffset val="100"/>
+        <c:noMultiLvlLbl val="0"/>
+      </c:catAx>
+      <c:valAx>
+        <c:axId val="48672768"/>
+        <c:scaling>
+          <c:orientation val="minMax"/>
+          <c:max val="5"/>
+          <c:min val="0"/>
+        </c:scaling>
+        <c:delete val="0"/>
+        <c:axPos val="l"/>
+        <c:majorGridlines>
+          <c:spPr>
+            <a:ln w="9525">
+              <a:solidFill>
+                <a:srgbClr val="E1E3E6"/>
+              </a:solidFill>
+              <a:prstDash val="solid"/>
+            </a:ln>
+          </c:spPr>
+        </c:majorGridlines>
+        <c:title>
+          <c:tx>
+            <c:rich>
+              <a:bodyPr/>
+              <a:lstStyle/>
+              <a:p>
+                <a:r>
+                  <a:rPr lang="fr-CA" sz="1200">
+                    <a:solidFill>
+                      <a:srgbClr val="4C525B"/>
+                    </a:solidFill>
+                  </a:rPr>
+                  <a:t>Annual growth (%)</a:t>
+                </a:r>
+              </a:p>
+            </c:rich>
+          </c:tx>
+          <c:overlay val="1"/>
+        </c:title>
+        <c:numFmt formatCode="0.0" sourceLinked="1"/>
+        <c:majorTickMark val="none"/>
+        <c:minorTickMark val="none"/>
+        <c:tickLblPos val="nextTo"/>
+        <c:spPr>
+          <a:ln w="9525">
+            <a:solidFill>
+              <a:srgbClr val="D4D4D4"/>
+            </a:solidFill>
+            <a:prstDash val="solid"/>
+          </a:ln>
+        </c:spPr>
+        <c:txPr>
+          <a:bodyPr anchorCtr="1"/>
+          <a:lstStyle/>
+          <a:p>
+            <a:pPr>
+              <a:defRPr sz="1200">
+                <a:solidFill>
+                  <a:srgbClr val="4C525B"/>
+                </a:solidFill>
+              </a:defRPr>
+            </a:pPr>
+            <a:endParaRPr lang="fr-FR"/>
+          </a:p>
+        </c:txPr>
+        <c:crossAx val="48650112"/>
+        <c:crosses val="autoZero"/>
+        <c:crossBetween val="between"/>
+        <c:majorUnit val="1"/>
+      </c:valAx>
+      <c:spPr>
+        <a:solidFill>
+          <a:srgbClr val="FFFFFF"/>
+        </a:solidFill>
+        <a:ln w="0">
+          <a:solidFill>
+            <a:srgbClr val="FFFFFF"/>
+          </a:solidFill>
+          <a:prstDash val="solid"/>
+        </a:ln>
+      </c:spPr>
+    </c:plotArea>
+    <c:plotVisOnly val="1"/>
+    <c:dispBlanksAs val="zero"/>
+    <c:showDLblsOverMax val="1"/>
+  </c:chart>
+  <c:spPr>
+    <a:solidFill>
+      <a:srgbClr val="FFFFFF"/>
+    </a:solidFill>
+    <a:ln w="0">
+      <a:solidFill>
+        <a:srgbClr val="FFFFFF"/>
+      </a:solidFill>
+      <a:prstDash val="solid"/>
+    </a:ln>
+  </c:spPr>
+</c:chartSpace>
+</file>
+
+<file path=ppt/charts/chart3.xml><?xml version="1.0" encoding="utf-8"?>
+<c:chartSpace xmlns:c="http://schemas.openxmlformats.org/drawingml/2006/chart" xmlns:a="http://schemas.openxmlformats.org/drawingml/2006/main" xmlns:r="http://schemas.openxmlformats.org/officeDocument/2006/relationships" xmlns:c16r2="http://schemas.microsoft.com/office/drawing/2015/06/chart">
+  <c:date1904 val="1"/>
+  <c:lang val="en-US"/>
+  <c:roundedCorners val="1"/>
+  <c:style val="2"/>
+  <c:chart>
+    <c:title>
+      <c:tx>
+        <c:rich>
+          <a:bodyPr/>
+          <a:lstStyle/>
+          <a:p>
+            <a:r>
+              <a:rPr lang="fr-CA" sz="1500" b="1">
+                <a:solidFill>
+                  <a:srgbClr val="000000"/>
+                </a:solidFill>
+              </a:rPr>
+              <a:t>Backtest: predicted vs. actual</a:t>
+            </a:r>
+          </a:p>
+        </c:rich>
+      </c:tx>
+      <c:overlay val="1"/>
+    </c:title>
+    <c:autoTitleDeleted val="0"/>
+    <c:plotArea>
+      <c:layout/>
+      <c:lineChart>
+        <c:grouping val="standard"/>
+        <c:varyColors val="1"/>
+        <c:ser>
+          <c:idx val="0"/>
+          <c:order val="0"/>
+          <c:tx>
+            <c:v>Actual</c:v>
+          </c:tx>
+          <c:spPr>
+            <a:ln w="28575">
+              <a:solidFill>
+                <a:srgbClr val="2878B8"/>
+              </a:solidFill>
+              <a:prstDash val="solid"/>
+            </a:ln>
+          </c:spPr>
+          <c:marker>
+            <c:symbol val="circle"/>
+            <c:size val="8"/>
+          </c:marker>
+          <c:cat>
+            <c:numLit>
+              <c:formatCode>General</c:formatCode>
+              <c:ptCount val="3"/>
+              <c:pt idx="0">
+                <c:v>2023</c:v>
+              </c:pt>
+              <c:pt idx="1">
+                <c:v>2024</c:v>
+              </c:pt>
+              <c:pt idx="2">
+                <c:v>2025</c:v>
+              </c:pt>
+            </c:numLit>
+          </c:cat>
+          <c:val>
+            <c:numLit>
+              <c:formatCode>0.0</c:formatCode>
+              <c:ptCount val="3"/>
+              <c:pt idx="0">
+                <c:v>2.02</c:v>
+              </c:pt>
+              <c:pt idx="1">
+                <c:v>1.77</c:v>
+              </c:pt>
+              <c:pt idx="2">
+                <c:v>3.58</c:v>
+              </c:pt>
+            </c:numLit>
+          </c:val>
+          <c:smooth val="1"/>
+          <c:extLst>
+            <c:ext xmlns:c16="http://schemas.microsoft.com/office/drawing/2014/chart" uri="{C3380CC4-5D6E-409C-BE32-E72D297353CC}">
+              <c16:uniqueId val="{00000000-6DA6-48FF-A725-1702CBD0E698}"/>
+            </c:ext>
+          </c:extLst>
+        </c:ser>
+        <c:ser>
+          <c:idx val="1"/>
+          <c:order val="1"/>
+          <c:tx>
+            <c:v>Three-year mean</c:v>
+          </c:tx>
+          <c:spPr>
+            <a:ln w="28575">
+              <a:solidFill>
+                <a:srgbClr val="FF7F0E"/>
+              </a:solidFill>
+              <a:prstDash val="dash"/>
+            </a:ln>
+          </c:spPr>
+          <c:marker>
+            <c:symbol val="square"/>
+            <c:size val="8"/>
+          </c:marker>
+          <c:cat>
+            <c:numLit>
+              <c:formatCode>General</c:formatCode>
+              <c:ptCount val="3"/>
+              <c:pt idx="0">
+                <c:v>2023</c:v>
+              </c:pt>
+              <c:pt idx="1">
+                <c:v>2024</c:v>
+              </c:pt>
+              <c:pt idx="2">
+                <c:v>2025</c:v>
+              </c:pt>
+            </c:numLit>
+          </c:cat>
+          <c:val>
+            <c:numLit>
+              <c:formatCode>0.0</c:formatCode>
+              <c:ptCount val="3"/>
+              <c:pt idx="0">
+                <c:v>3.72</c:v>
+              </c:pt>
+              <c:pt idx="1">
+                <c:v>3.38</c:v>
+              </c:pt>
+              <c:pt idx="2">
+                <c:v>2.79</c:v>
+              </c:pt>
+            </c:numLit>
+          </c:val>
+          <c:smooth val="1"/>
+          <c:extLst>
+            <c:ext xmlns:c16="http://schemas.microsoft.com/office/drawing/2014/chart" uri="{C3380CC4-5D6E-409C-BE32-E72D297353CC}">
+              <c16:uniqueId val="{00000001-6DA6-48FF-A725-1702CBD0E698}"/>
+            </c:ext>
+          </c:extLst>
+        </c:ser>
+        <c:dLbls>
+          <c:showLegendKey val="0"/>
+          <c:showVal val="0"/>
+          <c:showCatName val="0"/>
+          <c:showSerName val="0"/>
+          <c:showPercent val="0"/>
+          <c:showBubbleSize val="0"/>
+        </c:dLbls>
+        <c:marker val="1"/>
+        <c:smooth val="0"/>
+        <c:axId val="48650112"/>
+        <c:axId val="48672768"/>
+      </c:lineChart>
+      <c:catAx>
+        <c:axId val="48650112"/>
+        <c:scaling>
+          <c:orientation val="minMax"/>
+        </c:scaling>
+        <c:delete val="0"/>
+        <c:axPos val="b"/>
+        <c:numFmt formatCode="General" sourceLinked="1"/>
+        <c:majorTickMark val="none"/>
+        <c:minorTickMark val="none"/>
+        <c:tickLblPos val="nextTo"/>
+        <c:spPr>
+          <a:ln w="9525">
+            <a:solidFill>
+              <a:srgbClr val="B8BCC4"/>
+            </a:solidFill>
+            <a:prstDash val="solid"/>
+          </a:ln>
+        </c:spPr>
+        <c:txPr>
+          <a:bodyPr anchorCtr="1"/>
+          <a:lstStyle/>
+          <a:p>
+            <a:pPr>
+              <a:defRPr sz="1200">
+                <a:solidFill>
+                  <a:srgbClr val="4C525B"/>
+                </a:solidFill>
+              </a:defRPr>
+            </a:pPr>
+            <a:endParaRPr lang="fr-FR"/>
+          </a:p>
+        </c:txPr>
+        <c:crossAx val="48672768"/>
+        <c:crosses val="autoZero"/>
+        <c:auto val="1"/>
+        <c:lblAlgn val="ctr"/>
+        <c:lblOffset val="100"/>
+        <c:noMultiLvlLbl val="0"/>
+      </c:catAx>
+      <c:valAx>
+        <c:axId val="48672768"/>
+        <c:scaling>
+          <c:orientation val="minMax"/>
+          <c:max val="4"/>
+          <c:min val="1"/>
+        </c:scaling>
+        <c:delete val="0"/>
+        <c:axPos val="l"/>
+        <c:majorGridlines>
+          <c:spPr>
+            <a:ln w="9525">
+              <a:solidFill>
+                <a:srgbClr val="E1E3E6"/>
+              </a:solidFill>
+              <a:prstDash val="solid"/>
+            </a:ln>
+          </c:spPr>
+        </c:majorGridlines>
+        <c:title>
+          <c:tx>
+            <c:rich>
+              <a:bodyPr/>
+              <a:lstStyle/>
+              <a:p>
+                <a:r>
+                  <a:rPr lang="fr-CA" sz="1200">
+                    <a:solidFill>
+                      <a:srgbClr val="4C525B"/>
+                    </a:solidFill>
+                  </a:rPr>
+                  <a:t>Annual growth (%)</a:t>
+                </a:r>
+              </a:p>
+            </c:rich>
+          </c:tx>
+          <c:overlay val="1"/>
+        </c:title>
+        <c:numFmt formatCode="0.0" sourceLinked="1"/>
+        <c:majorTickMark val="none"/>
+        <c:minorTickMark val="none"/>
+        <c:tickLblPos val="nextTo"/>
+        <c:spPr>
+          <a:ln w="9525">
+            <a:solidFill>
+              <a:srgbClr val="D4D4D4"/>
+            </a:solidFill>
+            <a:prstDash val="solid"/>
+          </a:ln>
+        </c:spPr>
+        <c:txPr>
+          <a:bodyPr anchorCtr="1"/>
+          <a:lstStyle/>
+          <a:p>
+            <a:pPr>
+              <a:defRPr sz="1200">
+                <a:solidFill>
+                  <a:srgbClr val="4C525B"/>
+                </a:solidFill>
+              </a:defRPr>
+            </a:pPr>
+            <a:endParaRPr lang="fr-FR"/>
+          </a:p>
+        </c:txPr>
+        <c:crossAx val="48650112"/>
+        <c:crosses val="autoZero"/>
+        <c:crossBetween val="between"/>
+        <c:majorUnit val="0.5"/>
+      </c:valAx>
+      <c:spPr>
+        <a:solidFill>
+          <a:srgbClr val="FFFFFF"/>
+        </a:solidFill>
+        <a:ln w="0">
+          <a:solidFill>
+            <a:srgbClr val="FFFFFF"/>
+          </a:solidFill>
+          <a:prstDash val="solid"/>
+        </a:ln>
+      </c:spPr>
+    </c:plotArea>
+    <c:legend>
+      <c:legendPos val="b"/>
+      <c:overlay val="0"/>
+      <c:txPr>
+        <a:bodyPr anchorCtr="1"/>
+        <a:lstStyle/>
+        <a:p>
+          <a:pPr>
+            <a:defRPr sz="1200">
+              <a:solidFill>
+                <a:srgbClr val="4C525B"/>
+              </a:solidFill>
+            </a:defRPr>
+          </a:pPr>
+          <a:endParaRPr lang="fr-FR"/>
+        </a:p>
+      </c:txPr>
+    </c:legend>
+    <c:plotVisOnly val="1"/>
+    <c:dispBlanksAs val="zero"/>
+    <c:showDLblsOverMax val="1"/>
+  </c:chart>
+  <c:spPr>
+    <a:solidFill>
+      <a:srgbClr val="FFFFFF"/>
+    </a:solidFill>
+    <a:ln w="0">
+      <a:solidFill>
+        <a:srgbClr val="FFFFFF"/>
+      </a:solidFill>
+      <a:prstDash val="solid"/>
+    </a:ln>
+  </c:spPr>
+</c:chartSpace>
+</file>
+
 <file path=ppt/notesMasters/notesMaster1.xml><?xml version="1.0" encoding="utf-8"?>
 <p:notesMaster xmlns:a="http://schemas.openxmlformats.org/drawingml/2006/main" xmlns:r="http://schemas.openxmlformats.org/officeDocument/2006/relationships" xmlns:p="http://schemas.openxmlformats.org/presentationml/2006/main">
   <p:cSld>
@@ -144,7 +1044,7 @@
       </p:grpSpPr>
       <p:sp>
         <p:nvSpPr>
-          <p:cNvPr id="2" name="Header Placeholder 1"/>
+          <p:cNvPr id="2" name="Header Placeholder"/>
           <p:cNvSpPr>
             <a:spLocks noGrp="1"/>
           </p:cNvSpPr>
@@ -153,64 +1053,44 @@
           </p:nvPr>
         </p:nvSpPr>
         <p:spPr>
-          <a:xfrm>
-            <a:off x="0" y="0"/>
-            <a:ext cx="2971800" cy="458788"/>
-          </a:xfrm>
           <a:prstGeom prst="rect">
             <a:avLst/>
           </a:prstGeom>
         </p:spPr>
         <p:txBody>
-          <a:bodyPr vert="horz" lIns="91440" tIns="45720" rIns="91440" bIns="45720" rtlCol="0"/>
-          <a:lstStyle>
-            <a:lvl1pPr algn="l">
-              <a:defRPr sz="1200"/>
-            </a:lvl1pPr>
-          </a:lstStyle>
-          <a:p>
-            <a:endParaRPr lang="fr-CA"/>
-          </a:p>
-        </p:txBody>
-      </p:sp>
-      <p:sp>
-        <p:nvSpPr>
-          <p:cNvPr id="3" name="Date Placeholder 2"/>
+          <a:bodyPr/>
+          <a:lstStyle/>
+          <a:p>
+            <a:endParaRPr/>
+          </a:p>
+        </p:txBody>
+      </p:sp>
+      <p:sp>
+        <p:nvSpPr>
+          <p:cNvPr id="3" name="Date Placeholder"/>
           <p:cNvSpPr>
             <a:spLocks noGrp="1"/>
           </p:cNvSpPr>
           <p:nvPr>
-            <p:ph type="dt" idx="1"/>
+            <p:ph type="dt" sz="quarter" idx="1"/>
           </p:nvPr>
         </p:nvSpPr>
         <p:spPr>
-          <a:xfrm>
-            <a:off x="3884613" y="0"/>
-            <a:ext cx="2971800" cy="458788"/>
-          </a:xfrm>
           <a:prstGeom prst="rect">
             <a:avLst/>
           </a:prstGeom>
         </p:spPr>
         <p:txBody>
-          <a:bodyPr vert="horz" lIns="91440" tIns="45720" rIns="91440" bIns="45720" rtlCol="0"/>
-          <a:lstStyle>
-            <a:lvl1pPr algn="r">
-              <a:defRPr sz="1200"/>
-            </a:lvl1pPr>
-          </a:lstStyle>
-          <a:p>
-            <a:fld id="{B8E74214-38DB-46C8-B296-B745488EBDA5}" type="datetimeFigureOut">
-              <a:rPr lang="fr-CA" smtClean="0"/>
-              <a:t>2026-10-04</a:t>
-            </a:fld>
-            <a:endParaRPr lang="fr-CA"/>
-          </a:p>
-        </p:txBody>
-      </p:sp>
-      <p:sp>
-        <p:nvSpPr>
-          <p:cNvPr id="4" name="Slide Image Placeholder 3"/>
+          <a:bodyPr/>
+          <a:lstStyle/>
+          <a:p>
+            <a:endParaRPr/>
+          </a:p>
+        </p:txBody>
+      </p:sp>
+      <p:sp>
+        <p:nvSpPr>
+          <p:cNvPr id="4" name="Slide Image Placeholder"/>
           <p:cNvSpPr>
             <a:spLocks noGrp="1" noRot="1" noChangeAspect="1"/>
           </p:cNvSpPr>
@@ -219,31 +1099,21 @@
           </p:nvPr>
         </p:nvSpPr>
         <p:spPr>
-          <a:xfrm>
-            <a:off x="685800" y="1143000"/>
-            <a:ext cx="5486400" cy="3086100"/>
-          </a:xfrm>
           <a:prstGeom prst="rect">
             <a:avLst/>
           </a:prstGeom>
-          <a:noFill/>
-          <a:ln w="12700">
-            <a:solidFill>
-              <a:prstClr val="black"/>
-            </a:solidFill>
-          </a:ln>
-        </p:spPr>
-        <p:txBody>
-          <a:bodyPr vert="horz" lIns="91440" tIns="45720" rIns="91440" bIns="45720" rtlCol="0" anchor="ctr"/>
-          <a:lstStyle/>
-          <a:p>
-            <a:endParaRPr lang="fr-CA"/>
-          </a:p>
-        </p:txBody>
-      </p:sp>
-      <p:sp>
-        <p:nvSpPr>
-          <p:cNvPr id="5" name="Notes Placeholder 4"/>
+        </p:spPr>
+        <p:txBody>
+          <a:bodyPr/>
+          <a:lstStyle/>
+          <a:p>
+            <a:endParaRPr/>
+          </a:p>
+        </p:txBody>
+      </p:sp>
+      <p:sp>
+        <p:nvSpPr>
+          <p:cNvPr id="5" name="Notes Placeholder"/>
           <p:cNvSpPr>
             <a:spLocks noGrp="1"/>
           </p:cNvSpPr>
@@ -252,58 +1122,21 @@
           </p:nvPr>
         </p:nvSpPr>
         <p:spPr>
-          <a:xfrm>
-            <a:off x="685800" y="4400550"/>
-            <a:ext cx="5486400" cy="3600450"/>
-          </a:xfrm>
           <a:prstGeom prst="rect">
             <a:avLst/>
           </a:prstGeom>
         </p:spPr>
         <p:txBody>
-          <a:bodyPr vert="horz" lIns="91440" tIns="45720" rIns="91440" bIns="45720" rtlCol="0"/>
-          <a:lstStyle/>
-          <a:p>
-            <a:pPr lvl="0"/>
-            <a:r>
-              <a:rPr lang="en-US"/>
-              <a:t>Click to edit Master text styles</a:t>
-            </a:r>
-          </a:p>
-          <a:p>
-            <a:pPr lvl="1"/>
-            <a:r>
-              <a:rPr lang="en-US"/>
-              <a:t>Second level</a:t>
-            </a:r>
-          </a:p>
-          <a:p>
-            <a:pPr lvl="2"/>
-            <a:r>
-              <a:rPr lang="en-US"/>
-              <a:t>Third level</a:t>
-            </a:r>
-          </a:p>
-          <a:p>
-            <a:pPr lvl="3"/>
-            <a:r>
-              <a:rPr lang="en-US"/>
-              <a:t>Fourth level</a:t>
-            </a:r>
-          </a:p>
-          <a:p>
-            <a:pPr lvl="4"/>
-            <a:r>
-              <a:rPr lang="en-US"/>
-              <a:t>Fifth level</a:t>
-            </a:r>
-            <a:endParaRPr lang="fr-CA"/>
-          </a:p>
-        </p:txBody>
-      </p:sp>
-      <p:sp>
-        <p:nvSpPr>
-          <p:cNvPr id="6" name="Footer Placeholder 5"/>
+          <a:bodyPr/>
+          <a:lstStyle/>
+          <a:p>
+            <a:endParaRPr/>
+          </a:p>
+        </p:txBody>
+      </p:sp>
+      <p:sp>
+        <p:nvSpPr>
+          <p:cNvPr id="6" name="Footer Placeholder"/>
           <p:cNvSpPr>
             <a:spLocks noGrp="1"/>
           </p:cNvSpPr>
@@ -312,29 +1145,21 @@
           </p:nvPr>
         </p:nvSpPr>
         <p:spPr>
-          <a:xfrm>
-            <a:off x="0" y="8685213"/>
-            <a:ext cx="2971800" cy="458787"/>
-          </a:xfrm>
           <a:prstGeom prst="rect">
             <a:avLst/>
           </a:prstGeom>
         </p:spPr>
         <p:txBody>
-          <a:bodyPr vert="horz" lIns="91440" tIns="45720" rIns="91440" bIns="45720" rtlCol="0" anchor="b"/>
-          <a:lstStyle>
-            <a:lvl1pPr algn="l">
-              <a:defRPr sz="1200"/>
-            </a:lvl1pPr>
-          </a:lstStyle>
-          <a:p>
-            <a:endParaRPr lang="fr-CA"/>
-          </a:p>
-        </p:txBody>
-      </p:sp>
-      <p:sp>
-        <p:nvSpPr>
-          <p:cNvPr id="7" name="Slide Number Placeholder 6"/>
+          <a:bodyPr/>
+          <a:lstStyle/>
+          <a:p>
+            <a:endParaRPr/>
+          </a:p>
+        </p:txBody>
+      </p:sp>
+      <p:sp>
+        <p:nvSpPr>
+          <p:cNvPr id="7" name="Slide Number Placeholder"/>
           <p:cNvSpPr>
             <a:spLocks noGrp="1"/>
           </p:cNvSpPr>
@@ -343,129 +1168,25 @@
           </p:nvPr>
         </p:nvSpPr>
         <p:spPr>
-          <a:xfrm>
-            <a:off x="3884613" y="8685213"/>
-            <a:ext cx="2971800" cy="458787"/>
-          </a:xfrm>
           <a:prstGeom prst="rect">
             <a:avLst/>
           </a:prstGeom>
         </p:spPr>
         <p:txBody>
-          <a:bodyPr vert="horz" lIns="91440" tIns="45720" rIns="91440" bIns="45720" rtlCol="0" anchor="b"/>
-          <a:lstStyle>
-            <a:lvl1pPr algn="r">
-              <a:defRPr sz="1200"/>
-            </a:lvl1pPr>
-          </a:lstStyle>
-          <a:p>
-            <a:fld id="{36DAE5E7-7154-4F07-BF90-BD24BDC96577}" type="slidenum">
-              <a:rPr lang="fr-CA" smtClean="0"/>
-              <a:t>‹#›</a:t>
-            </a:fld>
-            <a:endParaRPr lang="fr-CA"/>
+          <a:bodyPr/>
+          <a:lstStyle/>
+          <a:p>
+            <a:endParaRPr/>
           </a:p>
         </p:txBody>
       </p:sp>
     </p:spTree>
-    <p:extLst>
-      <p:ext uri="{BB962C8B-B14F-4D97-AF65-F5344CB8AC3E}">
-        <p14:creationId xmlns:p14="http://schemas.microsoft.com/office/powerpoint/2010/main" val="1717005937"/>
-      </p:ext>
-    </p:extLst>
   </p:cSld>
   <p:clrMap bg1="lt1" tx1="dk1" bg2="lt2" tx2="dk2" accent1="accent1" accent2="accent2" accent3="accent3" accent4="accent4" accent5="accent5" accent6="accent6" hlink="hlink" folHlink="folHlink"/>
   <p:notesStyle>
     <a:lvl1pPr marL="0" algn="l" defTabSz="914400" rtl="0" eaLnBrk="1" latinLnBrk="0" hangingPunct="1">
-      <a:defRPr sz="1200" kern="1200">
-        <a:solidFill>
-          <a:schemeClr val="tx1"/>
-        </a:solidFill>
-        <a:latin typeface="+mn-lt"/>
-        <a:ea typeface="+mn-ea"/>
-        <a:cs typeface="+mn-cs"/>
-      </a:defRPr>
+      <a:defRPr sz="1200" kern="1200"/>
     </a:lvl1pPr>
-    <a:lvl2pPr marL="457200" algn="l" defTabSz="914400" rtl="0" eaLnBrk="1" latinLnBrk="0" hangingPunct="1">
-      <a:defRPr sz="1200" kern="1200">
-        <a:solidFill>
-          <a:schemeClr val="tx1"/>
-        </a:solidFill>
-        <a:latin typeface="+mn-lt"/>
-        <a:ea typeface="+mn-ea"/>
-        <a:cs typeface="+mn-cs"/>
-      </a:defRPr>
-    </a:lvl2pPr>
-    <a:lvl3pPr marL="914400" algn="l" defTabSz="914400" rtl="0" eaLnBrk="1" latinLnBrk="0" hangingPunct="1">
-      <a:defRPr sz="1200" kern="1200">
-        <a:solidFill>
-          <a:schemeClr val="tx1"/>
-        </a:solidFill>
-        <a:latin typeface="+mn-lt"/>
-        <a:ea typeface="+mn-ea"/>
-        <a:cs typeface="+mn-cs"/>
-      </a:defRPr>
-    </a:lvl3pPr>
-    <a:lvl4pPr marL="1371600" algn="l" defTabSz="914400" rtl="0" eaLnBrk="1" latinLnBrk="0" hangingPunct="1">
-      <a:defRPr sz="1200" kern="1200">
-        <a:solidFill>
-          <a:schemeClr val="tx1"/>
-        </a:solidFill>
-        <a:latin typeface="+mn-lt"/>
-        <a:ea typeface="+mn-ea"/>
-        <a:cs typeface="+mn-cs"/>
-      </a:defRPr>
-    </a:lvl4pPr>
-    <a:lvl5pPr marL="1828800" algn="l" defTabSz="914400" rtl="0" eaLnBrk="1" latinLnBrk="0" hangingPunct="1">
-      <a:defRPr sz="1200" kern="1200">
-        <a:solidFill>
-          <a:schemeClr val="tx1"/>
-        </a:solidFill>
-        <a:latin typeface="+mn-lt"/>
-        <a:ea typeface="+mn-ea"/>
-        <a:cs typeface="+mn-cs"/>
-      </a:defRPr>
-    </a:lvl5pPr>
-    <a:lvl6pPr marL="2286000" algn="l" defTabSz="914400" rtl="0" eaLnBrk="1" latinLnBrk="0" hangingPunct="1">
-      <a:defRPr sz="1200" kern="1200">
-        <a:solidFill>
-          <a:schemeClr val="tx1"/>
-        </a:solidFill>
-        <a:latin typeface="+mn-lt"/>
-        <a:ea typeface="+mn-ea"/>
-        <a:cs typeface="+mn-cs"/>
-      </a:defRPr>
-    </a:lvl6pPr>
-    <a:lvl7pPr marL="2743200" algn="l" defTabSz="914400" rtl="0" eaLnBrk="1" latinLnBrk="0" hangingPunct="1">
-      <a:defRPr sz="1200" kern="1200">
-        <a:solidFill>
-          <a:schemeClr val="tx1"/>
-        </a:solidFill>
-        <a:latin typeface="+mn-lt"/>
-        <a:ea typeface="+mn-ea"/>
-        <a:cs typeface="+mn-cs"/>
-      </a:defRPr>
-    </a:lvl7pPr>
-    <a:lvl8pPr marL="3200400" algn="l" defTabSz="914400" rtl="0" eaLnBrk="1" latinLnBrk="0" hangingPunct="1">
-      <a:defRPr sz="1200" kern="1200">
-        <a:solidFill>
-          <a:schemeClr val="tx1"/>
-        </a:solidFill>
-        <a:latin typeface="+mn-lt"/>
-        <a:ea typeface="+mn-ea"/>
-        <a:cs typeface="+mn-cs"/>
-      </a:defRPr>
-    </a:lvl8pPr>
-    <a:lvl9pPr marL="3657600" algn="l" defTabSz="914400" rtl="0" eaLnBrk="1" latinLnBrk="0" hangingPunct="1">
-      <a:defRPr sz="1200" kern="1200">
-        <a:solidFill>
-          <a:schemeClr val="tx1"/>
-        </a:solidFill>
-        <a:latin typeface="+mn-lt"/>
-        <a:ea typeface="+mn-ea"/>
-        <a:cs typeface="+mn-cs"/>
-      </a:defRPr>
-    </a:lvl9pPr>
   </p:notesStyle>
 </p:notesMaster>
 </file>
@@ -515,13 +1236,11 @@
           <a:lstStyle/>
           <a:p>
             <a:r>
-              <a:rPr lang="en-US"/>
               <a:t>We estimate the 2026 increase in effective rent for Collection Equinoxe. The method is deliberately simple so every step can be checked and explained.
 [Sources]
 - Internal analysis: rent_forecasting.ipynb
 - Challenge brief: data/consignes.pdf</a:t>
             </a:r>
-            <a:endParaRPr lang="fr-CA"/>
           </a:p>
         </p:txBody>
       </p:sp>
@@ -532,7 +1251,7 @@
             <a:spLocks noGrp="1"/>
           </p:cNvSpPr>
           <p:nvPr>
-            <p:ph type="sldNum" sz="quarter" idx="5"/>
+            <p:ph type="sldNum" idx="5"/>
           </p:nvPr>
         </p:nvSpPr>
         <p:spPr/>
@@ -540,20 +1259,11 @@
           <a:bodyPr/>
           <a:lstStyle/>
           <a:p>
-            <a:fld id="{36DAE5E7-7154-4F07-BF90-BD24BDC96577}" type="slidenum">
-              <a:rPr lang="fr-CA" smtClean="0"/>
-              <a:t>1</a:t>
-            </a:fld>
-            <a:endParaRPr lang="fr-CA"/>
+            <a:endParaRPr/>
           </a:p>
         </p:txBody>
       </p:sp>
     </p:spTree>
-    <p:extLst>
-      <p:ext uri="{BB962C8B-B14F-4D97-AF65-F5344CB8AC3E}">
-        <p14:creationId xmlns:p14="http://schemas.microsoft.com/office/powerpoint/2010/main" val="1519971386"/>
-      </p:ext>
-    </p:extLst>
   </p:cSld>
   <p:clrMapOvr>
     <a:masterClrMapping/>
@@ -606,12 +1316,10 @@
           <a:lstStyle/>
           <a:p>
             <a:r>
-              <a:rPr lang="en-US"/>
               <a:t>The buildings and unit mix changed over time, so the median of all leases is not a clean measure of rent growth. The 2023 example shows the size of that bias. We therefore match the same apartment across consecutive leases.
 [Sources]
 - Internal CRM analysis: rent_forecasting.ipynb, composition and same-unit sections</a:t>
             </a:r>
-            <a:endParaRPr lang="fr-CA"/>
           </a:p>
         </p:txBody>
       </p:sp>
@@ -622,7 +1330,7 @@
             <a:spLocks noGrp="1"/>
           </p:cNvSpPr>
           <p:nvPr>
-            <p:ph type="sldNum" sz="quarter" idx="5"/>
+            <p:ph type="sldNum" idx="5"/>
           </p:nvPr>
         </p:nvSpPr>
         <p:spPr/>
@@ -630,20 +1338,11 @@
           <a:bodyPr/>
           <a:lstStyle/>
           <a:p>
-            <a:fld id="{36DAE5E7-7154-4F07-BF90-BD24BDC96577}" type="slidenum">
-              <a:rPr lang="fr-CA" smtClean="0"/>
-              <a:t>2</a:t>
-            </a:fld>
-            <a:endParaRPr lang="fr-CA"/>
+            <a:endParaRPr/>
           </a:p>
         </p:txBody>
       </p:sp>
     </p:spTree>
-    <p:extLst>
-      <p:ext uri="{BB962C8B-B14F-4D97-AF65-F5344CB8AC3E}">
-        <p14:creationId xmlns:p14="http://schemas.microsoft.com/office/powerpoint/2010/main" val="1116451433"/>
-      </p:ext>
-    </p:extLst>
   </p:cSld>
   <p:clrMapOvr>
     <a:masterClrMapping/>
@@ -696,13 +1395,11 @@
           <a:lstStyle/>
           <a:p>
             <a:r>
-              <a:rPr lang="en-US"/>
               <a:t>The unit key and time-gap filter come directly from the challenge method. Effective rent is the target because it includes concessions. The same helper is used for the final estimate and every historical backtest, which prevents the two functions from drifting apart.
 [Sources]
 - Method and function definitions: rent_forecasting.ipynb
 - Official starter and challenge brief: starter.ipynb and data/consignes.pdf</a:t>
             </a:r>
-            <a:endParaRPr lang="fr-CA"/>
           </a:p>
         </p:txBody>
       </p:sp>
@@ -713,7 +1410,7 @@
             <a:spLocks noGrp="1"/>
           </p:cNvSpPr>
           <p:nvPr>
-            <p:ph type="sldNum" sz="quarter" idx="5"/>
+            <p:ph type="sldNum" idx="5"/>
           </p:nvPr>
         </p:nvSpPr>
         <p:spPr/>
@@ -721,20 +1418,11 @@
           <a:bodyPr/>
           <a:lstStyle/>
           <a:p>
-            <a:fld id="{36DAE5E7-7154-4F07-BF90-BD24BDC96577}" type="slidenum">
-              <a:rPr lang="fr-CA" smtClean="0"/>
-              <a:t>3</a:t>
-            </a:fld>
-            <a:endParaRPr lang="fr-CA"/>
+            <a:endParaRPr/>
           </a:p>
         </p:txBody>
       </p:sp>
     </p:spTree>
-    <p:extLst>
-      <p:ext uri="{BB962C8B-B14F-4D97-AF65-F5344CB8AC3E}">
-        <p14:creationId xmlns:p14="http://schemas.microsoft.com/office/powerpoint/2010/main" val="933128118"/>
-      </p:ext>
-    </p:extLst>
   </p:cSld>
   <p:clrMapOvr>
     <a:masterClrMapping/>
@@ -787,12 +1475,21 @@
           <a:lstStyle/>
           <a:p>
             <a:r>
-              <a:rPr lang="en-US"/>
-              <a:t>Concessions became more common and larger in 2024 and 2025. Turnover growth was also higher than renewal growth in 2025. This is why the forecast uses effective rent and reports the two lease types separately.
-[Sources]
-- Internal CRM analysis: rent_forecasting.ipynb, concessions and renewal/turnover sections</a:t>
-            </a:r>
-            <a:endParaRPr lang="fr-CA"/>
+              <a:t>This is the main internal trend used by the forecast. Growth fell in 2023 and 2024, then recovered to 3.58% in 2025. The rebound matters, but one stronger year is not enough to use 2025 alone as the forecast.</a:t>
+            </a:r>
+          </a:p>
+          <a:p>
+            <a:endParaRPr/>
+          </a:p>
+          <a:p>
+            <a:r>
+              <a:t>[Sources]</a:t>
+            </a:r>
+          </a:p>
+          <a:p>
+            <a:r>
+              <a:t>- Internal CRM analysis: rent_forecasting.ipynb, historical target section</a:t>
+            </a:r>
           </a:p>
         </p:txBody>
       </p:sp>
@@ -803,7 +1500,7 @@
             <a:spLocks noGrp="1"/>
           </p:cNvSpPr>
           <p:nvPr>
-            <p:ph type="sldNum" sz="quarter" idx="5"/>
+            <p:ph type="sldNum" idx="5"/>
           </p:nvPr>
         </p:nvSpPr>
         <p:spPr/>
@@ -811,20 +1508,11 @@
           <a:bodyPr/>
           <a:lstStyle/>
           <a:p>
-            <a:fld id="{36DAE5E7-7154-4F07-BF90-BD24BDC96577}" type="slidenum">
-              <a:rPr lang="fr-CA" smtClean="0"/>
-              <a:t>4</a:t>
-            </a:fld>
-            <a:endParaRPr lang="fr-CA"/>
+            <a:endParaRPr/>
           </a:p>
         </p:txBody>
       </p:sp>
     </p:spTree>
-    <p:extLst>
-      <p:ext uri="{BB962C8B-B14F-4D97-AF65-F5344CB8AC3E}">
-        <p14:creationId xmlns:p14="http://schemas.microsoft.com/office/powerpoint/2010/main" val="3601816117"/>
-      </p:ext>
-    </p:extLst>
   </p:cSld>
   <p:clrMapOvr>
     <a:masterClrMapping/>
@@ -877,15 +1565,10 @@
           <a:lstStyle/>
           <a:p>
             <a:r>
-              <a:rPr lang="en-US"/>
-              <a:t>The external series confirm that market rents and rent inflation were still rising. Montreal vacancy also moved from 1.5% in 2023 to 2.9% in 2025, which points to some easing. The Met is treated separately and, with first residential occupancy in 2022, is generally exempt from Ontario's guideline subject to occupancy records.
+              <a:t>Concessions became more common and larger in 2024 and 2025. Turnover growth was also higher than renewal growth in 2025. This is why the forecast uses effective rent and reports the two lease types separately.
 [Sources]
-- CMHC Rental Market Survey tables: https://www.cmhc-schl.gc.ca/professionals/housing-markets-data-and-research/housing-data-statistics-sources-datasets
-- Statistics Canada Table 18-10-0005-01: https://doi.org/10.25318/1810000501-eng
-- Ontario residential rent increases: https://www.ontario.ca/page/residential-rent-increases
-- Quebec TAL guidance: https://www.tal.gouv.qc.ca/fr/reconduction-du-bail-et-fixation-de-loyer/pourcentages-applicables-aux-criteres-de-fixation-de-loyer</a:t>
-            </a:r>
-            <a:endParaRPr lang="fr-CA"/>
+- Internal CRM analysis: rent_forecasting.ipynb, concessions and renewal/turnover sections</a:t>
+            </a:r>
           </a:p>
         </p:txBody>
       </p:sp>
@@ -896,7 +1579,7 @@
             <a:spLocks noGrp="1"/>
           </p:cNvSpPr>
           <p:nvPr>
-            <p:ph type="sldNum" sz="quarter" idx="5"/>
+            <p:ph type="sldNum" idx="5"/>
           </p:nvPr>
         </p:nvSpPr>
         <p:spPr/>
@@ -904,20 +1587,11 @@
           <a:bodyPr/>
           <a:lstStyle/>
           <a:p>
-            <a:fld id="{36DAE5E7-7154-4F07-BF90-BD24BDC96577}" type="slidenum">
-              <a:rPr lang="fr-CA" smtClean="0"/>
-              <a:t>5</a:t>
-            </a:fld>
-            <a:endParaRPr lang="fr-CA"/>
+            <a:endParaRPr/>
           </a:p>
         </p:txBody>
       </p:sp>
     </p:spTree>
-    <p:extLst>
-      <p:ext uri="{BB962C8B-B14F-4D97-AF65-F5344CB8AC3E}">
-        <p14:creationId xmlns:p14="http://schemas.microsoft.com/office/powerpoint/2010/main" val="1787717435"/>
-      </p:ext>
-    </p:extLst>
   </p:cSld>
   <p:clrMapOvr>
     <a:masterClrMapping/>
@@ -970,12 +1644,36 @@
           <a:lstStyle/>
           <a:p>
             <a:r>
-              <a:rPr lang="en-US"/>
-              <a:t>The three-year trailing mean produced a 2.46% forecast and slightly outperformed one-year persistence. The 1.09% to 3.82% range is the central estimate plus or minus the backtest MAE. It is a planning range, not a confidence interval.
-[Sources]
-- Forecast and backtest: rent_forecasting.ipynb</a:t>
-            </a:r>
-            <a:endParaRPr lang="fr-CA"/>
+              <a:t>CMHC shows strong published rent growth, but Montréal vacancy also rose from 1.5% to 2.9%. We therefore use the market data as a check rather than copying its growth rate. The Met is treated separately: it first opened in 2022, is generally exempt from Ontario's guideline, and has only two years of matched lease history.</a:t>
+            </a:r>
+          </a:p>
+          <a:p>
+            <a:endParaRPr/>
+          </a:p>
+          <a:p>
+            <a:r>
+              <a:t>[Sources]</a:t>
+            </a:r>
+          </a:p>
+          <a:p>
+            <a:r>
+              <a:t>- CMHC Rental Market Survey tables: https://www.cmhc-schl.gc.ca/professionals/housing-markets-data-and-research/housing-data-statistics-sources-datasets</a:t>
+            </a:r>
+          </a:p>
+          <a:p>
+            <a:r>
+              <a:t>- Statistics Canada Table 18-10-0005-01: https://doi.org/10.25318/1810000501-eng</a:t>
+            </a:r>
+          </a:p>
+          <a:p>
+            <a:r>
+              <a:t>- Ontario residential rent increases: https://www.ontario.ca/page/residential-rent-increases</a:t>
+            </a:r>
+          </a:p>
+          <a:p>
+            <a:r>
+              <a:t>- Quebec TAL guidance: https://www.tal.gouv.qc.ca/fr/reconduction-du-bail-et-fixation-de-loyer/pourcentages-applicables-aux-criteres-de-fixation-de-loyer</a:t>
+            </a:r>
           </a:p>
         </p:txBody>
       </p:sp>
@@ -986,7 +1684,7 @@
             <a:spLocks noGrp="1"/>
           </p:cNvSpPr>
           <p:nvPr>
-            <p:ph type="sldNum" sz="quarter" idx="5"/>
+            <p:ph type="sldNum" idx="5"/>
           </p:nvPr>
         </p:nvSpPr>
         <p:spPr/>
@@ -994,20 +1692,101 @@
           <a:bodyPr/>
           <a:lstStyle/>
           <a:p>
-            <a:fld id="{36DAE5E7-7154-4F07-BF90-BD24BDC96577}" type="slidenum">
-              <a:rPr lang="fr-CA" smtClean="0"/>
-              <a:t>6</a:t>
-            </a:fld>
-            <a:endParaRPr lang="fr-CA"/>
+            <a:endParaRPr/>
           </a:p>
         </p:txBody>
       </p:sp>
     </p:spTree>
-    <p:extLst>
-      <p:ext uri="{BB962C8B-B14F-4D97-AF65-F5344CB8AC3E}">
-        <p14:creationId xmlns:p14="http://schemas.microsoft.com/office/powerpoint/2010/main" val="2108892753"/>
-      </p:ext>
-    </p:extLst>
+  </p:cSld>
+  <p:clrMapOvr>
+    <a:masterClrMapping/>
+  </p:clrMapOvr>
+</p:notes>
+</file>
+
+<file path=ppt/notesSlides/notesSlide7.xml><?xml version="1.0" encoding="utf-8"?>
+<p:notes xmlns:a="http://schemas.openxmlformats.org/drawingml/2006/main" xmlns:r="http://schemas.openxmlformats.org/officeDocument/2006/relationships" xmlns:p="http://schemas.openxmlformats.org/presentationml/2006/main">
+  <p:cSld>
+    <p:spTree>
+      <p:nvGrpSpPr>
+        <p:cNvPr id="1" name=""/>
+        <p:cNvGrpSpPr/>
+        <p:nvPr/>
+      </p:nvGrpSpPr>
+      <p:grpSpPr>
+        <a:xfrm>
+          <a:off x="0" y="0"/>
+          <a:ext cx="0" cy="0"/>
+          <a:chOff x="0" y="0"/>
+          <a:chExt cx="0" cy="0"/>
+        </a:xfrm>
+      </p:grpSpPr>
+      <p:sp>
+        <p:nvSpPr>
+          <p:cNvPr id="2" name="Slide Image Placeholder 1"/>
+          <p:cNvSpPr>
+            <a:spLocks noGrp="1" noRot="1" noChangeAspect="1"/>
+          </p:cNvSpPr>
+          <p:nvPr>
+            <p:ph type="sldImg"/>
+          </p:nvPr>
+        </p:nvSpPr>
+        <p:spPr/>
+      </p:sp>
+      <p:sp>
+        <p:nvSpPr>
+          <p:cNvPr id="3" name="Notes Placeholder 2"/>
+          <p:cNvSpPr>
+            <a:spLocks noGrp="1"/>
+          </p:cNvSpPr>
+          <p:nvPr>
+            <p:ph type="body" idx="1"/>
+          </p:nvPr>
+        </p:nvSpPr>
+        <p:spPr/>
+        <p:txBody>
+          <a:bodyPr/>
+          <a:lstStyle/>
+          <a:p>
+            <a:r>
+              <a:t>The model is deliberately simple: it averages the previous three annual results. Across the three available backtest years, its mean absolute error was 1.36 percentage points and it slightly outperformed one-year persistence. The final 2.46% estimate is the average of 2023, 2024, and 2025. The range is for planning, not a confidence interval.</a:t>
+            </a:r>
+          </a:p>
+          <a:p>
+            <a:endParaRPr/>
+          </a:p>
+          <a:p>
+            <a:r>
+              <a:t>[Sources]</a:t>
+            </a:r>
+          </a:p>
+          <a:p>
+            <a:r>
+              <a:t>- Forecast and backtest: rent_forecasting.ipynb</a:t>
+            </a:r>
+          </a:p>
+        </p:txBody>
+      </p:sp>
+      <p:sp>
+        <p:nvSpPr>
+          <p:cNvPr id="4" name="Slide Number Placeholder 3"/>
+          <p:cNvSpPr>
+            <a:spLocks noGrp="1"/>
+          </p:cNvSpPr>
+          <p:nvPr>
+            <p:ph type="sldNum" idx="5"/>
+          </p:nvPr>
+        </p:nvSpPr>
+        <p:spPr/>
+        <p:txBody>
+          <a:bodyPr/>
+          <a:lstStyle/>
+          <a:p>
+            <a:endParaRPr/>
+          </a:p>
+        </p:txBody>
+      </p:sp>
+    </p:spTree>
   </p:cSld>
   <p:clrMapOvr>
     <a:masterClrMapping/>
@@ -1058,15 +1837,14 @@
           <a:bodyPr anchor="b"/>
           <a:lstStyle>
             <a:lvl1pPr algn="ctr">
+              <a:buNone/>
               <a:defRPr sz="6000"/>
             </a:lvl1pPr>
           </a:lstStyle>
           <a:p>
             <a:r>
-              <a:rPr lang="en-US"/>
               <a:t>Click to edit Master title style</a:t>
             </a:r>
-            <a:endParaRPr lang="fr-CA"/>
           </a:p>
         </p:txBody>
       </p:sp>
@@ -1134,10 +1912,8 @@
           </a:lstStyle>
           <a:p>
             <a:r>
-              <a:rPr lang="en-US"/>
               <a:t>Click to edit Master subtitle style</a:t>
             </a:r>
-            <a:endParaRPr lang="fr-CA"/>
           </a:p>
         </p:txBody>
       </p:sp>
@@ -1154,7 +1930,7 @@
             <a:spLocks noGrp="1"/>
           </p:cNvSpPr>
           <p:nvPr>
-            <p:ph type="dt" sz="half" idx="10"/>
+            <p:ph type="dt" idx="10"/>
           </p:nvPr>
         </p:nvSpPr>
         <p:spPr/>
@@ -1163,10 +1939,9 @@
           <a:lstStyle/>
           <a:p>
             <a:fld id="{67190033-2F3D-4D35-BAB2-033E00903AF8}" type="datetimeFigureOut">
-              <a:rPr lang="fr-CA" smtClean="0"/>
-              <a:t>2026-10-04</a:t>
+              <a:t>04/10/2026</a:t>
             </a:fld>
-            <a:endParaRPr lang="fr-CA"/>
+            <a:endParaRPr/>
           </a:p>
         </p:txBody>
       </p:sp>
@@ -1183,7 +1958,7 @@
             <a:spLocks noGrp="1"/>
           </p:cNvSpPr>
           <p:nvPr>
-            <p:ph type="ftr" sz="quarter" idx="11"/>
+            <p:ph type="ftr" idx="11"/>
           </p:nvPr>
         </p:nvSpPr>
         <p:spPr/>
@@ -1191,7 +1966,7 @@
           <a:bodyPr/>
           <a:lstStyle/>
           <a:p>
-            <a:endParaRPr lang="fr-CA"/>
+            <a:endParaRPr/>
           </a:p>
         </p:txBody>
       </p:sp>
@@ -1208,7 +1983,7 @@
             <a:spLocks noGrp="1"/>
           </p:cNvSpPr>
           <p:nvPr>
-            <p:ph type="sldNum" sz="quarter" idx="12"/>
+            <p:ph type="sldNum" idx="12"/>
           </p:nvPr>
         </p:nvSpPr>
         <p:spPr/>
@@ -1217,19 +1992,13 @@
           <a:lstStyle/>
           <a:p>
             <a:fld id="{98CF6C54-7381-4F9B-8B8C-BE1C669C65DF}" type="slidenum">
-              <a:rPr lang="fr-CA" smtClean="0"/>
               <a:t>‹#›</a:t>
             </a:fld>
-            <a:endParaRPr lang="fr-CA"/>
+            <a:endParaRPr/>
           </a:p>
         </p:txBody>
       </p:sp>
     </p:spTree>
-    <p:extLst>
-      <p:ext uri="{BB962C8B-B14F-4D97-AF65-F5344CB8AC3E}">
-        <p14:creationId xmlns:p14="http://schemas.microsoft.com/office/powerpoint/2010/main" val="2855819720"/>
-      </p:ext>
-    </p:extLst>
   </p:cSld>
   <p:clrMapOvr>
     <a:masterClrMapping/>
@@ -1276,10 +2045,8 @@
           <a:lstStyle/>
           <a:p>
             <a:r>
-              <a:rPr lang="en-US"/>
               <a:t>Click to edit Master title style</a:t>
             </a:r>
-            <a:endParaRPr lang="fr-CA"/>
           </a:p>
         </p:txBody>
       </p:sp>
@@ -1296,7 +2063,7 @@
             <a:spLocks noGrp="1"/>
           </p:cNvSpPr>
           <p:nvPr>
-            <p:ph type="body" orient="vert" idx="1"/>
+            <p:ph type="body" idx="1"/>
           </p:nvPr>
         </p:nvSpPr>
         <p:spPr/>
@@ -1304,40 +2071,44 @@
           <a:bodyPr vert="eaVert"/>
           <a:lstStyle/>
           <a:p>
-            <a:pPr lvl="0"/>
-            <a:r>
-              <a:rPr lang="en-US"/>
+            <a:pPr lvl="0">
+              <a:buNone/>
+            </a:pPr>
+            <a:r>
               <a:t>Click to edit Master text styles</a:t>
             </a:r>
           </a:p>
           <a:p>
-            <a:pPr lvl="1"/>
-            <a:r>
-              <a:rPr lang="en-US"/>
+            <a:pPr lvl="1">
+              <a:buNone/>
+            </a:pPr>
+            <a:r>
               <a:t>Second level</a:t>
             </a:r>
           </a:p>
           <a:p>
-            <a:pPr lvl="2"/>
-            <a:r>
-              <a:rPr lang="en-US"/>
+            <a:pPr lvl="2">
+              <a:buNone/>
+            </a:pPr>
+            <a:r>
               <a:t>Third level</a:t>
             </a:r>
           </a:p>
           <a:p>
-            <a:pPr lvl="3"/>
-            <a:r>
-              <a:rPr lang="en-US"/>
+            <a:pPr lvl="3">
+              <a:buNone/>
+            </a:pPr>
+            <a:r>
               <a:t>Fourth level</a:t>
             </a:r>
           </a:p>
           <a:p>
-            <a:pPr lvl="4"/>
-            <a:r>
-              <a:rPr lang="en-US"/>
+            <a:pPr lvl="4">
+              <a:buNone/>
+            </a:pPr>
+            <a:r>
               <a:t>Fifth level</a:t>
             </a:r>
-            <a:endParaRPr lang="fr-CA"/>
           </a:p>
         </p:txBody>
       </p:sp>
@@ -1354,7 +2125,7 @@
             <a:spLocks noGrp="1"/>
           </p:cNvSpPr>
           <p:nvPr>
-            <p:ph type="dt" sz="half" idx="10"/>
+            <p:ph type="dt" idx="10"/>
           </p:nvPr>
         </p:nvSpPr>
         <p:spPr/>
@@ -1363,10 +2134,9 @@
           <a:lstStyle/>
           <a:p>
             <a:fld id="{67190033-2F3D-4D35-BAB2-033E00903AF8}" type="datetimeFigureOut">
-              <a:rPr lang="fr-CA" smtClean="0"/>
-              <a:t>2026-10-04</a:t>
+              <a:t>04/10/2026</a:t>
             </a:fld>
-            <a:endParaRPr lang="fr-CA"/>
+            <a:endParaRPr/>
           </a:p>
         </p:txBody>
       </p:sp>
@@ -1383,7 +2153,7 @@
             <a:spLocks noGrp="1"/>
           </p:cNvSpPr>
           <p:nvPr>
-            <p:ph type="ftr" sz="quarter" idx="11"/>
+            <p:ph type="ftr" idx="11"/>
           </p:nvPr>
         </p:nvSpPr>
         <p:spPr/>
@@ -1391,7 +2161,7 @@
           <a:bodyPr/>
           <a:lstStyle/>
           <a:p>
-            <a:endParaRPr lang="fr-CA"/>
+            <a:endParaRPr/>
           </a:p>
         </p:txBody>
       </p:sp>
@@ -1408,7 +2178,7 @@
             <a:spLocks noGrp="1"/>
           </p:cNvSpPr>
           <p:nvPr>
-            <p:ph type="sldNum" sz="quarter" idx="12"/>
+            <p:ph type="sldNum" idx="12"/>
           </p:nvPr>
         </p:nvSpPr>
         <p:spPr/>
@@ -1417,19 +2187,13 @@
           <a:lstStyle/>
           <a:p>
             <a:fld id="{98CF6C54-7381-4F9B-8B8C-BE1C669C65DF}" type="slidenum">
-              <a:rPr lang="fr-CA" smtClean="0"/>
               <a:t>‹#›</a:t>
             </a:fld>
-            <a:endParaRPr lang="fr-CA"/>
+            <a:endParaRPr/>
           </a:p>
         </p:txBody>
       </p:sp>
     </p:spTree>
-    <p:extLst>
-      <p:ext uri="{BB962C8B-B14F-4D97-AF65-F5344CB8AC3E}">
-        <p14:creationId xmlns:p14="http://schemas.microsoft.com/office/powerpoint/2010/main" val="3477114161"/>
-      </p:ext>
-    </p:extLst>
   </p:cSld>
   <p:clrMapOvr>
     <a:masterClrMapping/>
@@ -1467,7 +2231,7 @@
             <a:spLocks noGrp="1"/>
           </p:cNvSpPr>
           <p:nvPr>
-            <p:ph type="title" orient="vert"/>
+            <p:ph type="title"/>
           </p:nvPr>
         </p:nvSpPr>
         <p:spPr>
@@ -1481,10 +2245,8 @@
           <a:lstStyle/>
           <a:p>
             <a:r>
-              <a:rPr lang="en-US"/>
               <a:t>Click to edit Master title style</a:t>
             </a:r>
-            <a:endParaRPr lang="fr-CA"/>
           </a:p>
         </p:txBody>
       </p:sp>
@@ -1501,7 +2263,7 @@
             <a:spLocks noGrp="1"/>
           </p:cNvSpPr>
           <p:nvPr>
-            <p:ph type="body" orient="vert" idx="1"/>
+            <p:ph type="body" idx="1"/>
           </p:nvPr>
         </p:nvSpPr>
         <p:spPr>
@@ -1514,40 +2276,44 @@
           <a:bodyPr vert="eaVert"/>
           <a:lstStyle/>
           <a:p>
-            <a:pPr lvl="0"/>
-            <a:r>
-              <a:rPr lang="en-US"/>
+            <a:pPr lvl="0">
+              <a:buNone/>
+            </a:pPr>
+            <a:r>
               <a:t>Click to edit Master text styles</a:t>
             </a:r>
           </a:p>
           <a:p>
-            <a:pPr lvl="1"/>
-            <a:r>
-              <a:rPr lang="en-US"/>
+            <a:pPr lvl="1">
+              <a:buNone/>
+            </a:pPr>
+            <a:r>
               <a:t>Second level</a:t>
             </a:r>
           </a:p>
           <a:p>
-            <a:pPr lvl="2"/>
-            <a:r>
-              <a:rPr lang="en-US"/>
+            <a:pPr lvl="2">
+              <a:buNone/>
+            </a:pPr>
+            <a:r>
               <a:t>Third level</a:t>
             </a:r>
           </a:p>
           <a:p>
-            <a:pPr lvl="3"/>
-            <a:r>
-              <a:rPr lang="en-US"/>
+            <a:pPr lvl="3">
+              <a:buNone/>
+            </a:pPr>
+            <a:r>
               <a:t>Fourth level</a:t>
             </a:r>
           </a:p>
           <a:p>
-            <a:pPr lvl="4"/>
-            <a:r>
-              <a:rPr lang="en-US"/>
+            <a:pPr lvl="4">
+              <a:buNone/>
+            </a:pPr>
+            <a:r>
               <a:t>Fifth level</a:t>
             </a:r>
-            <a:endParaRPr lang="fr-CA"/>
           </a:p>
         </p:txBody>
       </p:sp>
@@ -1564,7 +2330,7 @@
             <a:spLocks noGrp="1"/>
           </p:cNvSpPr>
           <p:nvPr>
-            <p:ph type="dt" sz="half" idx="10"/>
+            <p:ph type="dt" idx="10"/>
           </p:nvPr>
         </p:nvSpPr>
         <p:spPr/>
@@ -1573,10 +2339,9 @@
           <a:lstStyle/>
           <a:p>
             <a:fld id="{67190033-2F3D-4D35-BAB2-033E00903AF8}" type="datetimeFigureOut">
-              <a:rPr lang="fr-CA" smtClean="0"/>
-              <a:t>2026-10-04</a:t>
+              <a:t>04/10/2026</a:t>
             </a:fld>
-            <a:endParaRPr lang="fr-CA"/>
+            <a:endParaRPr/>
           </a:p>
         </p:txBody>
       </p:sp>
@@ -1593,7 +2358,7 @@
             <a:spLocks noGrp="1"/>
           </p:cNvSpPr>
           <p:nvPr>
-            <p:ph type="ftr" sz="quarter" idx="11"/>
+            <p:ph type="ftr" idx="11"/>
           </p:nvPr>
         </p:nvSpPr>
         <p:spPr/>
@@ -1601,7 +2366,7 @@
           <a:bodyPr/>
           <a:lstStyle/>
           <a:p>
-            <a:endParaRPr lang="fr-CA"/>
+            <a:endParaRPr/>
           </a:p>
         </p:txBody>
       </p:sp>
@@ -1618,7 +2383,7 @@
             <a:spLocks noGrp="1"/>
           </p:cNvSpPr>
           <p:nvPr>
-            <p:ph type="sldNum" sz="quarter" idx="12"/>
+            <p:ph type="sldNum" idx="12"/>
           </p:nvPr>
         </p:nvSpPr>
         <p:spPr/>
@@ -1627,19 +2392,13 @@
           <a:lstStyle/>
           <a:p>
             <a:fld id="{98CF6C54-7381-4F9B-8B8C-BE1C669C65DF}" type="slidenum">
-              <a:rPr lang="fr-CA" smtClean="0"/>
               <a:t>‹#›</a:t>
             </a:fld>
-            <a:endParaRPr lang="fr-CA"/>
+            <a:endParaRPr/>
           </a:p>
         </p:txBody>
       </p:sp>
     </p:spTree>
-    <p:extLst>
-      <p:ext uri="{BB962C8B-B14F-4D97-AF65-F5344CB8AC3E}">
-        <p14:creationId xmlns:p14="http://schemas.microsoft.com/office/powerpoint/2010/main" val="725946026"/>
-      </p:ext>
-    </p:extLst>
   </p:cSld>
   <p:clrMapOvr>
     <a:masterClrMapping/>
@@ -1686,10 +2445,8 @@
           <a:lstStyle/>
           <a:p>
             <a:r>
-              <a:rPr lang="en-US"/>
               <a:t>Click to edit Master title style</a:t>
             </a:r>
-            <a:endParaRPr lang="fr-CA"/>
           </a:p>
         </p:txBody>
       </p:sp>
@@ -1714,40 +2471,44 @@
           <a:bodyPr/>
           <a:lstStyle/>
           <a:p>
-            <a:pPr lvl="0"/>
-            <a:r>
-              <a:rPr lang="en-US"/>
+            <a:pPr lvl="0">
+              <a:buNone/>
+            </a:pPr>
+            <a:r>
               <a:t>Click to edit Master text styles</a:t>
             </a:r>
           </a:p>
           <a:p>
-            <a:pPr lvl="1"/>
-            <a:r>
-              <a:rPr lang="en-US"/>
+            <a:pPr lvl="1">
+              <a:buNone/>
+            </a:pPr>
+            <a:r>
               <a:t>Second level</a:t>
             </a:r>
           </a:p>
           <a:p>
-            <a:pPr lvl="2"/>
-            <a:r>
-              <a:rPr lang="en-US"/>
+            <a:pPr lvl="2">
+              <a:buNone/>
+            </a:pPr>
+            <a:r>
               <a:t>Third level</a:t>
             </a:r>
           </a:p>
           <a:p>
-            <a:pPr lvl="3"/>
-            <a:r>
-              <a:rPr lang="en-US"/>
+            <a:pPr lvl="3">
+              <a:buNone/>
+            </a:pPr>
+            <a:r>
               <a:t>Fourth level</a:t>
             </a:r>
           </a:p>
           <a:p>
-            <a:pPr lvl="4"/>
-            <a:r>
-              <a:rPr lang="en-US"/>
+            <a:pPr lvl="4">
+              <a:buNone/>
+            </a:pPr>
+            <a:r>
               <a:t>Fifth level</a:t>
             </a:r>
-            <a:endParaRPr lang="fr-CA"/>
           </a:p>
         </p:txBody>
       </p:sp>
@@ -1764,7 +2525,7 @@
             <a:spLocks noGrp="1"/>
           </p:cNvSpPr>
           <p:nvPr>
-            <p:ph type="dt" sz="half" idx="10"/>
+            <p:ph type="dt" idx="10"/>
           </p:nvPr>
         </p:nvSpPr>
         <p:spPr/>
@@ -1773,10 +2534,9 @@
           <a:lstStyle/>
           <a:p>
             <a:fld id="{67190033-2F3D-4D35-BAB2-033E00903AF8}" type="datetimeFigureOut">
-              <a:rPr lang="fr-CA" smtClean="0"/>
-              <a:t>2026-10-04</a:t>
+              <a:t>04/10/2026</a:t>
             </a:fld>
-            <a:endParaRPr lang="fr-CA"/>
+            <a:endParaRPr/>
           </a:p>
         </p:txBody>
       </p:sp>
@@ -1793,7 +2553,7 @@
             <a:spLocks noGrp="1"/>
           </p:cNvSpPr>
           <p:nvPr>
-            <p:ph type="ftr" sz="quarter" idx="11"/>
+            <p:ph type="ftr" idx="11"/>
           </p:nvPr>
         </p:nvSpPr>
         <p:spPr/>
@@ -1801,7 +2561,7 @@
           <a:bodyPr/>
           <a:lstStyle/>
           <a:p>
-            <a:endParaRPr lang="fr-CA"/>
+            <a:endParaRPr/>
           </a:p>
         </p:txBody>
       </p:sp>
@@ -1818,7 +2578,7 @@
             <a:spLocks noGrp="1"/>
           </p:cNvSpPr>
           <p:nvPr>
-            <p:ph type="sldNum" sz="quarter" idx="12"/>
+            <p:ph type="sldNum" idx="12"/>
           </p:nvPr>
         </p:nvSpPr>
         <p:spPr/>
@@ -1827,19 +2587,13 @@
           <a:lstStyle/>
           <a:p>
             <a:fld id="{98CF6C54-7381-4F9B-8B8C-BE1C669C65DF}" type="slidenum">
-              <a:rPr lang="fr-CA" smtClean="0"/>
               <a:t>‹#›</a:t>
             </a:fld>
-            <a:endParaRPr lang="fr-CA"/>
+            <a:endParaRPr/>
           </a:p>
         </p:txBody>
       </p:sp>
     </p:spTree>
-    <p:extLst>
-      <p:ext uri="{BB962C8B-B14F-4D97-AF65-F5344CB8AC3E}">
-        <p14:creationId xmlns:p14="http://schemas.microsoft.com/office/powerpoint/2010/main" val="1727794456"/>
-      </p:ext>
-    </p:extLst>
   </p:cSld>
   <p:clrMapOvr>
     <a:masterClrMapping/>
@@ -1890,15 +2644,14 @@
           <a:bodyPr anchor="b"/>
           <a:lstStyle>
             <a:lvl1pPr>
+              <a:buNone/>
               <a:defRPr sz="6000"/>
             </a:lvl1pPr>
           </a:lstStyle>
           <a:p>
             <a:r>
-              <a:rPr lang="en-US"/>
               <a:t>Click to edit Master title style</a:t>
             </a:r>
-            <a:endParaRPr lang="fr-CA"/>
           </a:p>
         </p:txBody>
       </p:sp>
@@ -2019,9 +2772,10 @@
             </a:lvl9pPr>
           </a:lstStyle>
           <a:p>
-            <a:pPr lvl="0"/>
-            <a:r>
-              <a:rPr lang="en-US"/>
+            <a:pPr lvl="0">
+              <a:buNone/>
+            </a:pPr>
+            <a:r>
               <a:t>Click to edit Master text styles</a:t>
             </a:r>
           </a:p>
@@ -2040,7 +2794,7 @@
             <a:spLocks noGrp="1"/>
           </p:cNvSpPr>
           <p:nvPr>
-            <p:ph type="dt" sz="half" idx="10"/>
+            <p:ph type="dt" idx="10"/>
           </p:nvPr>
         </p:nvSpPr>
         <p:spPr/>
@@ -2049,10 +2803,9 @@
           <a:lstStyle/>
           <a:p>
             <a:fld id="{67190033-2F3D-4D35-BAB2-033E00903AF8}" type="datetimeFigureOut">
-              <a:rPr lang="fr-CA" smtClean="0"/>
-              <a:t>2026-10-04</a:t>
+              <a:t>04/10/2026</a:t>
             </a:fld>
-            <a:endParaRPr lang="fr-CA"/>
+            <a:endParaRPr/>
           </a:p>
         </p:txBody>
       </p:sp>
@@ -2069,7 +2822,7 @@
             <a:spLocks noGrp="1"/>
           </p:cNvSpPr>
           <p:nvPr>
-            <p:ph type="ftr" sz="quarter" idx="11"/>
+            <p:ph type="ftr" idx="11"/>
           </p:nvPr>
         </p:nvSpPr>
         <p:spPr/>
@@ -2077,7 +2830,7 @@
           <a:bodyPr/>
           <a:lstStyle/>
           <a:p>
-            <a:endParaRPr lang="fr-CA"/>
+            <a:endParaRPr/>
           </a:p>
         </p:txBody>
       </p:sp>
@@ -2094,7 +2847,7 @@
             <a:spLocks noGrp="1"/>
           </p:cNvSpPr>
           <p:nvPr>
-            <p:ph type="sldNum" sz="quarter" idx="12"/>
+            <p:ph type="sldNum" idx="12"/>
           </p:nvPr>
         </p:nvSpPr>
         <p:spPr/>
@@ -2103,19 +2856,13 @@
           <a:lstStyle/>
           <a:p>
             <a:fld id="{98CF6C54-7381-4F9B-8B8C-BE1C669C65DF}" type="slidenum">
-              <a:rPr lang="fr-CA" smtClean="0"/>
               <a:t>‹#›</a:t>
             </a:fld>
-            <a:endParaRPr lang="fr-CA"/>
+            <a:endParaRPr/>
           </a:p>
         </p:txBody>
       </p:sp>
     </p:spTree>
-    <p:extLst>
-      <p:ext uri="{BB962C8B-B14F-4D97-AF65-F5344CB8AC3E}">
-        <p14:creationId xmlns:p14="http://schemas.microsoft.com/office/powerpoint/2010/main" val="834353907"/>
-      </p:ext>
-    </p:extLst>
   </p:cSld>
   <p:clrMapOvr>
     <a:masterClrMapping/>
@@ -2162,10 +2909,8 @@
           <a:lstStyle/>
           <a:p>
             <a:r>
-              <a:rPr lang="en-US"/>
               <a:t>Click to edit Master title style</a:t>
             </a:r>
-            <a:endParaRPr lang="fr-CA"/>
           </a:p>
         </p:txBody>
       </p:sp>
@@ -2182,7 +2927,7 @@
             <a:spLocks noGrp="1"/>
           </p:cNvSpPr>
           <p:nvPr>
-            <p:ph sz="half" idx="1"/>
+            <p:ph idx="1"/>
           </p:nvPr>
         </p:nvSpPr>
         <p:spPr>
@@ -2195,40 +2940,44 @@
           <a:bodyPr/>
           <a:lstStyle/>
           <a:p>
-            <a:pPr lvl="0"/>
-            <a:r>
-              <a:rPr lang="en-US"/>
+            <a:pPr lvl="0">
+              <a:buNone/>
+            </a:pPr>
+            <a:r>
               <a:t>Click to edit Master text styles</a:t>
             </a:r>
           </a:p>
           <a:p>
-            <a:pPr lvl="1"/>
-            <a:r>
-              <a:rPr lang="en-US"/>
+            <a:pPr lvl="1">
+              <a:buNone/>
+            </a:pPr>
+            <a:r>
               <a:t>Second level</a:t>
             </a:r>
           </a:p>
           <a:p>
-            <a:pPr lvl="2"/>
-            <a:r>
-              <a:rPr lang="en-US"/>
+            <a:pPr lvl="2">
+              <a:buNone/>
+            </a:pPr>
+            <a:r>
               <a:t>Third level</a:t>
             </a:r>
           </a:p>
           <a:p>
-            <a:pPr lvl="3"/>
-            <a:r>
-              <a:rPr lang="en-US"/>
+            <a:pPr lvl="3">
+              <a:buNone/>
+            </a:pPr>
+            <a:r>
               <a:t>Fourth level</a:t>
             </a:r>
           </a:p>
           <a:p>
-            <a:pPr lvl="4"/>
-            <a:r>
-              <a:rPr lang="en-US"/>
+            <a:pPr lvl="4">
+              <a:buNone/>
+            </a:pPr>
+            <a:r>
               <a:t>Fifth level</a:t>
             </a:r>
-            <a:endParaRPr lang="fr-CA"/>
           </a:p>
         </p:txBody>
       </p:sp>
@@ -2245,7 +2994,7 @@
             <a:spLocks noGrp="1"/>
           </p:cNvSpPr>
           <p:nvPr>
-            <p:ph sz="half" idx="2"/>
+            <p:ph idx="2"/>
           </p:nvPr>
         </p:nvSpPr>
         <p:spPr>
@@ -2258,40 +3007,44 @@
           <a:bodyPr/>
           <a:lstStyle/>
           <a:p>
-            <a:pPr lvl="0"/>
-            <a:r>
-              <a:rPr lang="en-US"/>
+            <a:pPr lvl="0">
+              <a:buNone/>
+            </a:pPr>
+            <a:r>
               <a:t>Click to edit Master text styles</a:t>
             </a:r>
           </a:p>
           <a:p>
-            <a:pPr lvl="1"/>
-            <a:r>
-              <a:rPr lang="en-US"/>
+            <a:pPr lvl="1">
+              <a:buNone/>
+            </a:pPr>
+            <a:r>
               <a:t>Second level</a:t>
             </a:r>
           </a:p>
           <a:p>
-            <a:pPr lvl="2"/>
-            <a:r>
-              <a:rPr lang="en-US"/>
+            <a:pPr lvl="2">
+              <a:buNone/>
+            </a:pPr>
+            <a:r>
               <a:t>Third level</a:t>
             </a:r>
           </a:p>
           <a:p>
-            <a:pPr lvl="3"/>
-            <a:r>
-              <a:rPr lang="en-US"/>
+            <a:pPr lvl="3">
+              <a:buNone/>
+            </a:pPr>
+            <a:r>
               <a:t>Fourth level</a:t>
             </a:r>
           </a:p>
           <a:p>
-            <a:pPr lvl="4"/>
-            <a:r>
-              <a:rPr lang="en-US"/>
+            <a:pPr lvl="4">
+              <a:buNone/>
+            </a:pPr>
+            <a:r>
               <a:t>Fifth level</a:t>
             </a:r>
-            <a:endParaRPr lang="fr-CA"/>
           </a:p>
         </p:txBody>
       </p:sp>
@@ -2308,7 +3061,7 @@
             <a:spLocks noGrp="1"/>
           </p:cNvSpPr>
           <p:nvPr>
-            <p:ph type="dt" sz="half" idx="10"/>
+            <p:ph type="dt" idx="10"/>
           </p:nvPr>
         </p:nvSpPr>
         <p:spPr/>
@@ -2317,10 +3070,9 @@
           <a:lstStyle/>
           <a:p>
             <a:fld id="{67190033-2F3D-4D35-BAB2-033E00903AF8}" type="datetimeFigureOut">
-              <a:rPr lang="fr-CA" smtClean="0"/>
-              <a:t>2026-10-04</a:t>
+              <a:t>04/10/2026</a:t>
             </a:fld>
-            <a:endParaRPr lang="fr-CA"/>
+            <a:endParaRPr/>
           </a:p>
         </p:txBody>
       </p:sp>
@@ -2337,7 +3089,7 @@
             <a:spLocks noGrp="1"/>
           </p:cNvSpPr>
           <p:nvPr>
-            <p:ph type="ftr" sz="quarter" idx="11"/>
+            <p:ph type="ftr" idx="11"/>
           </p:nvPr>
         </p:nvSpPr>
         <p:spPr/>
@@ -2345,7 +3097,7 @@
           <a:bodyPr/>
           <a:lstStyle/>
           <a:p>
-            <a:endParaRPr lang="fr-CA"/>
+            <a:endParaRPr/>
           </a:p>
         </p:txBody>
       </p:sp>
@@ -2362,7 +3114,7 @@
             <a:spLocks noGrp="1"/>
           </p:cNvSpPr>
           <p:nvPr>
-            <p:ph type="sldNum" sz="quarter" idx="12"/>
+            <p:ph type="sldNum" idx="12"/>
           </p:nvPr>
         </p:nvSpPr>
         <p:spPr/>
@@ -2371,19 +3123,13 @@
           <a:lstStyle/>
           <a:p>
             <a:fld id="{98CF6C54-7381-4F9B-8B8C-BE1C669C65DF}" type="slidenum">
-              <a:rPr lang="fr-CA" smtClean="0"/>
               <a:t>‹#›</a:t>
             </a:fld>
-            <a:endParaRPr lang="fr-CA"/>
+            <a:endParaRPr/>
           </a:p>
         </p:txBody>
       </p:sp>
     </p:spTree>
-    <p:extLst>
-      <p:ext uri="{BB962C8B-B14F-4D97-AF65-F5344CB8AC3E}">
-        <p14:creationId xmlns:p14="http://schemas.microsoft.com/office/powerpoint/2010/main" val="3190888641"/>
-      </p:ext>
-    </p:extLst>
   </p:cSld>
   <p:clrMapOvr>
     <a:masterClrMapping/>
@@ -2435,10 +3181,8 @@
           <a:lstStyle/>
           <a:p>
             <a:r>
-              <a:rPr lang="en-US"/>
               <a:t>Click to edit Master title style</a:t>
             </a:r>
-            <a:endParaRPr lang="fr-CA"/>
           </a:p>
         </p:txBody>
       </p:sp>
@@ -2505,9 +3249,10 @@
             </a:lvl9pPr>
           </a:lstStyle>
           <a:p>
-            <a:pPr lvl="0"/>
-            <a:r>
-              <a:rPr lang="en-US"/>
+            <a:pPr lvl="0">
+              <a:buNone/>
+            </a:pPr>
+            <a:r>
               <a:t>Click to edit Master text styles</a:t>
             </a:r>
           </a:p>
@@ -2526,7 +3271,7 @@
             <a:spLocks noGrp="1"/>
           </p:cNvSpPr>
           <p:nvPr>
-            <p:ph sz="half" idx="2"/>
+            <p:ph idx="2"/>
           </p:nvPr>
         </p:nvSpPr>
         <p:spPr>
@@ -2539,40 +3284,44 @@
           <a:bodyPr/>
           <a:lstStyle/>
           <a:p>
-            <a:pPr lvl="0"/>
-            <a:r>
-              <a:rPr lang="en-US"/>
+            <a:pPr lvl="0">
+              <a:buNone/>
+            </a:pPr>
+            <a:r>
               <a:t>Click to edit Master text styles</a:t>
             </a:r>
           </a:p>
           <a:p>
-            <a:pPr lvl="1"/>
-            <a:r>
-              <a:rPr lang="en-US"/>
+            <a:pPr lvl="1">
+              <a:buNone/>
+            </a:pPr>
+            <a:r>
               <a:t>Second level</a:t>
             </a:r>
           </a:p>
           <a:p>
-            <a:pPr lvl="2"/>
-            <a:r>
-              <a:rPr lang="en-US"/>
+            <a:pPr lvl="2">
+              <a:buNone/>
+            </a:pPr>
+            <a:r>
               <a:t>Third level</a:t>
             </a:r>
           </a:p>
           <a:p>
-            <a:pPr lvl="3"/>
-            <a:r>
-              <a:rPr lang="en-US"/>
+            <a:pPr lvl="3">
+              <a:buNone/>
+            </a:pPr>
+            <a:r>
               <a:t>Fourth level</a:t>
             </a:r>
           </a:p>
           <a:p>
-            <a:pPr lvl="4"/>
-            <a:r>
-              <a:rPr lang="en-US"/>
+            <a:pPr lvl="4">
+              <a:buNone/>
+            </a:pPr>
+            <a:r>
               <a:t>Fifth level</a:t>
             </a:r>
-            <a:endParaRPr lang="fr-CA"/>
           </a:p>
         </p:txBody>
       </p:sp>
@@ -2589,7 +3338,7 @@
             <a:spLocks noGrp="1"/>
           </p:cNvSpPr>
           <p:nvPr>
-            <p:ph type="body" sz="quarter" idx="3"/>
+            <p:ph type="body" idx="3"/>
           </p:nvPr>
         </p:nvSpPr>
         <p:spPr>
@@ -2639,9 +3388,10 @@
             </a:lvl9pPr>
           </a:lstStyle>
           <a:p>
-            <a:pPr lvl="0"/>
-            <a:r>
-              <a:rPr lang="en-US"/>
+            <a:pPr lvl="0">
+              <a:buNone/>
+            </a:pPr>
+            <a:r>
               <a:t>Click to edit Master text styles</a:t>
             </a:r>
           </a:p>
@@ -2660,7 +3410,7 @@
             <a:spLocks noGrp="1"/>
           </p:cNvSpPr>
           <p:nvPr>
-            <p:ph sz="quarter" idx="4"/>
+            <p:ph idx="4"/>
           </p:nvPr>
         </p:nvSpPr>
         <p:spPr>
@@ -2673,40 +3423,44 @@
           <a:bodyPr/>
           <a:lstStyle/>
           <a:p>
-            <a:pPr lvl="0"/>
-            <a:r>
-              <a:rPr lang="en-US"/>
+            <a:pPr lvl="0">
+              <a:buNone/>
+            </a:pPr>
+            <a:r>
               <a:t>Click to edit Master text styles</a:t>
             </a:r>
           </a:p>
           <a:p>
-            <a:pPr lvl="1"/>
-            <a:r>
-              <a:rPr lang="en-US"/>
+            <a:pPr lvl="1">
+              <a:buNone/>
+            </a:pPr>
+            <a:r>
               <a:t>Second level</a:t>
             </a:r>
           </a:p>
           <a:p>
-            <a:pPr lvl="2"/>
-            <a:r>
-              <a:rPr lang="en-US"/>
+            <a:pPr lvl="2">
+              <a:buNone/>
+            </a:pPr>
+            <a:r>
               <a:t>Third level</a:t>
             </a:r>
           </a:p>
           <a:p>
-            <a:pPr lvl="3"/>
-            <a:r>
-              <a:rPr lang="en-US"/>
+            <a:pPr lvl="3">
+              <a:buNone/>
+            </a:pPr>
+            <a:r>
               <a:t>Fourth level</a:t>
             </a:r>
           </a:p>
           <a:p>
-            <a:pPr lvl="4"/>
-            <a:r>
-              <a:rPr lang="en-US"/>
+            <a:pPr lvl="4">
+              <a:buNone/>
+            </a:pPr>
+            <a:r>
               <a:t>Fifth level</a:t>
             </a:r>
-            <a:endParaRPr lang="fr-CA"/>
           </a:p>
         </p:txBody>
       </p:sp>
@@ -2723,7 +3477,7 @@
             <a:spLocks noGrp="1"/>
           </p:cNvSpPr>
           <p:nvPr>
-            <p:ph type="dt" sz="half" idx="10"/>
+            <p:ph type="dt" idx="10"/>
           </p:nvPr>
         </p:nvSpPr>
         <p:spPr/>
@@ -2732,10 +3486,9 @@
           <a:lstStyle/>
           <a:p>
             <a:fld id="{67190033-2F3D-4D35-BAB2-033E00903AF8}" type="datetimeFigureOut">
-              <a:rPr lang="fr-CA" smtClean="0"/>
-              <a:t>2026-10-04</a:t>
+              <a:t>04/10/2026</a:t>
             </a:fld>
-            <a:endParaRPr lang="fr-CA"/>
+            <a:endParaRPr/>
           </a:p>
         </p:txBody>
       </p:sp>
@@ -2752,7 +3505,7 @@
             <a:spLocks noGrp="1"/>
           </p:cNvSpPr>
           <p:nvPr>
-            <p:ph type="ftr" sz="quarter" idx="11"/>
+            <p:ph type="ftr" idx="11"/>
           </p:nvPr>
         </p:nvSpPr>
         <p:spPr/>
@@ -2760,7 +3513,7 @@
           <a:bodyPr/>
           <a:lstStyle/>
           <a:p>
-            <a:endParaRPr lang="fr-CA"/>
+            <a:endParaRPr/>
           </a:p>
         </p:txBody>
       </p:sp>
@@ -2777,7 +3530,7 @@
             <a:spLocks noGrp="1"/>
           </p:cNvSpPr>
           <p:nvPr>
-            <p:ph type="sldNum" sz="quarter" idx="12"/>
+            <p:ph type="sldNum" idx="12"/>
           </p:nvPr>
         </p:nvSpPr>
         <p:spPr/>
@@ -2786,19 +3539,13 @@
           <a:lstStyle/>
           <a:p>
             <a:fld id="{98CF6C54-7381-4F9B-8B8C-BE1C669C65DF}" type="slidenum">
-              <a:rPr lang="fr-CA" smtClean="0"/>
               <a:t>‹#›</a:t>
             </a:fld>
-            <a:endParaRPr lang="fr-CA"/>
+            <a:endParaRPr/>
           </a:p>
         </p:txBody>
       </p:sp>
     </p:spTree>
-    <p:extLst>
-      <p:ext uri="{BB962C8B-B14F-4D97-AF65-F5344CB8AC3E}">
-        <p14:creationId xmlns:p14="http://schemas.microsoft.com/office/powerpoint/2010/main" val="2939638905"/>
-      </p:ext>
-    </p:extLst>
   </p:cSld>
   <p:clrMapOvr>
     <a:masterClrMapping/>
@@ -2845,10 +3592,8 @@
           <a:lstStyle/>
           <a:p>
             <a:r>
-              <a:rPr lang="en-US"/>
               <a:t>Click to edit Master title style</a:t>
             </a:r>
-            <a:endParaRPr lang="fr-CA"/>
           </a:p>
         </p:txBody>
       </p:sp>
@@ -2865,7 +3610,7 @@
             <a:spLocks noGrp="1"/>
           </p:cNvSpPr>
           <p:nvPr>
-            <p:ph type="dt" sz="half" idx="10"/>
+            <p:ph type="dt" idx="10"/>
           </p:nvPr>
         </p:nvSpPr>
         <p:spPr/>
@@ -2874,10 +3619,9 @@
           <a:lstStyle/>
           <a:p>
             <a:fld id="{67190033-2F3D-4D35-BAB2-033E00903AF8}" type="datetimeFigureOut">
-              <a:rPr lang="fr-CA" smtClean="0"/>
-              <a:t>2026-10-04</a:t>
+              <a:t>04/10/2026</a:t>
             </a:fld>
-            <a:endParaRPr lang="fr-CA"/>
+            <a:endParaRPr/>
           </a:p>
         </p:txBody>
       </p:sp>
@@ -2894,7 +3638,7 @@
             <a:spLocks noGrp="1"/>
           </p:cNvSpPr>
           <p:nvPr>
-            <p:ph type="ftr" sz="quarter" idx="11"/>
+            <p:ph type="ftr" idx="11"/>
           </p:nvPr>
         </p:nvSpPr>
         <p:spPr/>
@@ -2902,7 +3646,7 @@
           <a:bodyPr/>
           <a:lstStyle/>
           <a:p>
-            <a:endParaRPr lang="fr-CA"/>
+            <a:endParaRPr/>
           </a:p>
         </p:txBody>
       </p:sp>
@@ -2919,7 +3663,7 @@
             <a:spLocks noGrp="1"/>
           </p:cNvSpPr>
           <p:nvPr>
-            <p:ph type="sldNum" sz="quarter" idx="12"/>
+            <p:ph type="sldNum" idx="12"/>
           </p:nvPr>
         </p:nvSpPr>
         <p:spPr/>
@@ -2928,19 +3672,13 @@
           <a:lstStyle/>
           <a:p>
             <a:fld id="{98CF6C54-7381-4F9B-8B8C-BE1C669C65DF}" type="slidenum">
-              <a:rPr lang="fr-CA" smtClean="0"/>
               <a:t>‹#›</a:t>
             </a:fld>
-            <a:endParaRPr lang="fr-CA"/>
+            <a:endParaRPr/>
           </a:p>
         </p:txBody>
       </p:sp>
     </p:spTree>
-    <p:extLst>
-      <p:ext uri="{BB962C8B-B14F-4D97-AF65-F5344CB8AC3E}">
-        <p14:creationId xmlns:p14="http://schemas.microsoft.com/office/powerpoint/2010/main" val="3988324492"/>
-      </p:ext>
-    </p:extLst>
   </p:cSld>
   <p:clrMapOvr>
     <a:masterClrMapping/>
@@ -2978,7 +3716,7 @@
             <a:spLocks noGrp="1"/>
           </p:cNvSpPr>
           <p:nvPr>
-            <p:ph type="dt" sz="half" idx="10"/>
+            <p:ph type="dt" idx="10"/>
           </p:nvPr>
         </p:nvSpPr>
         <p:spPr/>
@@ -2987,10 +3725,9 @@
           <a:lstStyle/>
           <a:p>
             <a:fld id="{67190033-2F3D-4D35-BAB2-033E00903AF8}" type="datetimeFigureOut">
-              <a:rPr lang="fr-CA" smtClean="0"/>
-              <a:t>2026-10-04</a:t>
+              <a:t>04/10/2026</a:t>
             </a:fld>
-            <a:endParaRPr lang="fr-CA"/>
+            <a:endParaRPr/>
           </a:p>
         </p:txBody>
       </p:sp>
@@ -3007,7 +3744,7 @@
             <a:spLocks noGrp="1"/>
           </p:cNvSpPr>
           <p:nvPr>
-            <p:ph type="ftr" sz="quarter" idx="11"/>
+            <p:ph type="ftr" idx="11"/>
           </p:nvPr>
         </p:nvSpPr>
         <p:spPr/>
@@ -3015,7 +3752,7 @@
           <a:bodyPr/>
           <a:lstStyle/>
           <a:p>
-            <a:endParaRPr lang="fr-CA"/>
+            <a:endParaRPr/>
           </a:p>
         </p:txBody>
       </p:sp>
@@ -3032,7 +3769,7 @@
             <a:spLocks noGrp="1"/>
           </p:cNvSpPr>
           <p:nvPr>
-            <p:ph type="sldNum" sz="quarter" idx="12"/>
+            <p:ph type="sldNum" idx="12"/>
           </p:nvPr>
         </p:nvSpPr>
         <p:spPr/>
@@ -3041,19 +3778,13 @@
           <a:lstStyle/>
           <a:p>
             <a:fld id="{98CF6C54-7381-4F9B-8B8C-BE1C669C65DF}" type="slidenum">
-              <a:rPr lang="fr-CA" smtClean="0"/>
               <a:t>‹#›</a:t>
             </a:fld>
-            <a:endParaRPr lang="fr-CA"/>
+            <a:endParaRPr/>
           </a:p>
         </p:txBody>
       </p:sp>
     </p:spTree>
-    <p:extLst>
-      <p:ext uri="{BB962C8B-B14F-4D97-AF65-F5344CB8AC3E}">
-        <p14:creationId xmlns:p14="http://schemas.microsoft.com/office/powerpoint/2010/main" val="1638574733"/>
-      </p:ext>
-    </p:extLst>
   </p:cSld>
   <p:clrMapOvr>
     <a:masterClrMapping/>
@@ -3104,15 +3835,14 @@
           <a:bodyPr anchor="b"/>
           <a:lstStyle>
             <a:lvl1pPr>
+              <a:buNone/>
               <a:defRPr sz="3200"/>
             </a:lvl1pPr>
           </a:lstStyle>
           <a:p>
             <a:r>
-              <a:rPr lang="en-US"/>
               <a:t>Click to edit Master title style</a:t>
             </a:r>
-            <a:endParaRPr lang="fr-CA"/>
           </a:p>
         </p:txBody>
       </p:sp>
@@ -3142,68 +3872,81 @@
           <a:bodyPr/>
           <a:lstStyle>
             <a:lvl1pPr>
+              <a:buNone/>
               <a:defRPr sz="3200"/>
             </a:lvl1pPr>
             <a:lvl2pPr>
+              <a:buNone/>
               <a:defRPr sz="2800"/>
             </a:lvl2pPr>
             <a:lvl3pPr>
+              <a:buNone/>
               <a:defRPr sz="2400"/>
             </a:lvl3pPr>
             <a:lvl4pPr>
+              <a:buNone/>
               <a:defRPr sz="2000"/>
             </a:lvl4pPr>
             <a:lvl5pPr>
+              <a:buNone/>
               <a:defRPr sz="2000"/>
             </a:lvl5pPr>
             <a:lvl6pPr>
+              <a:buNone/>
               <a:defRPr sz="2000"/>
             </a:lvl6pPr>
             <a:lvl7pPr>
+              <a:buNone/>
               <a:defRPr sz="2000"/>
             </a:lvl7pPr>
             <a:lvl8pPr>
+              <a:buNone/>
               <a:defRPr sz="2000"/>
             </a:lvl8pPr>
             <a:lvl9pPr>
+              <a:buNone/>
               <a:defRPr sz="2000"/>
             </a:lvl9pPr>
           </a:lstStyle>
           <a:p>
-            <a:pPr lvl="0"/>
-            <a:r>
-              <a:rPr lang="en-US"/>
+            <a:pPr lvl="0">
+              <a:buNone/>
+            </a:pPr>
+            <a:r>
               <a:t>Click to edit Master text styles</a:t>
             </a:r>
           </a:p>
           <a:p>
-            <a:pPr lvl="1"/>
-            <a:r>
-              <a:rPr lang="en-US"/>
+            <a:pPr lvl="1">
+              <a:buNone/>
+            </a:pPr>
+            <a:r>
               <a:t>Second level</a:t>
             </a:r>
           </a:p>
           <a:p>
-            <a:pPr lvl="2"/>
-            <a:r>
-              <a:rPr lang="en-US"/>
+            <a:pPr lvl="2">
+              <a:buNone/>
+            </a:pPr>
+            <a:r>
               <a:t>Third level</a:t>
             </a:r>
           </a:p>
           <a:p>
-            <a:pPr lvl="3"/>
-            <a:r>
-              <a:rPr lang="en-US"/>
+            <a:pPr lvl="3">
+              <a:buNone/>
+            </a:pPr>
+            <a:r>
               <a:t>Fourth level</a:t>
             </a:r>
           </a:p>
           <a:p>
-            <a:pPr lvl="4"/>
-            <a:r>
-              <a:rPr lang="en-US"/>
+            <a:pPr lvl="4">
+              <a:buNone/>
+            </a:pPr>
+            <a:r>
               <a:t>Fifth level</a:t>
             </a:r>
-            <a:endParaRPr lang="fr-CA"/>
           </a:p>
         </p:txBody>
       </p:sp>
@@ -3220,7 +3963,7 @@
             <a:spLocks noGrp="1"/>
           </p:cNvSpPr>
           <p:nvPr>
-            <p:ph type="body" sz="half" idx="2"/>
+            <p:ph type="body" idx="2"/>
           </p:nvPr>
         </p:nvSpPr>
         <p:spPr>
@@ -3270,9 +4013,10 @@
             </a:lvl9pPr>
           </a:lstStyle>
           <a:p>
-            <a:pPr lvl="0"/>
-            <a:r>
-              <a:rPr lang="en-US"/>
+            <a:pPr lvl="0">
+              <a:buNone/>
+            </a:pPr>
+            <a:r>
               <a:t>Click to edit Master text styles</a:t>
             </a:r>
           </a:p>
@@ -3291,7 +4035,7 @@
             <a:spLocks noGrp="1"/>
           </p:cNvSpPr>
           <p:nvPr>
-            <p:ph type="dt" sz="half" idx="10"/>
+            <p:ph type="dt" idx="10"/>
           </p:nvPr>
         </p:nvSpPr>
         <p:spPr/>
@@ -3300,10 +4044,9 @@
           <a:lstStyle/>
           <a:p>
             <a:fld id="{67190033-2F3D-4D35-BAB2-033E00903AF8}" type="datetimeFigureOut">
-              <a:rPr lang="fr-CA" smtClean="0"/>
-              <a:t>2026-10-04</a:t>
+              <a:t>04/10/2026</a:t>
             </a:fld>
-            <a:endParaRPr lang="fr-CA"/>
+            <a:endParaRPr/>
           </a:p>
         </p:txBody>
       </p:sp>
@@ -3320,7 +4063,7 @@
             <a:spLocks noGrp="1"/>
           </p:cNvSpPr>
           <p:nvPr>
-            <p:ph type="ftr" sz="quarter" idx="11"/>
+            <p:ph type="ftr" idx="11"/>
           </p:nvPr>
         </p:nvSpPr>
         <p:spPr/>
@@ -3328,7 +4071,7 @@
           <a:bodyPr/>
           <a:lstStyle/>
           <a:p>
-            <a:endParaRPr lang="fr-CA"/>
+            <a:endParaRPr/>
           </a:p>
         </p:txBody>
       </p:sp>
@@ -3345,7 +4088,7 @@
             <a:spLocks noGrp="1"/>
           </p:cNvSpPr>
           <p:nvPr>
-            <p:ph type="sldNum" sz="quarter" idx="12"/>
+            <p:ph type="sldNum" idx="12"/>
           </p:nvPr>
         </p:nvSpPr>
         <p:spPr/>
@@ -3354,19 +4097,13 @@
           <a:lstStyle/>
           <a:p>
             <a:fld id="{98CF6C54-7381-4F9B-8B8C-BE1C669C65DF}" type="slidenum">
-              <a:rPr lang="fr-CA" smtClean="0"/>
               <a:t>‹#›</a:t>
             </a:fld>
-            <a:endParaRPr lang="fr-CA"/>
+            <a:endParaRPr/>
           </a:p>
         </p:txBody>
       </p:sp>
     </p:spTree>
-    <p:extLst>
-      <p:ext uri="{BB962C8B-B14F-4D97-AF65-F5344CB8AC3E}">
-        <p14:creationId xmlns:p14="http://schemas.microsoft.com/office/powerpoint/2010/main" val="4113152799"/>
-      </p:ext>
-    </p:extLst>
   </p:cSld>
   <p:clrMapOvr>
     <a:masterClrMapping/>
@@ -3417,15 +4154,14 @@
           <a:bodyPr anchor="b"/>
           <a:lstStyle>
             <a:lvl1pPr>
+              <a:buNone/>
               <a:defRPr sz="3200"/>
             </a:lvl1pPr>
           </a:lstStyle>
           <a:p>
             <a:r>
-              <a:rPr lang="en-US"/>
               <a:t>Click to edit Master title style</a:t>
             </a:r>
-            <a:endParaRPr lang="fr-CA"/>
           </a:p>
         </p:txBody>
       </p:sp>
@@ -3439,7 +4175,7 @@
             </a:extLst>
           </p:cNvPr>
           <p:cNvSpPr>
-            <a:spLocks noGrp="1" noChangeAspect="1"/>
+            <a:spLocks noGrp="1"/>
           </p:cNvSpPr>
           <p:nvPr>
             <p:ph type="pic" idx="1"/>
@@ -3492,7 +4228,7 @@
             </a:lvl9pPr>
           </a:lstStyle>
           <a:p>
-            <a:endParaRPr lang="fr-CA"/>
+            <a:endParaRPr/>
           </a:p>
         </p:txBody>
       </p:sp>
@@ -3509,7 +4245,7 @@
             <a:spLocks noGrp="1"/>
           </p:cNvSpPr>
           <p:nvPr>
-            <p:ph type="body" sz="half" idx="2"/>
+            <p:ph type="body" idx="2"/>
           </p:nvPr>
         </p:nvSpPr>
         <p:spPr>
@@ -3559,9 +4295,10 @@
             </a:lvl9pPr>
           </a:lstStyle>
           <a:p>
-            <a:pPr lvl="0"/>
-            <a:r>
-              <a:rPr lang="en-US"/>
+            <a:pPr lvl="0">
+              <a:buNone/>
+            </a:pPr>
+            <a:r>
               <a:t>Click to edit Master text styles</a:t>
             </a:r>
           </a:p>
@@ -3580,7 +4317,7 @@
             <a:spLocks noGrp="1"/>
           </p:cNvSpPr>
           <p:nvPr>
-            <p:ph type="dt" sz="half" idx="10"/>
+            <p:ph type="dt" idx="10"/>
           </p:nvPr>
         </p:nvSpPr>
         <p:spPr/>
@@ -3589,10 +4326,9 @@
           <a:lstStyle/>
           <a:p>
             <a:fld id="{67190033-2F3D-4D35-BAB2-033E00903AF8}" type="datetimeFigureOut">
-              <a:rPr lang="fr-CA" smtClean="0"/>
-              <a:t>2026-10-04</a:t>
+              <a:t>04/10/2026</a:t>
             </a:fld>
-            <a:endParaRPr lang="fr-CA"/>
+            <a:endParaRPr/>
           </a:p>
         </p:txBody>
       </p:sp>
@@ -3609,7 +4345,7 @@
             <a:spLocks noGrp="1"/>
           </p:cNvSpPr>
           <p:nvPr>
-            <p:ph type="ftr" sz="quarter" idx="11"/>
+            <p:ph type="ftr" idx="11"/>
           </p:nvPr>
         </p:nvSpPr>
         <p:spPr/>
@@ -3617,7 +4353,7 @@
           <a:bodyPr/>
           <a:lstStyle/>
           <a:p>
-            <a:endParaRPr lang="fr-CA"/>
+            <a:endParaRPr/>
           </a:p>
         </p:txBody>
       </p:sp>
@@ -3634,7 +4370,7 @@
             <a:spLocks noGrp="1"/>
           </p:cNvSpPr>
           <p:nvPr>
-            <p:ph type="sldNum" sz="quarter" idx="12"/>
+            <p:ph type="sldNum" idx="12"/>
           </p:nvPr>
         </p:nvSpPr>
         <p:spPr/>
@@ -3643,19 +4379,13 @@
           <a:lstStyle/>
           <a:p>
             <a:fld id="{98CF6C54-7381-4F9B-8B8C-BE1C669C65DF}" type="slidenum">
-              <a:rPr lang="fr-CA" smtClean="0"/>
               <a:t>‹#›</a:t>
             </a:fld>
-            <a:endParaRPr lang="fr-CA"/>
+            <a:endParaRPr/>
           </a:p>
         </p:txBody>
       </p:sp>
     </p:spTree>
-    <p:extLst>
-      <p:ext uri="{BB962C8B-B14F-4D97-AF65-F5344CB8AC3E}">
-        <p14:creationId xmlns:p14="http://schemas.microsoft.com/office/powerpoint/2010/main" val="2453022292"/>
-      </p:ext>
-    </p:extLst>
   </p:cSld>
   <p:clrMapOvr>
     <a:masterClrMapping/>
@@ -3711,16 +4441,14 @@
           </a:prstGeom>
         </p:spPr>
         <p:txBody>
-          <a:bodyPr vert="horz" lIns="91440" tIns="45720" rIns="91440" bIns="45720" rtlCol="0" anchor="ctr">
+          <a:bodyPr vert="horz" lIns="91440" tIns="45720" rIns="91440" bIns="45720" anchor="ctr">
             <a:normAutofit/>
           </a:bodyPr>
           <a:lstStyle/>
           <a:p>
             <a:r>
-              <a:rPr lang="en-US"/>
               <a:t>Click to edit Master title style</a:t>
             </a:r>
-            <a:endParaRPr lang="fr-CA"/>
           </a:p>
         </p:txBody>
       </p:sp>
@@ -3750,45 +4478,49 @@
           </a:prstGeom>
         </p:spPr>
         <p:txBody>
-          <a:bodyPr vert="horz" lIns="91440" tIns="45720" rIns="91440" bIns="45720" rtlCol="0">
+          <a:bodyPr vert="horz" lIns="91440" tIns="45720" rIns="91440" bIns="45720">
             <a:normAutofit/>
           </a:bodyPr>
           <a:lstStyle/>
           <a:p>
-            <a:pPr lvl="0"/>
-            <a:r>
-              <a:rPr lang="en-US"/>
+            <a:pPr lvl="0">
+              <a:buNone/>
+            </a:pPr>
+            <a:r>
               <a:t>Click to edit Master text styles</a:t>
             </a:r>
           </a:p>
           <a:p>
-            <a:pPr lvl="1"/>
-            <a:r>
-              <a:rPr lang="en-US"/>
+            <a:pPr lvl="1">
+              <a:buNone/>
+            </a:pPr>
+            <a:r>
               <a:t>Second level</a:t>
             </a:r>
           </a:p>
           <a:p>
-            <a:pPr lvl="2"/>
-            <a:r>
-              <a:rPr lang="en-US"/>
+            <a:pPr lvl="2">
+              <a:buNone/>
+            </a:pPr>
+            <a:r>
               <a:t>Third level</a:t>
             </a:r>
           </a:p>
           <a:p>
-            <a:pPr lvl="3"/>
-            <a:r>
-              <a:rPr lang="en-US"/>
+            <a:pPr lvl="3">
+              <a:buNone/>
+            </a:pPr>
+            <a:r>
               <a:t>Fourth level</a:t>
             </a:r>
           </a:p>
           <a:p>
-            <a:pPr lvl="4"/>
-            <a:r>
-              <a:rPr lang="en-US"/>
+            <a:pPr lvl="4">
+              <a:buNone/>
+            </a:pPr>
+            <a:r>
               <a:t>Fifth level</a:t>
             </a:r>
-            <a:endParaRPr lang="fr-CA"/>
           </a:p>
         </p:txBody>
       </p:sp>
@@ -3805,7 +4537,7 @@
             <a:spLocks noGrp="1"/>
           </p:cNvSpPr>
           <p:nvPr>
-            <p:ph type="dt" sz="half" idx="2"/>
+            <p:ph type="dt" idx="2"/>
           </p:nvPr>
         </p:nvSpPr>
         <p:spPr>
@@ -3818,9 +4550,10 @@
           </a:prstGeom>
         </p:spPr>
         <p:txBody>
-          <a:bodyPr vert="horz" lIns="91440" tIns="45720" rIns="91440" bIns="45720" rtlCol="0" anchor="ctr"/>
+          <a:bodyPr vert="horz" lIns="91440" tIns="45720" rIns="91440" bIns="45720" anchor="ctr"/>
           <a:lstStyle>
             <a:lvl1pPr algn="l">
+              <a:buNone/>
               <a:defRPr sz="1200">
                 <a:solidFill>
                   <a:schemeClr val="tx1">
@@ -3832,10 +4565,9 @@
           </a:lstStyle>
           <a:p>
             <a:fld id="{67190033-2F3D-4D35-BAB2-033E00903AF8}" type="datetimeFigureOut">
-              <a:rPr lang="fr-CA" smtClean="0"/>
-              <a:t>2026-10-04</a:t>
+              <a:t>04/10/2026</a:t>
             </a:fld>
-            <a:endParaRPr lang="fr-CA"/>
+            <a:endParaRPr/>
           </a:p>
         </p:txBody>
       </p:sp>
@@ -3852,7 +4584,7 @@
             <a:spLocks noGrp="1"/>
           </p:cNvSpPr>
           <p:nvPr>
-            <p:ph type="ftr" sz="quarter" idx="3"/>
+            <p:ph type="ftr" idx="3"/>
           </p:nvPr>
         </p:nvSpPr>
         <p:spPr>
@@ -3865,9 +4597,10 @@
           </a:prstGeom>
         </p:spPr>
         <p:txBody>
-          <a:bodyPr vert="horz" lIns="91440" tIns="45720" rIns="91440" bIns="45720" rtlCol="0" anchor="ctr"/>
+          <a:bodyPr vert="horz" lIns="91440" tIns="45720" rIns="91440" bIns="45720" anchor="ctr"/>
           <a:lstStyle>
             <a:lvl1pPr algn="ctr">
+              <a:buNone/>
               <a:defRPr sz="1200">
                 <a:solidFill>
                   <a:schemeClr val="tx1">
@@ -3878,7 +4611,7 @@
             </a:lvl1pPr>
           </a:lstStyle>
           <a:p>
-            <a:endParaRPr lang="fr-CA"/>
+            <a:endParaRPr/>
           </a:p>
         </p:txBody>
       </p:sp>
@@ -3895,7 +4628,7 @@
             <a:spLocks noGrp="1"/>
           </p:cNvSpPr>
           <p:nvPr>
-            <p:ph type="sldNum" sz="quarter" idx="4"/>
+            <p:ph type="sldNum" idx="4"/>
           </p:nvPr>
         </p:nvSpPr>
         <p:spPr>
@@ -3908,9 +4641,10 @@
           </a:prstGeom>
         </p:spPr>
         <p:txBody>
-          <a:bodyPr vert="horz" lIns="91440" tIns="45720" rIns="91440" bIns="45720" rtlCol="0" anchor="ctr"/>
+          <a:bodyPr vert="horz" lIns="91440" tIns="45720" rIns="91440" bIns="45720" anchor="ctr"/>
           <a:lstStyle>
             <a:lvl1pPr algn="r">
+              <a:buNone/>
               <a:defRPr sz="1200">
                 <a:solidFill>
                   <a:schemeClr val="tx1">
@@ -3922,19 +4656,13 @@
           </a:lstStyle>
           <a:p>
             <a:fld id="{98CF6C54-7381-4F9B-8B8C-BE1C669C65DF}" type="slidenum">
-              <a:rPr lang="fr-CA" smtClean="0"/>
               <a:t>‹#›</a:t>
             </a:fld>
-            <a:endParaRPr lang="fr-CA"/>
+            <a:endParaRPr/>
           </a:p>
         </p:txBody>
       </p:sp>
     </p:spTree>
-    <p:extLst>
-      <p:ext uri="{BB962C8B-B14F-4D97-AF65-F5344CB8AC3E}">
-        <p14:creationId xmlns:p14="http://schemas.microsoft.com/office/powerpoint/2010/main" val="487805134"/>
-      </p:ext>
-    </p:extLst>
   </p:cSld>
   <p:clrMap bg1="lt1" tx1="dk1" bg2="lt2" tx2="dk2" accent1="accent1" accent2="accent2" accent3="accent3" accent4="accent4" accent5="accent5" accent6="accent6" hlink="hlink" folHlink="folHlink"/>
   <p:sldLayoutIdLst>
@@ -3952,7 +4680,7 @@
   </p:sldLayoutIdLst>
   <p:txStyles>
     <p:titleStyle>
-      <a:lvl1pPr algn="l" defTabSz="914400" rtl="0" eaLnBrk="1" latinLnBrk="0" hangingPunct="1">
+      <a:lvl1pPr algn="l" defTabSz="914400">
         <a:lnSpc>
           <a:spcPct val="90000"/>
         </a:lnSpc>
@@ -3965,267 +4693,273 @@
             <a:schemeClr val="tx1"/>
           </a:solidFill>
           <a:latin typeface="+mj-lt"/>
-          <a:ea typeface="+mj-ea"/>
-          <a:cs typeface="+mj-cs"/>
+          <a:ea typeface="+mj-lt"/>
+          <a:cs typeface="+mj-lt"/>
         </a:defRPr>
       </a:lvl1pPr>
     </p:titleStyle>
     <p:bodyStyle>
-      <a:lvl1pPr marL="228600" indent="-228600" algn="l" defTabSz="914400" rtl="0" eaLnBrk="1" latinLnBrk="0" hangingPunct="1">
+      <a:lvl1pPr marL="228600" indent="-228600" algn="l" defTabSz="914400">
         <a:lnSpc>
           <a:spcPct val="90000"/>
         </a:lnSpc>
         <a:spcBef>
           <a:spcPts val="1000"/>
         </a:spcBef>
-        <a:buFont typeface="Arial" panose="020B0604020202020204" pitchFamily="34" charset="0"/>
+        <a:buFont typeface="Arial"/>
         <a:buChar char="•"/>
         <a:defRPr sz="2800" kern="1200">
           <a:solidFill>
             <a:schemeClr val="tx1"/>
           </a:solidFill>
           <a:latin typeface="+mn-lt"/>
-          <a:ea typeface="+mn-ea"/>
-          <a:cs typeface="+mn-cs"/>
+          <a:ea typeface="+mn-lt"/>
+          <a:cs typeface="+mn-lt"/>
         </a:defRPr>
       </a:lvl1pPr>
-      <a:lvl2pPr marL="685800" indent="-228600" algn="l" defTabSz="914400" rtl="0" eaLnBrk="1" latinLnBrk="0" hangingPunct="1">
+      <a:lvl2pPr marL="685800" indent="-228600" algn="l" defTabSz="914400">
         <a:lnSpc>
           <a:spcPct val="90000"/>
         </a:lnSpc>
         <a:spcBef>
           <a:spcPts val="500"/>
         </a:spcBef>
-        <a:buFont typeface="Arial" panose="020B0604020202020204" pitchFamily="34" charset="0"/>
+        <a:buFont typeface="Arial"/>
         <a:buChar char="•"/>
         <a:defRPr sz="2400" kern="1200">
           <a:solidFill>
             <a:schemeClr val="tx1"/>
           </a:solidFill>
           <a:latin typeface="+mn-lt"/>
-          <a:ea typeface="+mn-ea"/>
-          <a:cs typeface="+mn-cs"/>
+          <a:ea typeface="+mn-lt"/>
+          <a:cs typeface="+mn-lt"/>
         </a:defRPr>
       </a:lvl2pPr>
-      <a:lvl3pPr marL="1143000" indent="-228600" algn="l" defTabSz="914400" rtl="0" eaLnBrk="1" latinLnBrk="0" hangingPunct="1">
+      <a:lvl3pPr marL="1143000" indent="-228600" algn="l" defTabSz="914400">
         <a:lnSpc>
           <a:spcPct val="90000"/>
         </a:lnSpc>
         <a:spcBef>
           <a:spcPts val="500"/>
         </a:spcBef>
-        <a:buFont typeface="Arial" panose="020B0604020202020204" pitchFamily="34" charset="0"/>
+        <a:buFont typeface="Arial"/>
         <a:buChar char="•"/>
         <a:defRPr sz="2000" kern="1200">
           <a:solidFill>
             <a:schemeClr val="tx1"/>
           </a:solidFill>
           <a:latin typeface="+mn-lt"/>
-          <a:ea typeface="+mn-ea"/>
-          <a:cs typeface="+mn-cs"/>
+          <a:ea typeface="+mn-lt"/>
+          <a:cs typeface="+mn-lt"/>
         </a:defRPr>
       </a:lvl3pPr>
-      <a:lvl4pPr marL="1600200" indent="-228600" algn="l" defTabSz="914400" rtl="0" eaLnBrk="1" latinLnBrk="0" hangingPunct="1">
+      <a:lvl4pPr marL="1600200" indent="-228600" algn="l" defTabSz="914400">
         <a:lnSpc>
           <a:spcPct val="90000"/>
         </a:lnSpc>
         <a:spcBef>
           <a:spcPts val="500"/>
         </a:spcBef>
-        <a:buFont typeface="Arial" panose="020B0604020202020204" pitchFamily="34" charset="0"/>
+        <a:buFont typeface="Arial"/>
         <a:buChar char="•"/>
         <a:defRPr sz="1800" kern="1200">
           <a:solidFill>
             <a:schemeClr val="tx1"/>
           </a:solidFill>
           <a:latin typeface="+mn-lt"/>
-          <a:ea typeface="+mn-ea"/>
-          <a:cs typeface="+mn-cs"/>
+          <a:ea typeface="+mn-lt"/>
+          <a:cs typeface="+mn-lt"/>
         </a:defRPr>
       </a:lvl4pPr>
-      <a:lvl5pPr marL="2057400" indent="-228600" algn="l" defTabSz="914400" rtl="0" eaLnBrk="1" latinLnBrk="0" hangingPunct="1">
+      <a:lvl5pPr marL="2057400" indent="-228600" algn="l" defTabSz="914400">
         <a:lnSpc>
           <a:spcPct val="90000"/>
         </a:lnSpc>
         <a:spcBef>
           <a:spcPts val="500"/>
         </a:spcBef>
-        <a:buFont typeface="Arial" panose="020B0604020202020204" pitchFamily="34" charset="0"/>
+        <a:buFont typeface="Arial"/>
         <a:buChar char="•"/>
         <a:defRPr sz="1800" kern="1200">
           <a:solidFill>
             <a:schemeClr val="tx1"/>
           </a:solidFill>
           <a:latin typeface="+mn-lt"/>
-          <a:ea typeface="+mn-ea"/>
-          <a:cs typeface="+mn-cs"/>
+          <a:ea typeface="+mn-lt"/>
+          <a:cs typeface="+mn-lt"/>
         </a:defRPr>
       </a:lvl5pPr>
-      <a:lvl6pPr marL="2514600" indent="-228600" algn="l" defTabSz="914400" rtl="0" eaLnBrk="1" latinLnBrk="0" hangingPunct="1">
+      <a:lvl6pPr marL="2514600" indent="-228600" algn="l" defTabSz="914400">
         <a:lnSpc>
           <a:spcPct val="90000"/>
         </a:lnSpc>
         <a:spcBef>
           <a:spcPts val="500"/>
         </a:spcBef>
-        <a:buFont typeface="Arial" panose="020B0604020202020204" pitchFamily="34" charset="0"/>
+        <a:buFont typeface="Arial"/>
         <a:buChar char="•"/>
         <a:defRPr sz="1800" kern="1200">
           <a:solidFill>
             <a:schemeClr val="tx1"/>
           </a:solidFill>
           <a:latin typeface="+mn-lt"/>
-          <a:ea typeface="+mn-ea"/>
-          <a:cs typeface="+mn-cs"/>
+          <a:ea typeface="+mn-lt"/>
+          <a:cs typeface="+mn-lt"/>
         </a:defRPr>
       </a:lvl6pPr>
-      <a:lvl7pPr marL="2971800" indent="-228600" algn="l" defTabSz="914400" rtl="0" eaLnBrk="1" latinLnBrk="0" hangingPunct="1">
+      <a:lvl7pPr marL="2971800" indent="-228600" algn="l" defTabSz="914400">
         <a:lnSpc>
           <a:spcPct val="90000"/>
         </a:lnSpc>
         <a:spcBef>
           <a:spcPts val="500"/>
         </a:spcBef>
-        <a:buFont typeface="Arial" panose="020B0604020202020204" pitchFamily="34" charset="0"/>
+        <a:buFont typeface="Arial"/>
         <a:buChar char="•"/>
         <a:defRPr sz="1800" kern="1200">
           <a:solidFill>
             <a:schemeClr val="tx1"/>
           </a:solidFill>
           <a:latin typeface="+mn-lt"/>
-          <a:ea typeface="+mn-ea"/>
-          <a:cs typeface="+mn-cs"/>
+          <a:ea typeface="+mn-lt"/>
+          <a:cs typeface="+mn-lt"/>
         </a:defRPr>
       </a:lvl7pPr>
-      <a:lvl8pPr marL="3429000" indent="-228600" algn="l" defTabSz="914400" rtl="0" eaLnBrk="1" latinLnBrk="0" hangingPunct="1">
+      <a:lvl8pPr marL="3429000" indent="-228600" algn="l" defTabSz="914400">
         <a:lnSpc>
           <a:spcPct val="90000"/>
         </a:lnSpc>
         <a:spcBef>
           <a:spcPts val="500"/>
         </a:spcBef>
-        <a:buFont typeface="Arial" panose="020B0604020202020204" pitchFamily="34" charset="0"/>
+        <a:buFont typeface="Arial"/>
         <a:buChar char="•"/>
         <a:defRPr sz="1800" kern="1200">
           <a:solidFill>
             <a:schemeClr val="tx1"/>
           </a:solidFill>
           <a:latin typeface="+mn-lt"/>
-          <a:ea typeface="+mn-ea"/>
-          <a:cs typeface="+mn-cs"/>
+          <a:ea typeface="+mn-lt"/>
+          <a:cs typeface="+mn-lt"/>
         </a:defRPr>
       </a:lvl8pPr>
-      <a:lvl9pPr marL="3886200" indent="-228600" algn="l" defTabSz="914400" rtl="0" eaLnBrk="1" latinLnBrk="0" hangingPunct="1">
+      <a:lvl9pPr marL="3886200" indent="-228600" algn="l" defTabSz="914400">
         <a:lnSpc>
           <a:spcPct val="90000"/>
         </a:lnSpc>
         <a:spcBef>
           <a:spcPts val="500"/>
         </a:spcBef>
-        <a:buFont typeface="Arial" panose="020B0604020202020204" pitchFamily="34" charset="0"/>
+        <a:buFont typeface="Arial"/>
         <a:buChar char="•"/>
         <a:defRPr sz="1800" kern="1200">
           <a:solidFill>
             <a:schemeClr val="tx1"/>
           </a:solidFill>
           <a:latin typeface="+mn-lt"/>
-          <a:ea typeface="+mn-ea"/>
-          <a:cs typeface="+mn-cs"/>
+          <a:ea typeface="+mn-lt"/>
+          <a:cs typeface="+mn-lt"/>
         </a:defRPr>
       </a:lvl9pPr>
     </p:bodyStyle>
     <p:otherStyle>
-      <a:defPPr>
-        <a:defRPr lang="fr-FR"/>
-      </a:defPPr>
-      <a:lvl1pPr marL="0" algn="l" defTabSz="914400" rtl="0" eaLnBrk="1" latinLnBrk="0" hangingPunct="1">
+      <a:lvl1pPr marL="0" algn="l" defTabSz="914400">
+        <a:buNone/>
         <a:defRPr sz="1800" kern="1200">
           <a:solidFill>
             <a:schemeClr val="tx1"/>
           </a:solidFill>
           <a:latin typeface="+mn-lt"/>
-          <a:ea typeface="+mn-ea"/>
-          <a:cs typeface="+mn-cs"/>
+          <a:ea typeface="+mn-lt"/>
+          <a:cs typeface="+mn-lt"/>
         </a:defRPr>
       </a:lvl1pPr>
-      <a:lvl2pPr marL="457200" algn="l" defTabSz="914400" rtl="0" eaLnBrk="1" latinLnBrk="0" hangingPunct="1">
+      <a:lvl2pPr marL="457200" algn="l" defTabSz="914400">
+        <a:buNone/>
         <a:defRPr sz="1800" kern="1200">
           <a:solidFill>
             <a:schemeClr val="tx1"/>
           </a:solidFill>
           <a:latin typeface="+mn-lt"/>
-          <a:ea typeface="+mn-ea"/>
-          <a:cs typeface="+mn-cs"/>
+          <a:ea typeface="+mn-lt"/>
+          <a:cs typeface="+mn-lt"/>
         </a:defRPr>
       </a:lvl2pPr>
-      <a:lvl3pPr marL="914400" algn="l" defTabSz="914400" rtl="0" eaLnBrk="1" latinLnBrk="0" hangingPunct="1">
+      <a:lvl3pPr marL="914400" algn="l" defTabSz="914400">
+        <a:buNone/>
         <a:defRPr sz="1800" kern="1200">
           <a:solidFill>
             <a:schemeClr val="tx1"/>
           </a:solidFill>
           <a:latin typeface="+mn-lt"/>
-          <a:ea typeface="+mn-ea"/>
-          <a:cs typeface="+mn-cs"/>
+          <a:ea typeface="+mn-lt"/>
+          <a:cs typeface="+mn-lt"/>
         </a:defRPr>
       </a:lvl3pPr>
-      <a:lvl4pPr marL="1371600" algn="l" defTabSz="914400" rtl="0" eaLnBrk="1" latinLnBrk="0" hangingPunct="1">
+      <a:lvl4pPr marL="1371600" algn="l" defTabSz="914400">
+        <a:buNone/>
         <a:defRPr sz="1800" kern="1200">
           <a:solidFill>
             <a:schemeClr val="tx1"/>
           </a:solidFill>
           <a:latin typeface="+mn-lt"/>
-          <a:ea typeface="+mn-ea"/>
-          <a:cs typeface="+mn-cs"/>
+          <a:ea typeface="+mn-lt"/>
+          <a:cs typeface="+mn-lt"/>
         </a:defRPr>
       </a:lvl4pPr>
-      <a:lvl5pPr marL="1828800" algn="l" defTabSz="914400" rtl="0" eaLnBrk="1" latinLnBrk="0" hangingPunct="1">
+      <a:lvl5pPr marL="1828800" algn="l" defTabSz="914400">
+        <a:buNone/>
         <a:defRPr sz="1800" kern="1200">
           <a:solidFill>
             <a:schemeClr val="tx1"/>
           </a:solidFill>
           <a:latin typeface="+mn-lt"/>
-          <a:ea typeface="+mn-ea"/>
-          <a:cs typeface="+mn-cs"/>
+          <a:ea typeface="+mn-lt"/>
+          <a:cs typeface="+mn-lt"/>
         </a:defRPr>
       </a:lvl5pPr>
-      <a:lvl6pPr marL="2286000" algn="l" defTabSz="914400" rtl="0" eaLnBrk="1" latinLnBrk="0" hangingPunct="1">
+      <a:lvl6pPr marL="2286000" algn="l" defTabSz="914400">
+        <a:buNone/>
         <a:defRPr sz="1800" kern="1200">
           <a:solidFill>
             <a:schemeClr val="tx1"/>
           </a:solidFill>
           <a:latin typeface="+mn-lt"/>
-          <a:ea typeface="+mn-ea"/>
-          <a:cs typeface="+mn-cs"/>
+          <a:ea typeface="+mn-lt"/>
+          <a:cs typeface="+mn-lt"/>
         </a:defRPr>
       </a:lvl6pPr>
-      <a:lvl7pPr marL="2743200" algn="l" defTabSz="914400" rtl="0" eaLnBrk="1" latinLnBrk="0" hangingPunct="1">
+      <a:lvl7pPr marL="2743200" algn="l" defTabSz="914400">
+        <a:buNone/>
         <a:defRPr sz="1800" kern="1200">
           <a:solidFill>
             <a:schemeClr val="tx1"/>
           </a:solidFill>
           <a:latin typeface="+mn-lt"/>
-          <a:ea typeface="+mn-ea"/>
-          <a:cs typeface="+mn-cs"/>
+          <a:ea typeface="+mn-lt"/>
+          <a:cs typeface="+mn-lt"/>
         </a:defRPr>
       </a:lvl7pPr>
-      <a:lvl8pPr marL="3200400" algn="l" defTabSz="914400" rtl="0" eaLnBrk="1" latinLnBrk="0" hangingPunct="1">
+      <a:lvl8pPr marL="3200400" algn="l" defTabSz="914400">
+        <a:buNone/>
         <a:defRPr sz="1800" kern="1200">
           <a:solidFill>
             <a:schemeClr val="tx1"/>
           </a:solidFill>
           <a:latin typeface="+mn-lt"/>
-          <a:ea typeface="+mn-ea"/>
-          <a:cs typeface="+mn-cs"/>
+          <a:ea typeface="+mn-lt"/>
+          <a:cs typeface="+mn-lt"/>
         </a:defRPr>
       </a:lvl8pPr>
-      <a:lvl9pPr marL="3657600" algn="l" defTabSz="914400" rtl="0" eaLnBrk="1" latinLnBrk="0" hangingPunct="1">
+      <a:lvl9pPr marL="3657600" algn="l" defTabSz="914400">
+        <a:buNone/>
         <a:defRPr sz="1800" kern="1200">
           <a:solidFill>
             <a:schemeClr val="tx1"/>
           </a:solidFill>
           <a:latin typeface="+mn-lt"/>
-          <a:ea typeface="+mn-ea"/>
-          <a:cs typeface="+mn-cs"/>
+          <a:ea typeface="+mn-lt"/>
+          <a:cs typeface="+mn-lt"/>
         </a:defRPr>
       </a:lvl9pPr>
     </p:otherStyle>
@@ -4267,7 +5001,9 @@
               </a:ext>
             </a:extLst>
           </p:cNvPr>
-          <p:cNvSpPr/>
+          <p:cNvSpPr>
+            <a:spLocks noGrp="1"/>
+          </p:cNvSpPr>
           <p:nvPr/>
         </p:nvSpPr>
         <p:spPr>
@@ -4281,25 +5017,10 @@
           <a:solidFill>
             <a:srgbClr val="3D8DFF"/>
           </a:solidFill>
-          <a:ln w="19050" cap="flat" cmpd="sng" algn="ctr">
+          <a:ln w="19050" cmpd="sng">
             <a:noFill/>
             <a:prstDash val="solid"/>
-            <a:miter lim="800000"/>
           </a:ln>
-          <a:effectLst/>
-          <a:extLst>
-            <a:ext uri="{91240B29-F687-4F45-9708-019B960494DF}">
-              <a14:hiddenLine xmlns:a14="http://schemas.microsoft.com/office/drawing/2010/main" w="19050" cap="flat" cmpd="sng" algn="ctr">
-                <a:solidFill>
-                  <a:schemeClr val="accent1">
-                    <a:shade val="15000"/>
-                  </a:schemeClr>
-                </a:solidFill>
-                <a:prstDash val="solid"/>
-                <a:miter lim="800000"/>
-              </a14:hiddenLine>
-            </a:ext>
-          </a:extLst>
         </p:spPr>
         <p:style>
           <a:lnRef idx="2">
@@ -4318,11 +5039,13 @@
           </a:fontRef>
         </p:style>
         <p:txBody>
-          <a:bodyPr rtlCol="0" anchor="ctr"/>
-          <a:lstStyle/>
-          <a:p>
-            <a:pPr algn="ctr"/>
-            <a:endParaRPr lang="fr-CA"/>
+          <a:bodyPr anchor="ctr"/>
+          <a:lstStyle/>
+          <a:p>
+            <a:pPr algn="ctr">
+              <a:buNone/>
+            </a:pPr>
+            <a:endParaRPr/>
           </a:p>
         </p:txBody>
       </p:sp>
@@ -4335,7 +5058,9 @@
               </a:ext>
             </a:extLst>
           </p:cNvPr>
-          <p:cNvSpPr txBox="1"/>
+          <p:cNvSpPr>
+            <a:spLocks noGrp="1"/>
+          </p:cNvSpPr>
           <p:nvPr/>
         </p:nvSpPr>
         <p:spPr>
@@ -4349,35 +5074,22 @@
           <a:noFill/>
         </p:spPr>
         <p:txBody>
-          <a:bodyPr vert="horz" lIns="0" tIns="0" rIns="0" bIns="0" rtlCol="0" anchor="t">
+          <a:bodyPr vert="horz" lIns="0" tIns="0" rIns="0" bIns="0" anchor="t">
             <a:spAutoFit/>
           </a:bodyPr>
           <a:lstStyle/>
           <a:p>
             <a:r>
-              <a:rPr lang="fr-CA" b="1" dirty="0">
+              <a:rPr b="1">
                 <a:solidFill>
                   <a:srgbClr val="3D8DFF"/>
                 </a:solidFill>
-                <a:latin typeface="Arial" panose="020B0604020202020204" pitchFamily="34" charset="0"/>
+                <a:latin typeface="Arial"/>
+                <a:ea typeface="Arial"/>
+                <a:cs typeface="Arial"/>
               </a:rPr>
-              <a:t>CODEML 2026 | JADCO | </a:t>
-            </a:r>
-            <a:r>
-              <a:rPr lang="fr-CA" b="1" dirty="0" err="1">
-                <a:solidFill>
-                  <a:srgbClr val="3D8DFF"/>
-                </a:solidFill>
-                <a:latin typeface="Arial" panose="020B0604020202020204" pitchFamily="34" charset="0"/>
-              </a:rPr>
-              <a:t>serafii</a:t>
-            </a:r>
-            <a:endParaRPr lang="fr-CA" b="1" dirty="0">
-              <a:solidFill>
-                <a:srgbClr val="3D8DFF"/>
-              </a:solidFill>
-              <a:latin typeface="Arial" panose="020B0604020202020204" pitchFamily="34" charset="0"/>
-            </a:endParaRPr>
+              <a:t>CODEML 2026 | JADCO | serafii</a:t>
+            </a:r>
           </a:p>
         </p:txBody>
       </p:sp>
@@ -4390,7 +5102,9 @@
               </a:ext>
             </a:extLst>
           </p:cNvPr>
-          <p:cNvSpPr txBox="1"/>
+          <p:cNvSpPr>
+            <a:spLocks noGrp="1"/>
+          </p:cNvSpPr>
           <p:nvPr/>
         </p:nvSpPr>
         <p:spPr>
@@ -4404,54 +5118,23 @@
           <a:noFill/>
         </p:spPr>
         <p:txBody>
-          <a:bodyPr vert="horz" lIns="0" tIns="0" rIns="0" bIns="0" rtlCol="0" anchor="t">
+          <a:bodyPr vert="horz" lIns="0" tIns="0" rIns="0" bIns="0" anchor="t">
             <a:spAutoFit/>
           </a:bodyPr>
           <a:lstStyle/>
           <a:p>
             <a:r>
-              <a:rPr lang="en-US" sz="5400" b="1" dirty="0">
+              <a:rPr sz="5400" b="1">
                 <a:solidFill>
                   <a:srgbClr val="000000"/>
                 </a:solidFill>
-                <a:latin typeface="Arial" panose="020B0604020202020204" pitchFamily="34" charset="0"/>
+                <a:latin typeface="Arial"/>
+                <a:ea typeface="Arial"/>
+                <a:cs typeface="Arial"/>
               </a:rPr>
-              <a:t>Collection </a:t>
-            </a:r>
-            <a:r>
-              <a:rPr lang="en-CA" sz="5400" b="1" dirty="0" err="1">
-                <a:solidFill>
-                  <a:srgbClr val="000000"/>
-                </a:solidFill>
-                <a:latin typeface="Arial" panose="020B0604020202020204" pitchFamily="34" charset="0"/>
-              </a:rPr>
-              <a:t>Équinoxe</a:t>
-            </a:r>
-            <a:r>
-              <a:rPr lang="en-CA" sz="5400" b="1" dirty="0">
-                <a:solidFill>
-                  <a:srgbClr val="000000"/>
-                </a:solidFill>
-                <a:latin typeface="Arial" panose="020B0604020202020204" pitchFamily="34" charset="0"/>
-              </a:rPr>
-              <a:t>:</a:t>
-            </a:r>
-            <a:r>
-              <a:rPr lang="en-US" sz="5400" b="1" dirty="0">
-                <a:solidFill>
-                  <a:srgbClr val="000000"/>
-                </a:solidFill>
-                <a:latin typeface="Arial" panose="020B0604020202020204" pitchFamily="34" charset="0"/>
-              </a:rPr>
-              <a:t>
+              <a:t>Collection Équinoxe:
 2026 rent forecast</a:t>
             </a:r>
-            <a:endParaRPr lang="fr-CA" sz="5400" b="1" dirty="0">
-              <a:solidFill>
-                <a:srgbClr val="000000"/>
-              </a:solidFill>
-              <a:latin typeface="Arial" panose="020B0604020202020204" pitchFamily="34" charset="0"/>
-            </a:endParaRPr>
           </a:p>
         </p:txBody>
       </p:sp>
@@ -4464,7 +5147,9 @@
               </a:ext>
             </a:extLst>
           </p:cNvPr>
-          <p:cNvSpPr txBox="1"/>
+          <p:cNvSpPr>
+            <a:spLocks noGrp="1"/>
+          </p:cNvSpPr>
           <p:nvPr/>
         </p:nvSpPr>
         <p:spPr>
@@ -4478,37 +5163,21 @@
           <a:noFill/>
         </p:spPr>
         <p:txBody>
-          <a:bodyPr vert="horz" lIns="0" tIns="0" rIns="0" bIns="0" rtlCol="0" anchor="t">
+          <a:bodyPr vert="horz" lIns="0" tIns="0" rIns="0" bIns="0" anchor="t">
             <a:spAutoFit/>
           </a:bodyPr>
           <a:lstStyle/>
           <a:p>
             <a:r>
-              <a:rPr lang="fr-CA" sz="2600" dirty="0">
+              <a:rPr sz="2600">
                 <a:solidFill>
                   <a:srgbClr val="000000"/>
                 </a:solidFill>
-                <a:latin typeface="Arial" panose="020B0604020202020204" pitchFamily="34" charset="0"/>
+                <a:latin typeface="Arial"/>
+                <a:ea typeface="Arial"/>
+                <a:cs typeface="Arial"/>
               </a:rPr>
-              <a:t>Final </a:t>
-            </a:r>
-            <a:r>
-              <a:rPr lang="fr-CA" sz="2600" dirty="0" err="1">
-                <a:solidFill>
-                  <a:srgbClr val="000000"/>
-                </a:solidFill>
-                <a:latin typeface="Arial" panose="020B0604020202020204" pitchFamily="34" charset="0"/>
-              </a:rPr>
-              <a:t>estimate</a:t>
-            </a:r>
-            <a:r>
-              <a:rPr lang="fr-CA" sz="2600" dirty="0">
-                <a:solidFill>
-                  <a:srgbClr val="000000"/>
-                </a:solidFill>
-                <a:latin typeface="Arial" panose="020B0604020202020204" pitchFamily="34" charset="0"/>
-              </a:rPr>
-              <a:t>: 2.46%</a:t>
+              <a:t>Final estimate: 2.46%</a:t>
             </a:r>
           </a:p>
         </p:txBody>
@@ -4522,7 +5191,9 @@
               </a:ext>
             </a:extLst>
           </p:cNvPr>
-          <p:cNvSpPr txBox="1"/>
+          <p:cNvSpPr>
+            <a:spLocks noGrp="1"/>
+          </p:cNvSpPr>
           <p:nvPr/>
         </p:nvSpPr>
         <p:spPr>
@@ -4536,26 +5207,22 @@
           <a:noFill/>
         </p:spPr>
         <p:txBody>
-          <a:bodyPr vert="horz" lIns="0" tIns="0" rIns="0" bIns="0" rtlCol="0" anchor="t">
+          <a:bodyPr vert="horz" lIns="0" tIns="0" rIns="0" bIns="0" anchor="t">
             <a:spAutoFit/>
           </a:bodyPr>
           <a:lstStyle/>
           <a:p>
             <a:r>
-              <a:rPr lang="en-US" sz="1900" dirty="0">
+              <a:rPr sz="1900">
                 <a:solidFill>
                   <a:srgbClr val="4C525B"/>
                 </a:solidFill>
-                <a:latin typeface="Arial" panose="020B0604020202020204" pitchFamily="34" charset="0"/>
+                <a:latin typeface="Arial"/>
+                <a:ea typeface="Arial"/>
+                <a:cs typeface="Arial"/>
               </a:rPr>
               <a:t>Same-unit effective-rent growth</a:t>
             </a:r>
-            <a:endParaRPr lang="fr-CA" sz="1900" dirty="0">
-              <a:solidFill>
-                <a:srgbClr val="4C525B"/>
-              </a:solidFill>
-              <a:latin typeface="Arial" panose="020B0604020202020204" pitchFamily="34" charset="0"/>
-            </a:endParaRPr>
           </a:p>
         </p:txBody>
       </p:sp>
@@ -4606,7 +5273,9 @@
               </a:ext>
             </a:extLst>
           </p:cNvPr>
-          <p:cNvSpPr txBox="1"/>
+          <p:cNvSpPr>
+            <a:spLocks noGrp="1"/>
+          </p:cNvSpPr>
           <p:nvPr/>
         </p:nvSpPr>
         <p:spPr>
@@ -4620,65 +5289,25 @@
           <a:noFill/>
         </p:spPr>
         <p:txBody>
-          <a:bodyPr vert="horz" lIns="0" tIns="0" rIns="0" bIns="0" rtlCol="0" anchor="t">
+          <a:bodyPr vert="horz" lIns="0" tIns="0" rIns="0" bIns="0" anchor="t">
             <a:spAutoFit/>
           </a:bodyPr>
           <a:lstStyle/>
           <a:p>
             <a:r>
-              <a:rPr lang="en-US" sz="3600" b="1">
+              <a:rPr sz="3600" b="1">
                 <a:solidFill>
                   <a:srgbClr val="000000"/>
                 </a:solidFill>
-                <a:latin typeface="Arial" panose="020B0604020202020204" pitchFamily="34" charset="0"/>
+                <a:latin typeface="Arial"/>
+                <a:ea typeface="Arial"/>
+                <a:cs typeface="Arial"/>
               </a:rPr>
               <a:t>Unit-mix changes make yearly medians misleading</a:t>
             </a:r>
-            <a:endParaRPr lang="fr-CA" sz="3600" b="1">
-              <a:solidFill>
-                <a:srgbClr val="000000"/>
-              </a:solidFill>
-              <a:latin typeface="Arial" panose="020B0604020202020204" pitchFamily="34" charset="0"/>
-            </a:endParaRPr>
-          </a:p>
-        </p:txBody>
-      </p:sp>
-      <p:pic>
-        <p:nvPicPr>
-          <p:cNvPr id="4" name="Picture 3">
-            <a:extLst>
-              <a:ext uri="{FF2B5EF4-FFF2-40B4-BE49-F238E27FC236}">
-                <a16:creationId xmlns:a16="http://schemas.microsoft.com/office/drawing/2014/main" id="{0F1F5127-E716-1DC4-409F-DB56C6AA9398}"/>
-              </a:ext>
-            </a:extLst>
-          </p:cNvPr>
-          <p:cNvPicPr>
-            <a:picLocks/>
-          </p:cNvPicPr>
-          <p:nvPr/>
-        </p:nvPicPr>
-        <p:blipFill>
-          <a:blip r:embed="rId3">
-            <a:extLst>
-              <a:ext uri="{28A0092B-C50C-407E-A947-70E740481C1C}">
-                <a14:useLocalDpi xmlns:a14="http://schemas.microsoft.com/office/drawing/2010/main" val="0"/>
-              </a:ext>
-            </a:extLst>
-          </a:blip>
-          <a:stretch>
-            <a:fillRect/>
-          </a:stretch>
-        </p:blipFill>
-        <p:spPr>
-          <a:xfrm>
-            <a:off x="381000" y="1422400"/>
-            <a:ext cx="7620000" cy="3784600"/>
-          </a:xfrm>
-          <a:prstGeom prst="rect">
-            <a:avLst/>
-          </a:prstGeom>
-        </p:spPr>
-      </p:pic>
+          </a:p>
+        </p:txBody>
+      </p:sp>
       <p:sp>
         <p:nvSpPr>
           <p:cNvPr id="5" name="Rectangle 4">
@@ -4688,7 +5317,9 @@
               </a:ext>
             </a:extLst>
           </p:cNvPr>
-          <p:cNvSpPr/>
+          <p:cNvSpPr>
+            <a:spLocks noGrp="1"/>
+          </p:cNvSpPr>
           <p:nvPr/>
         </p:nvSpPr>
         <p:spPr>
@@ -4702,25 +5333,10 @@
           <a:solidFill>
             <a:srgbClr val="EDEDED"/>
           </a:solidFill>
-          <a:ln w="19050" cap="flat" cmpd="sng" algn="ctr">
+          <a:ln w="19050" cmpd="sng">
             <a:noFill/>
             <a:prstDash val="solid"/>
-            <a:miter lim="800000"/>
           </a:ln>
-          <a:effectLst/>
-          <a:extLst>
-            <a:ext uri="{91240B29-F687-4F45-9708-019B960494DF}">
-              <a14:hiddenLine xmlns:a14="http://schemas.microsoft.com/office/drawing/2010/main" w="19050" cap="flat" cmpd="sng" algn="ctr">
-                <a:solidFill>
-                  <a:schemeClr val="accent1">
-                    <a:shade val="15000"/>
-                  </a:schemeClr>
-                </a:solidFill>
-                <a:prstDash val="solid"/>
-                <a:miter lim="800000"/>
-              </a14:hiddenLine>
-            </a:ext>
-          </a:extLst>
         </p:spPr>
         <p:style>
           <a:lnRef idx="2">
@@ -4739,11 +5355,13 @@
           </a:fontRef>
         </p:style>
         <p:txBody>
-          <a:bodyPr rtlCol="0" anchor="ctr"/>
-          <a:lstStyle/>
-          <a:p>
-            <a:pPr algn="ctr"/>
-            <a:endParaRPr lang="fr-CA"/>
+          <a:bodyPr anchor="ctr"/>
+          <a:lstStyle/>
+          <a:p>
+            <a:pPr algn="ctr">
+              <a:buNone/>
+            </a:pPr>
+            <a:endParaRPr/>
           </a:p>
         </p:txBody>
       </p:sp>
@@ -4756,7 +5374,9 @@
               </a:ext>
             </a:extLst>
           </p:cNvPr>
-          <p:cNvSpPr txBox="1"/>
+          <p:cNvSpPr>
+            <a:spLocks noGrp="1"/>
+          </p:cNvSpPr>
           <p:nvPr/>
         </p:nvSpPr>
         <p:spPr>
@@ -4770,17 +5390,19 @@
           <a:noFill/>
         </p:spPr>
         <p:txBody>
-          <a:bodyPr vert="horz" lIns="0" tIns="0" rIns="0" bIns="0" rtlCol="0" anchor="t">
+          <a:bodyPr vert="horz" lIns="0" tIns="0" rIns="0" bIns="0" anchor="t">
             <a:spAutoFit/>
           </a:bodyPr>
           <a:lstStyle/>
           <a:p>
             <a:r>
-              <a:rPr lang="fr-CA" sz="3400" b="1">
+              <a:rPr sz="3400" b="1">
                 <a:solidFill>
                   <a:srgbClr val="000000"/>
                 </a:solidFill>
-                <a:latin typeface="Arial" panose="020B0604020202020204" pitchFamily="34" charset="0"/>
+                <a:latin typeface="Arial"/>
+                <a:ea typeface="Arial"/>
+                <a:cs typeface="Arial"/>
               </a:rPr>
               <a:t>10.85%</a:t>
             </a:r>
@@ -4796,7 +5418,9 @@
               </a:ext>
             </a:extLst>
           </p:cNvPr>
-          <p:cNvSpPr txBox="1"/>
+          <p:cNvSpPr>
+            <a:spLocks noGrp="1"/>
+          </p:cNvSpPr>
           <p:nvPr/>
         </p:nvSpPr>
         <p:spPr>
@@ -4810,17 +5434,19 @@
           <a:noFill/>
         </p:spPr>
         <p:txBody>
-          <a:bodyPr vert="horz" lIns="0" tIns="0" rIns="0" bIns="0" rtlCol="0" anchor="t">
+          <a:bodyPr vert="horz" lIns="0" tIns="0" rIns="0" bIns="0" anchor="t">
             <a:spAutoFit/>
           </a:bodyPr>
           <a:lstStyle/>
           <a:p>
             <a:r>
-              <a:rPr lang="fr-CA" sz="1700">
+              <a:rPr sz="1700">
                 <a:solidFill>
                   <a:srgbClr val="4C525B"/>
                 </a:solidFill>
-                <a:latin typeface="Arial" panose="020B0604020202020204" pitchFamily="34" charset="0"/>
+                <a:latin typeface="Arial"/>
+                <a:ea typeface="Arial"/>
+                <a:cs typeface="Arial"/>
               </a:rPr>
               <a:t>Naive 2023 median increase</a:t>
             </a:r>
@@ -4836,7 +5462,9 @@
               </a:ext>
             </a:extLst>
           </p:cNvPr>
-          <p:cNvSpPr/>
+          <p:cNvSpPr>
+            <a:spLocks noGrp="1"/>
+          </p:cNvSpPr>
           <p:nvPr/>
         </p:nvSpPr>
         <p:spPr>
@@ -4850,25 +5478,10 @@
           <a:solidFill>
             <a:srgbClr val="D0EDFA"/>
           </a:solidFill>
-          <a:ln w="19050" cap="flat" cmpd="sng" algn="ctr">
+          <a:ln w="19050" cmpd="sng">
             <a:noFill/>
             <a:prstDash val="solid"/>
-            <a:miter lim="800000"/>
           </a:ln>
-          <a:effectLst/>
-          <a:extLst>
-            <a:ext uri="{91240B29-F687-4F45-9708-019B960494DF}">
-              <a14:hiddenLine xmlns:a14="http://schemas.microsoft.com/office/drawing/2010/main" w="19050" cap="flat" cmpd="sng" algn="ctr">
-                <a:solidFill>
-                  <a:schemeClr val="accent1">
-                    <a:shade val="15000"/>
-                  </a:schemeClr>
-                </a:solidFill>
-                <a:prstDash val="solid"/>
-                <a:miter lim="800000"/>
-              </a14:hiddenLine>
-            </a:ext>
-          </a:extLst>
         </p:spPr>
         <p:style>
           <a:lnRef idx="2">
@@ -4887,11 +5500,13 @@
           </a:fontRef>
         </p:style>
         <p:txBody>
-          <a:bodyPr rtlCol="0" anchor="ctr"/>
-          <a:lstStyle/>
-          <a:p>
-            <a:pPr algn="ctr"/>
-            <a:endParaRPr lang="fr-CA"/>
+          <a:bodyPr anchor="ctr"/>
+          <a:lstStyle/>
+          <a:p>
+            <a:pPr algn="ctr">
+              <a:buNone/>
+            </a:pPr>
+            <a:endParaRPr/>
           </a:p>
         </p:txBody>
       </p:sp>
@@ -4904,7 +5519,9 @@
               </a:ext>
             </a:extLst>
           </p:cNvPr>
-          <p:cNvSpPr txBox="1"/>
+          <p:cNvSpPr>
+            <a:spLocks noGrp="1"/>
+          </p:cNvSpPr>
           <p:nvPr/>
         </p:nvSpPr>
         <p:spPr>
@@ -4918,17 +5535,19 @@
           <a:noFill/>
         </p:spPr>
         <p:txBody>
-          <a:bodyPr vert="horz" lIns="0" tIns="0" rIns="0" bIns="0" rtlCol="0" anchor="t">
+          <a:bodyPr vert="horz" lIns="0" tIns="0" rIns="0" bIns="0" anchor="t">
             <a:spAutoFit/>
           </a:bodyPr>
           <a:lstStyle/>
           <a:p>
             <a:r>
-              <a:rPr lang="fr-CA" sz="3400" b="1">
+              <a:rPr sz="3400" b="1">
                 <a:solidFill>
                   <a:srgbClr val="000000"/>
                 </a:solidFill>
-                <a:latin typeface="Arial" panose="020B0604020202020204" pitchFamily="34" charset="0"/>
+                <a:latin typeface="Arial"/>
+                <a:ea typeface="Arial"/>
+                <a:cs typeface="Arial"/>
               </a:rPr>
               <a:t>2.29%</a:t>
             </a:r>
@@ -4944,7 +5563,9 @@
               </a:ext>
             </a:extLst>
           </p:cNvPr>
-          <p:cNvSpPr txBox="1"/>
+          <p:cNvSpPr>
+            <a:spLocks noGrp="1"/>
+          </p:cNvSpPr>
           <p:nvPr/>
         </p:nvSpPr>
         <p:spPr>
@@ -4958,17 +5579,19 @@
           <a:noFill/>
         </p:spPr>
         <p:txBody>
-          <a:bodyPr vert="horz" lIns="0" tIns="0" rIns="0" bIns="0" rtlCol="0" anchor="t">
+          <a:bodyPr vert="horz" lIns="0" tIns="0" rIns="0" bIns="0" anchor="t">
             <a:spAutoFit/>
           </a:bodyPr>
           <a:lstStyle/>
           <a:p>
             <a:r>
-              <a:rPr lang="fr-CA" sz="1700">
+              <a:rPr sz="1700">
                 <a:solidFill>
                   <a:srgbClr val="4C525B"/>
                 </a:solidFill>
-                <a:latin typeface="Arial" panose="020B0604020202020204" pitchFamily="34" charset="0"/>
+                <a:latin typeface="Arial"/>
+                <a:ea typeface="Arial"/>
+                <a:cs typeface="Arial"/>
               </a:rPr>
               <a:t>Same-unit contractual growth</a:t>
             </a:r>
@@ -4984,7 +5607,9 @@
               </a:ext>
             </a:extLst>
           </p:cNvPr>
-          <p:cNvSpPr txBox="1"/>
+          <p:cNvSpPr>
+            <a:spLocks noGrp="1"/>
+          </p:cNvSpPr>
           <p:nvPr/>
         </p:nvSpPr>
         <p:spPr>
@@ -4998,26 +5623,22 @@
           <a:noFill/>
         </p:spPr>
         <p:txBody>
-          <a:bodyPr vert="horz" lIns="0" tIns="0" rIns="0" bIns="0" rtlCol="0" anchor="t">
+          <a:bodyPr vert="horz" lIns="0" tIns="0" rIns="0" bIns="0" anchor="t">
             <a:spAutoFit/>
           </a:bodyPr>
           <a:lstStyle/>
           <a:p>
             <a:r>
-              <a:rPr lang="en-US" sz="2200" b="1">
+              <a:rPr sz="2200" b="1">
                 <a:solidFill>
                   <a:srgbClr val="000000"/>
                 </a:solidFill>
-                <a:latin typeface="Arial" panose="020B0604020202020204" pitchFamily="34" charset="0"/>
+                <a:latin typeface="Arial"/>
+                <a:ea typeface="Arial"/>
+                <a:cs typeface="Arial"/>
               </a:rPr>
               <a:t>The forecast therefore compares each apartment with itself.</a:t>
             </a:r>
-            <a:endParaRPr lang="fr-CA" sz="2200" b="1">
-              <a:solidFill>
-                <a:srgbClr val="000000"/>
-              </a:solidFill>
-              <a:latin typeface="Arial" panose="020B0604020202020204" pitchFamily="34" charset="0"/>
-            </a:endParaRPr>
           </a:p>
         </p:txBody>
       </p:sp>
@@ -5030,7 +5651,9 @@
               </a:ext>
             </a:extLst>
           </p:cNvPr>
-          <p:cNvSpPr txBox="1"/>
+          <p:cNvSpPr>
+            <a:spLocks noGrp="1"/>
+          </p:cNvSpPr>
           <p:nvPr/>
         </p:nvSpPr>
         <p:spPr>
@@ -5044,24 +5667,44 @@
           <a:noFill/>
         </p:spPr>
         <p:txBody>
-          <a:bodyPr vert="horz" lIns="0" tIns="0" rIns="0" bIns="0" rtlCol="0" anchor="t">
+          <a:bodyPr vert="horz" lIns="0" tIns="0" rIns="0" bIns="0" anchor="t">
             <a:spAutoFit/>
           </a:bodyPr>
           <a:lstStyle/>
           <a:p>
-            <a:pPr algn="r"/>
-            <a:r>
-              <a:rPr lang="fr-CA" sz="900">
+            <a:pPr algn="r">
+              <a:buNone/>
+            </a:pPr>
+            <a:r>
+              <a:rPr sz="900">
                 <a:solidFill>
                   <a:srgbClr val="4C525B"/>
                 </a:solidFill>
-                <a:latin typeface="Arial" panose="020B0604020202020204" pitchFamily="34" charset="0"/>
+                <a:latin typeface="Arial"/>
+                <a:ea typeface="Arial"/>
+                <a:cs typeface="Arial"/>
               </a:rPr>
               <a:t>2</a:t>
             </a:r>
           </a:p>
         </p:txBody>
       </p:sp>
+      <p:graphicFrame>
+        <p:nvGraphicFramePr>
+          <p:cNvPr id="23" name="Portfolio median versus same-unit growth"/>
+          <p:cNvGraphicFramePr/>
+          <p:nvPr/>
+        </p:nvGraphicFramePr>
+        <p:xfrm>
+          <a:off x="523875" y="1428750"/>
+          <a:ext cx="7334250" cy="3714750"/>
+        </p:xfrm>
+        <a:graphic>
+          <a:graphicData uri="http://schemas.openxmlformats.org/drawingml/2006/chart">
+            <c:chart xmlns:c="http://schemas.openxmlformats.org/drawingml/2006/chart" xmlns:r="http://schemas.openxmlformats.org/officeDocument/2006/relationships" r:id="rId3"/>
+          </a:graphicData>
+        </a:graphic>
+      </p:graphicFrame>
     </p:spTree>
     <p:extLst>
       <p:ext uri="{BB962C8B-B14F-4D97-AF65-F5344CB8AC3E}">
@@ -5109,7 +5752,9 @@
               </a:ext>
             </a:extLst>
           </p:cNvPr>
-          <p:cNvSpPr txBox="1"/>
+          <p:cNvSpPr>
+            <a:spLocks noGrp="1"/>
+          </p:cNvSpPr>
           <p:nvPr/>
         </p:nvSpPr>
         <p:spPr>
@@ -5123,26 +5768,22 @@
           <a:noFill/>
         </p:spPr>
         <p:txBody>
-          <a:bodyPr vert="horz" lIns="0" tIns="0" rIns="0" bIns="0" rtlCol="0" anchor="t">
+          <a:bodyPr vert="horz" lIns="0" tIns="0" rIns="0" bIns="0" anchor="t">
             <a:spAutoFit/>
           </a:bodyPr>
           <a:lstStyle/>
           <a:p>
             <a:r>
-              <a:rPr lang="en-US" sz="3600" b="1" dirty="0">
+              <a:rPr sz="3600" b="1">
                 <a:solidFill>
                   <a:srgbClr val="000000"/>
                 </a:solidFill>
-                <a:latin typeface="Arial" panose="020B0604020202020204" pitchFamily="34" charset="0"/>
+                <a:latin typeface="Arial"/>
+                <a:ea typeface="Arial"/>
+                <a:cs typeface="Arial"/>
               </a:rPr>
               <a:t>The forecast uses one simple rule every year</a:t>
             </a:r>
-            <a:endParaRPr lang="fr-CA" sz="3600" b="1" dirty="0">
-              <a:solidFill>
-                <a:srgbClr val="000000"/>
-              </a:solidFill>
-              <a:latin typeface="Arial" panose="020B0604020202020204" pitchFamily="34" charset="0"/>
-            </a:endParaRPr>
           </a:p>
         </p:txBody>
       </p:sp>
@@ -5155,7 +5796,9 @@
               </a:ext>
             </a:extLst>
           </p:cNvPr>
-          <p:cNvSpPr txBox="1"/>
+          <p:cNvSpPr>
+            <a:spLocks noGrp="1"/>
+          </p:cNvSpPr>
           <p:nvPr/>
         </p:nvSpPr>
         <p:spPr>
@@ -5169,35 +5812,39 @@
           <a:noFill/>
         </p:spPr>
         <p:txBody>
-          <a:bodyPr vert="horz" lIns="0" tIns="0" rIns="0" bIns="0" rtlCol="0" anchor="t">
+          <a:bodyPr vert="horz" lIns="0" tIns="0" rIns="0" bIns="0" anchor="t">
             <a:spAutoFit/>
           </a:bodyPr>
           <a:lstStyle/>
           <a:p>
             <a:r>
-              <a:rPr lang="fr-CA" sz="3800" b="1">
+              <a:rPr sz="3800" b="1">
                 <a:solidFill>
                   <a:srgbClr val="3D8DFF"/>
                 </a:solidFill>
-                <a:latin typeface="Arial" panose="020B0604020202020204" pitchFamily="34" charset="0"/>
+                <a:latin typeface="Arial"/>
+                <a:ea typeface="Arial"/>
+                <a:cs typeface="Arial"/>
               </a:rPr>
               <a:t>01</a:t>
             </a:r>
           </a:p>
         </p:txBody>
       </p:sp>
-      <p:cxnSp>
-        <p:nvCxnSpPr>
+      <p:sp>
+        <p:nvSpPr>
           <p:cNvPr id="4" name="Straight Connector 3">
             <a:extLst>
               <a:ext uri="{FF2B5EF4-FFF2-40B4-BE49-F238E27FC236}">
-                <a16:creationId xmlns:a16="http://schemas.microsoft.com/office/drawing/2014/main" id="{72B80401-AADC-C6E5-14F0-3E6680A6DC40}"/>
-              </a:ext>
-            </a:extLst>
-          </p:cNvPr>
-          <p:cNvCxnSpPr/>
+                <a16:creationId xmlns:a16="http://schemas.microsoft.com/office/drawing/2014/main" id="{C12C7D74-3E84-47B0-A49F-44337BCD9467}"/>
+              </a:ext>
+            </a:extLst>
+          </p:cNvPr>
+          <p:cNvSpPr>
+            <a:spLocks noGrp="1"/>
+          </p:cNvSpPr>
           <p:nvPr/>
-        </p:nvCxnSpPr>
+        </p:nvSpPr>
         <p:spPr>
           <a:xfrm>
             <a:off x="508000" y="2476500"/>
@@ -5226,7 +5873,14 @@
             <a:schemeClr val="tx1"/>
           </a:fontRef>
         </p:style>
-      </p:cxnSp>
+        <p:txBody>
+          <a:bodyPr/>
+          <a:lstStyle/>
+          <a:p>
+            <a:endParaRPr lang="fr-CA"/>
+          </a:p>
+        </p:txBody>
+      </p:sp>
       <p:sp>
         <p:nvSpPr>
           <p:cNvPr id="5" name="TextBox 4">
@@ -5236,7 +5890,9 @@
               </a:ext>
             </a:extLst>
           </p:cNvPr>
-          <p:cNvSpPr txBox="1"/>
+          <p:cNvSpPr>
+            <a:spLocks noGrp="1"/>
+          </p:cNvSpPr>
           <p:nvPr/>
         </p:nvSpPr>
         <p:spPr>
@@ -5250,17 +5906,19 @@
           <a:noFill/>
         </p:spPr>
         <p:txBody>
-          <a:bodyPr vert="horz" lIns="0" tIns="0" rIns="0" bIns="0" rtlCol="0" anchor="t">
+          <a:bodyPr vert="horz" lIns="0" tIns="0" rIns="0" bIns="0" anchor="t">
             <a:spAutoFit/>
           </a:bodyPr>
           <a:lstStyle/>
           <a:p>
             <a:r>
-              <a:rPr lang="fr-CA" sz="2400" b="1">
+              <a:rPr sz="2400" b="1">
                 <a:solidFill>
                   <a:srgbClr val="000000"/>
                 </a:solidFill>
-                <a:latin typeface="Arial" panose="020B0604020202020204" pitchFamily="34" charset="0"/>
+                <a:latin typeface="Arial"/>
+                <a:ea typeface="Arial"/>
+                <a:cs typeface="Arial"/>
               </a:rPr>
               <a:t>Match the same unit</a:t>
             </a:r>
@@ -5276,7 +5934,9 @@
               </a:ext>
             </a:extLst>
           </p:cNvPr>
-          <p:cNvSpPr txBox="1"/>
+          <p:cNvSpPr>
+            <a:spLocks noGrp="1"/>
+          </p:cNvSpPr>
           <p:nvPr/>
         </p:nvSpPr>
         <p:spPr>
@@ -5290,27 +5950,23 @@
           <a:noFill/>
         </p:spPr>
         <p:txBody>
-          <a:bodyPr vert="horz" lIns="0" tIns="0" rIns="0" bIns="0" rtlCol="0" anchor="t">
+          <a:bodyPr vert="horz" lIns="0" tIns="0" rIns="0" bIns="0" anchor="t">
             <a:spAutoFit/>
           </a:bodyPr>
           <a:lstStyle/>
           <a:p>
             <a:r>
-              <a:rPr lang="en-US">
+              <a:rPr>
                 <a:solidFill>
                   <a:srgbClr val="4C525B"/>
                 </a:solidFill>
-                <a:latin typeface="Arial" panose="020B0604020202020204" pitchFamily="34" charset="0"/>
+                <a:latin typeface="Arial"/>
+                <a:ea typeface="Arial"/>
+                <a:cs typeface="Arial"/>
               </a:rPr>
               <a:t>Use sPropCode + sUnitCode.
 Keep gaps from 0.5 to 2.5 years.</a:t>
             </a:r>
-            <a:endParaRPr lang="fr-CA">
-              <a:solidFill>
-                <a:srgbClr val="4C525B"/>
-              </a:solidFill>
-              <a:latin typeface="Arial" panose="020B0604020202020204" pitchFamily="34" charset="0"/>
-            </a:endParaRPr>
           </a:p>
         </p:txBody>
       </p:sp>
@@ -5323,7 +5979,9 @@
               </a:ext>
             </a:extLst>
           </p:cNvPr>
-          <p:cNvSpPr txBox="1"/>
+          <p:cNvSpPr>
+            <a:spLocks noGrp="1"/>
+          </p:cNvSpPr>
           <p:nvPr/>
         </p:nvSpPr>
         <p:spPr>
@@ -5337,35 +5995,39 @@
           <a:noFill/>
         </p:spPr>
         <p:txBody>
-          <a:bodyPr vert="horz" lIns="0" tIns="0" rIns="0" bIns="0" rtlCol="0" anchor="t">
+          <a:bodyPr vert="horz" lIns="0" tIns="0" rIns="0" bIns="0" anchor="t">
             <a:spAutoFit/>
           </a:bodyPr>
           <a:lstStyle/>
           <a:p>
             <a:r>
-              <a:rPr lang="fr-CA" sz="3800" b="1">
+              <a:rPr sz="3800" b="1">
                 <a:solidFill>
                   <a:srgbClr val="3D8DFF"/>
                 </a:solidFill>
-                <a:latin typeface="Arial" panose="020B0604020202020204" pitchFamily="34" charset="0"/>
+                <a:latin typeface="Arial"/>
+                <a:ea typeface="Arial"/>
+                <a:cs typeface="Arial"/>
               </a:rPr>
               <a:t>02</a:t>
             </a:r>
           </a:p>
         </p:txBody>
       </p:sp>
-      <p:cxnSp>
-        <p:nvCxnSpPr>
+      <p:sp>
+        <p:nvSpPr>
           <p:cNvPr id="8" name="Straight Connector 7">
             <a:extLst>
               <a:ext uri="{FF2B5EF4-FFF2-40B4-BE49-F238E27FC236}">
-                <a16:creationId xmlns:a16="http://schemas.microsoft.com/office/drawing/2014/main" id="{77B86547-D0CC-8B9C-EB5F-C5EC079419D6}"/>
-              </a:ext>
-            </a:extLst>
-          </p:cNvPr>
-          <p:cNvCxnSpPr/>
+                <a16:creationId xmlns:a16="http://schemas.microsoft.com/office/drawing/2014/main" id="{19EDA390-9097-4154-82DF-9BE1E1DD7AB7}"/>
+              </a:ext>
+            </a:extLst>
+          </p:cNvPr>
+          <p:cNvSpPr>
+            <a:spLocks noGrp="1"/>
+          </p:cNvSpPr>
           <p:nvPr/>
-        </p:nvCxnSpPr>
+        </p:nvSpPr>
         <p:spPr>
           <a:xfrm>
             <a:off x="4318000" y="2476500"/>
@@ -5394,7 +6056,14 @@
             <a:schemeClr val="tx1"/>
           </a:fontRef>
         </p:style>
-      </p:cxnSp>
+        <p:txBody>
+          <a:bodyPr/>
+          <a:lstStyle/>
+          <a:p>
+            <a:endParaRPr lang="fr-CA"/>
+          </a:p>
+        </p:txBody>
+      </p:sp>
       <p:sp>
         <p:nvSpPr>
           <p:cNvPr id="9" name="TextBox 8">
@@ -5404,7 +6073,9 @@
               </a:ext>
             </a:extLst>
           </p:cNvPr>
-          <p:cNvSpPr txBox="1"/>
+          <p:cNvSpPr>
+            <a:spLocks noGrp="1"/>
+          </p:cNvSpPr>
           <p:nvPr/>
         </p:nvSpPr>
         <p:spPr>
@@ -5418,17 +6089,19 @@
           <a:noFill/>
         </p:spPr>
         <p:txBody>
-          <a:bodyPr vert="horz" lIns="0" tIns="0" rIns="0" bIns="0" rtlCol="0" anchor="t">
+          <a:bodyPr vert="horz" lIns="0" tIns="0" rIns="0" bIns="0" anchor="t">
             <a:spAutoFit/>
           </a:bodyPr>
           <a:lstStyle/>
           <a:p>
             <a:r>
-              <a:rPr lang="fr-CA" sz="2400" b="1">
+              <a:rPr sz="2400" b="1">
                 <a:solidFill>
                   <a:srgbClr val="000000"/>
                 </a:solidFill>
-                <a:latin typeface="Arial" panose="020B0604020202020204" pitchFamily="34" charset="0"/>
+                <a:latin typeface="Arial"/>
+                <a:ea typeface="Arial"/>
+                <a:cs typeface="Arial"/>
               </a:rPr>
               <a:t>Measure effective rent</a:t>
             </a:r>
@@ -5444,7 +6117,9 @@
               </a:ext>
             </a:extLst>
           </p:cNvPr>
-          <p:cNvSpPr txBox="1"/>
+          <p:cNvSpPr>
+            <a:spLocks noGrp="1"/>
+          </p:cNvSpPr>
           <p:nvPr/>
         </p:nvSpPr>
         <p:spPr>
@@ -5458,27 +6133,23 @@
           <a:noFill/>
         </p:spPr>
         <p:txBody>
-          <a:bodyPr vert="horz" lIns="0" tIns="0" rIns="0" bIns="0" rtlCol="0" anchor="t">
+          <a:bodyPr vert="horz" lIns="0" tIns="0" rIns="0" bIns="0" anchor="t">
             <a:spAutoFit/>
           </a:bodyPr>
           <a:lstStyle/>
           <a:p>
             <a:r>
-              <a:rPr lang="en-US">
+              <a:rPr>
                 <a:solidFill>
                   <a:srgbClr val="4C525B"/>
                 </a:solidFill>
-                <a:latin typeface="Arial" panose="020B0604020202020204" pitchFamily="34" charset="0"/>
+                <a:latin typeface="Arial"/>
+                <a:ea typeface="Arial"/>
+                <a:cs typeface="Arial"/>
               </a:rPr>
               <a:t>Include concessions.
 Annualize the change between leases.</a:t>
             </a:r>
-            <a:endParaRPr lang="fr-CA">
-              <a:solidFill>
-                <a:srgbClr val="4C525B"/>
-              </a:solidFill>
-              <a:latin typeface="Arial" panose="020B0604020202020204" pitchFamily="34" charset="0"/>
-            </a:endParaRPr>
           </a:p>
         </p:txBody>
       </p:sp>
@@ -5491,7 +6162,9 @@
               </a:ext>
             </a:extLst>
           </p:cNvPr>
-          <p:cNvSpPr txBox="1"/>
+          <p:cNvSpPr>
+            <a:spLocks noGrp="1"/>
+          </p:cNvSpPr>
           <p:nvPr/>
         </p:nvSpPr>
         <p:spPr>
@@ -5505,35 +6178,39 @@
           <a:noFill/>
         </p:spPr>
         <p:txBody>
-          <a:bodyPr vert="horz" lIns="0" tIns="0" rIns="0" bIns="0" rtlCol="0" anchor="t">
+          <a:bodyPr vert="horz" lIns="0" tIns="0" rIns="0" bIns="0" anchor="t">
             <a:spAutoFit/>
           </a:bodyPr>
           <a:lstStyle/>
           <a:p>
             <a:r>
-              <a:rPr lang="fr-CA" sz="3800" b="1">
+              <a:rPr sz="3800" b="1">
                 <a:solidFill>
                   <a:srgbClr val="3D8DFF"/>
                 </a:solidFill>
-                <a:latin typeface="Arial" panose="020B0604020202020204" pitchFamily="34" charset="0"/>
+                <a:latin typeface="Arial"/>
+                <a:ea typeface="Arial"/>
+                <a:cs typeface="Arial"/>
               </a:rPr>
               <a:t>03</a:t>
             </a:r>
           </a:p>
         </p:txBody>
       </p:sp>
-      <p:cxnSp>
-        <p:nvCxnSpPr>
+      <p:sp>
+        <p:nvSpPr>
           <p:cNvPr id="12" name="Straight Connector 11">
             <a:extLst>
               <a:ext uri="{FF2B5EF4-FFF2-40B4-BE49-F238E27FC236}">
-                <a16:creationId xmlns:a16="http://schemas.microsoft.com/office/drawing/2014/main" id="{93ED4BFF-4ACA-8E8B-4E13-1515E817AA52}"/>
-              </a:ext>
-            </a:extLst>
-          </p:cNvPr>
-          <p:cNvCxnSpPr/>
+                <a16:creationId xmlns:a16="http://schemas.microsoft.com/office/drawing/2014/main" id="{FC91C18A-D130-424B-A385-22EF0F5A930B}"/>
+              </a:ext>
+            </a:extLst>
+          </p:cNvPr>
+          <p:cNvSpPr>
+            <a:spLocks noGrp="1"/>
+          </p:cNvSpPr>
           <p:nvPr/>
-        </p:nvCxnSpPr>
+        </p:nvSpPr>
         <p:spPr>
           <a:xfrm>
             <a:off x="8128000" y="2476500"/>
@@ -5562,7 +6239,14 @@
             <a:schemeClr val="tx1"/>
           </a:fontRef>
         </p:style>
-      </p:cxnSp>
+        <p:txBody>
+          <a:bodyPr/>
+          <a:lstStyle/>
+          <a:p>
+            <a:endParaRPr lang="fr-CA"/>
+          </a:p>
+        </p:txBody>
+      </p:sp>
       <p:sp>
         <p:nvSpPr>
           <p:cNvPr id="13" name="TextBox 12">
@@ -5572,7 +6256,9 @@
               </a:ext>
             </a:extLst>
           </p:cNvPr>
-          <p:cNvSpPr txBox="1"/>
+          <p:cNvSpPr>
+            <a:spLocks noGrp="1"/>
+          </p:cNvSpPr>
           <p:nvPr/>
         </p:nvSpPr>
         <p:spPr>
@@ -5586,17 +6272,19 @@
           <a:noFill/>
         </p:spPr>
         <p:txBody>
-          <a:bodyPr vert="horz" lIns="0" tIns="0" rIns="0" bIns="0" rtlCol="0" anchor="t">
+          <a:bodyPr vert="horz" lIns="0" tIns="0" rIns="0" bIns="0" anchor="t">
             <a:spAutoFit/>
           </a:bodyPr>
           <a:lstStyle/>
           <a:p>
             <a:r>
-              <a:rPr lang="fr-CA" sz="2400" b="1">
+              <a:rPr sz="2400" b="1">
                 <a:solidFill>
                   <a:srgbClr val="000000"/>
                 </a:solidFill>
-                <a:latin typeface="Arial" panose="020B0604020202020204" pitchFamily="34" charset="0"/>
+                <a:latin typeface="Arial"/>
+                <a:ea typeface="Arial"/>
+                <a:cs typeface="Arial"/>
               </a:rPr>
               <a:t>Backtest before 2026</a:t>
             </a:r>
@@ -5612,7 +6300,9 @@
               </a:ext>
             </a:extLst>
           </p:cNvPr>
-          <p:cNvSpPr txBox="1"/>
+          <p:cNvSpPr>
+            <a:spLocks noGrp="1"/>
+          </p:cNvSpPr>
           <p:nvPr/>
         </p:nvSpPr>
         <p:spPr>
@@ -5626,27 +6316,23 @@
           <a:noFill/>
         </p:spPr>
         <p:txBody>
-          <a:bodyPr vert="horz" lIns="0" tIns="0" rIns="0" bIns="0" rtlCol="0" anchor="t">
+          <a:bodyPr vert="horz" lIns="0" tIns="0" rIns="0" bIns="0" anchor="t">
             <a:spAutoFit/>
           </a:bodyPr>
           <a:lstStyle/>
           <a:p>
             <a:r>
-              <a:rPr lang="en-US">
+              <a:rPr>
                 <a:solidFill>
                   <a:srgbClr val="4C525B"/>
                 </a:solidFill>
-                <a:latin typeface="Arial" panose="020B0604020202020204" pitchFamily="34" charset="0"/>
+                <a:latin typeface="Arial"/>
+                <a:ea typeface="Arial"/>
+                <a:cs typeface="Arial"/>
               </a:rPr>
               <a:t>Predict 2023-2025 using only earlier years.
 Then estimate 2026.</a:t>
             </a:r>
-            <a:endParaRPr lang="fr-CA">
-              <a:solidFill>
-                <a:srgbClr val="4C525B"/>
-              </a:solidFill>
-              <a:latin typeface="Arial" panose="020B0604020202020204" pitchFamily="34" charset="0"/>
-            </a:endParaRPr>
           </a:p>
         </p:txBody>
       </p:sp>
@@ -5659,7 +6345,9 @@
               </a:ext>
             </a:extLst>
           </p:cNvPr>
-          <p:cNvSpPr txBox="1"/>
+          <p:cNvSpPr>
+            <a:spLocks noGrp="1"/>
+          </p:cNvSpPr>
           <p:nvPr/>
         </p:nvSpPr>
         <p:spPr>
@@ -5673,26 +6361,22 @@
           <a:noFill/>
         </p:spPr>
         <p:txBody>
-          <a:bodyPr vert="horz" lIns="0" tIns="0" rIns="0" bIns="0" rtlCol="0" anchor="t">
+          <a:bodyPr vert="horz" lIns="0" tIns="0" rIns="0" bIns="0" anchor="t">
             <a:spAutoFit/>
           </a:bodyPr>
           <a:lstStyle/>
           <a:p>
             <a:r>
-              <a:rPr lang="en-US" sz="2000" b="1">
+              <a:rPr sz="2000" b="1">
                 <a:solidFill>
                   <a:srgbClr val="000000"/>
                 </a:solidFill>
-                <a:latin typeface="Arial" panose="020B0604020202020204" pitchFamily="34" charset="0"/>
+                <a:latin typeface="Arial"/>
+                <a:ea typeface="Arial"/>
+                <a:cs typeface="Arial"/>
               </a:rPr>
-              <a:t>The same trailing-mean helper is shared by estimate_2026() and backtest().</a:t>
-            </a:r>
-            <a:endParaRPr lang="fr-CA" sz="2000" b="1">
-              <a:solidFill>
-                <a:srgbClr val="000000"/>
-              </a:solidFill>
-              <a:latin typeface="Arial" panose="020B0604020202020204" pitchFamily="34" charset="0"/>
-            </a:endParaRPr>
+              <a:t>The same rule is used for the backtest and the 2026 forecast.</a:t>
+            </a:r>
           </a:p>
         </p:txBody>
       </p:sp>
@@ -5705,7 +6389,9 @@
               </a:ext>
             </a:extLst>
           </p:cNvPr>
-          <p:cNvSpPr txBox="1"/>
+          <p:cNvSpPr>
+            <a:spLocks noGrp="1"/>
+          </p:cNvSpPr>
           <p:nvPr/>
         </p:nvSpPr>
         <p:spPr>
@@ -5719,18 +6405,22 @@
           <a:noFill/>
         </p:spPr>
         <p:txBody>
-          <a:bodyPr vert="horz" lIns="0" tIns="0" rIns="0" bIns="0" rtlCol="0" anchor="t">
+          <a:bodyPr vert="horz" lIns="0" tIns="0" rIns="0" bIns="0" anchor="t">
             <a:spAutoFit/>
           </a:bodyPr>
           <a:lstStyle/>
           <a:p>
-            <a:pPr algn="r"/>
-            <a:r>
-              <a:rPr lang="fr-CA" sz="900">
+            <a:pPr algn="r">
+              <a:buNone/>
+            </a:pPr>
+            <a:r>
+              <a:rPr sz="900">
                 <a:solidFill>
                   <a:srgbClr val="4C525B"/>
                 </a:solidFill>
-                <a:latin typeface="Arial" panose="020B0604020202020204" pitchFamily="34" charset="0"/>
+                <a:latin typeface="Arial"/>
+                <a:ea typeface="Arial"/>
+                <a:cs typeface="Arial"/>
               </a:rPr>
               <a:t>3</a:t>
             </a:r>
@@ -5780,11 +6470,13 @@
           <p:cNvPr id="2" name="TextBox 1">
             <a:extLst>
               <a:ext uri="{FF2B5EF4-FFF2-40B4-BE49-F238E27FC236}">
-                <a16:creationId xmlns:a16="http://schemas.microsoft.com/office/drawing/2014/main" id="{8DE0B6E5-AD54-E278-649E-B1D67E7FB81A}"/>
-              </a:ext>
-            </a:extLst>
-          </p:cNvPr>
-          <p:cNvSpPr txBox="1"/>
+                <a16:creationId xmlns:a16="http://schemas.microsoft.com/office/drawing/2014/main" id="{879E521D-D6B2-EC52-9FD9-52F7680F533A}"/>
+              </a:ext>
+            </a:extLst>
+          </p:cNvPr>
+          <p:cNvSpPr>
+            <a:spLocks noGrp="1"/>
+          </p:cNvSpPr>
           <p:nvPr/>
         </p:nvSpPr>
         <p:spPr>
@@ -5798,91 +6490,43 @@
           <a:noFill/>
         </p:spPr>
         <p:txBody>
-          <a:bodyPr vert="horz" lIns="0" tIns="0" rIns="0" bIns="0" rtlCol="0" anchor="t">
+          <a:bodyPr vert="horz" lIns="0" tIns="0" rIns="0" bIns="0" anchor="t">
             <a:spAutoFit/>
           </a:bodyPr>
           <a:lstStyle/>
           <a:p>
             <a:r>
-              <a:rPr lang="en-US" sz="3600" b="1">
+              <a:rPr sz="3600" b="1">
                 <a:solidFill>
                   <a:srgbClr val="000000"/>
                 </a:solidFill>
-                <a:latin typeface="Arial" panose="020B0604020202020204" pitchFamily="34" charset="0"/>
+                <a:latin typeface="Arial"/>
+                <a:ea typeface="Arial"/>
+                <a:cs typeface="Arial"/>
               </a:rPr>
-              <a:t>Concessions and turnover explain recent growth</a:t>
-            </a:r>
-            <a:endParaRPr lang="fr-CA" sz="3600" b="1">
-              <a:solidFill>
-                <a:srgbClr val="000000"/>
-              </a:solidFill>
-              <a:latin typeface="Arial" panose="020B0604020202020204" pitchFamily="34" charset="0"/>
-            </a:endParaRPr>
-          </a:p>
-        </p:txBody>
-      </p:sp>
-      <p:sp>
-        <p:nvSpPr>
-          <p:cNvPr id="3" name="TextBox 2">
-            <a:extLst>
-              <a:ext uri="{FF2B5EF4-FFF2-40B4-BE49-F238E27FC236}">
-                <a16:creationId xmlns:a16="http://schemas.microsoft.com/office/drawing/2014/main" id="{81B7C00F-D94D-127C-49CA-74DBC1CC8874}"/>
-              </a:ext>
-            </a:extLst>
-          </p:cNvPr>
-          <p:cNvSpPr txBox="1"/>
+              <a:t>Effective-rent growth rebounded to 3.58% in 2025</a:t>
+            </a:r>
+          </a:p>
+        </p:txBody>
+      </p:sp>
+      <p:sp>
+        <p:nvSpPr>
+          <p:cNvPr id="5" name="Rectangle 4">
+            <a:extLst>
+              <a:ext uri="{FF2B5EF4-FFF2-40B4-BE49-F238E27FC236}">
+                <a16:creationId xmlns:a16="http://schemas.microsoft.com/office/drawing/2014/main" id="{ADB75701-1722-2036-12C8-752E5C82A6FB}"/>
+              </a:ext>
+            </a:extLst>
+          </p:cNvPr>
+          <p:cNvSpPr>
+            <a:spLocks noGrp="1"/>
+          </p:cNvSpPr>
           <p:nvPr/>
         </p:nvSpPr>
         <p:spPr>
           <a:xfrm>
-            <a:off x="381000" y="1143000"/>
-            <a:ext cx="10033000" cy="323165"/>
-          </a:xfrm>
-          <a:prstGeom prst="rect">
-            <a:avLst/>
-          </a:prstGeom>
-          <a:noFill/>
-        </p:spPr>
-        <p:txBody>
-          <a:bodyPr vert="horz" lIns="0" tIns="0" rIns="0" bIns="0" rtlCol="0" anchor="t">
-            <a:spAutoFit/>
-          </a:bodyPr>
-          <a:lstStyle/>
-          <a:p>
-            <a:r>
-              <a:rPr lang="en-US" sz="2100">
-                <a:solidFill>
-                  <a:srgbClr val="4C525B"/>
-                </a:solidFill>
-                <a:latin typeface="Arial" panose="020B0604020202020204" pitchFamily="34" charset="0"/>
-              </a:rPr>
-              <a:t>Contract rent alone would overstate the growth tenants actually pay.</a:t>
-            </a:r>
-            <a:endParaRPr lang="fr-CA" sz="2100">
-              <a:solidFill>
-                <a:srgbClr val="4C525B"/>
-              </a:solidFill>
-              <a:latin typeface="Arial" panose="020B0604020202020204" pitchFamily="34" charset="0"/>
-            </a:endParaRPr>
-          </a:p>
-        </p:txBody>
-      </p:sp>
-      <p:sp>
-        <p:nvSpPr>
-          <p:cNvPr id="4" name="Rectangle 3">
-            <a:extLst>
-              <a:ext uri="{FF2B5EF4-FFF2-40B4-BE49-F238E27FC236}">
-                <a16:creationId xmlns:a16="http://schemas.microsoft.com/office/drawing/2014/main" id="{9AC1681A-5622-97BE-F765-05EE0E8F20C0}"/>
-              </a:ext>
-            </a:extLst>
-          </p:cNvPr>
-          <p:cNvSpPr/>
-          <p:nvPr/>
-        </p:nvSpPr>
-        <p:spPr>
-          <a:xfrm>
-            <a:off x="508000" y="2095500"/>
-            <a:ext cx="3302000" cy="2921000"/>
+            <a:off x="8382000" y="1587500"/>
+            <a:ext cx="3175000" cy="1460500"/>
           </a:xfrm>
           <a:prstGeom prst="rect">
             <a:avLst/>
@@ -5890,25 +6534,10 @@
           <a:solidFill>
             <a:srgbClr val="EDEDED"/>
           </a:solidFill>
-          <a:ln w="19050" cap="flat" cmpd="sng" algn="ctr">
+          <a:ln w="19050" cmpd="sng">
             <a:noFill/>
             <a:prstDash val="solid"/>
-            <a:miter lim="800000"/>
           </a:ln>
-          <a:effectLst/>
-          <a:extLst>
-            <a:ext uri="{91240B29-F687-4F45-9708-019B960494DF}">
-              <a14:hiddenLine xmlns:a14="http://schemas.microsoft.com/office/drawing/2010/main" w="19050" cap="flat" cmpd="sng" algn="ctr">
-                <a:solidFill>
-                  <a:schemeClr val="accent1">
-                    <a:shade val="15000"/>
-                  </a:schemeClr>
-                </a:solidFill>
-                <a:prstDash val="solid"/>
-                <a:miter lim="800000"/>
-              </a14:hiddenLine>
-            </a:ext>
-          </a:extLst>
         </p:spPr>
         <p:style>
           <a:lnRef idx="2">
@@ -5927,30 +6556,34 @@
           </a:fontRef>
         </p:style>
         <p:txBody>
-          <a:bodyPr rtlCol="0" anchor="ctr"/>
-          <a:lstStyle/>
-          <a:p>
-            <a:pPr algn="ctr"/>
-            <a:endParaRPr lang="fr-CA"/>
-          </a:p>
-        </p:txBody>
-      </p:sp>
-      <p:sp>
-        <p:nvSpPr>
-          <p:cNvPr id="5" name="TextBox 4">
-            <a:extLst>
-              <a:ext uri="{FF2B5EF4-FFF2-40B4-BE49-F238E27FC236}">
-                <a16:creationId xmlns:a16="http://schemas.microsoft.com/office/drawing/2014/main" id="{679F13DB-2F76-6500-17CB-6123ADF763D7}"/>
-              </a:ext>
-            </a:extLst>
-          </p:cNvPr>
-          <p:cNvSpPr txBox="1"/>
+          <a:bodyPr anchor="ctr"/>
+          <a:lstStyle/>
+          <a:p>
+            <a:pPr algn="ctr">
+              <a:buNone/>
+            </a:pPr>
+            <a:endParaRPr/>
+          </a:p>
+        </p:txBody>
+      </p:sp>
+      <p:sp>
+        <p:nvSpPr>
+          <p:cNvPr id="6" name="TextBox 5">
+            <a:extLst>
+              <a:ext uri="{FF2B5EF4-FFF2-40B4-BE49-F238E27FC236}">
+                <a16:creationId xmlns:a16="http://schemas.microsoft.com/office/drawing/2014/main" id="{7401F925-79AA-A638-CD40-01C14156D7DC}"/>
+              </a:ext>
+            </a:extLst>
+          </p:cNvPr>
+          <p:cNvSpPr>
+            <a:spLocks noGrp="1"/>
+          </p:cNvSpPr>
           <p:nvPr/>
         </p:nvSpPr>
         <p:spPr>
           <a:xfrm>
-            <a:off x="787400" y="2603500"/>
-            <a:ext cx="2730500" cy="584775"/>
+            <a:off x="8636000" y="1816100"/>
+            <a:ext cx="2540000" cy="523220"/>
           </a:xfrm>
           <a:prstGeom prst="rect">
             <a:avLst/>
@@ -5958,39 +6591,43 @@
           <a:noFill/>
         </p:spPr>
         <p:txBody>
-          <a:bodyPr vert="horz" lIns="0" tIns="0" rIns="0" bIns="0" rtlCol="0" anchor="t">
+          <a:bodyPr vert="horz" lIns="0" tIns="0" rIns="0" bIns="0" anchor="t">
             <a:spAutoFit/>
           </a:bodyPr>
           <a:lstStyle/>
           <a:p>
             <a:r>
-              <a:rPr lang="fr-CA" sz="3800" b="1">
+              <a:rPr sz="3400" b="1">
                 <a:solidFill>
                   <a:srgbClr val="000000"/>
                 </a:solidFill>
-                <a:latin typeface="Arial" panose="020B0604020202020204" pitchFamily="34" charset="0"/>
+                <a:latin typeface="Arial"/>
+                <a:ea typeface="Arial"/>
+                <a:cs typeface="Arial"/>
               </a:rPr>
-              <a:t>85.39%</a:t>
-            </a:r>
-          </a:p>
-        </p:txBody>
-      </p:sp>
-      <p:sp>
-        <p:nvSpPr>
-          <p:cNvPr id="6" name="TextBox 5">
-            <a:extLst>
-              <a:ext uri="{FF2B5EF4-FFF2-40B4-BE49-F238E27FC236}">
-                <a16:creationId xmlns:a16="http://schemas.microsoft.com/office/drawing/2014/main" id="{A01AD95F-5490-ABD8-AEAA-9FA2FBC87A36}"/>
-              </a:ext>
-            </a:extLst>
-          </p:cNvPr>
-          <p:cNvSpPr txBox="1"/>
+              <a:t>3.58%</a:t>
+            </a:r>
+          </a:p>
+        </p:txBody>
+      </p:sp>
+      <p:sp>
+        <p:nvSpPr>
+          <p:cNvPr id="7" name="TextBox 6">
+            <a:extLst>
+              <a:ext uri="{FF2B5EF4-FFF2-40B4-BE49-F238E27FC236}">
+                <a16:creationId xmlns:a16="http://schemas.microsoft.com/office/drawing/2014/main" id="{5923B0DF-67DD-BDB8-A39D-AB5F8DFAAC06}"/>
+              </a:ext>
+            </a:extLst>
+          </p:cNvPr>
+          <p:cNvSpPr>
+            <a:spLocks noGrp="1"/>
+          </p:cNvSpPr>
           <p:nvPr/>
         </p:nvSpPr>
         <p:spPr>
           <a:xfrm>
-            <a:off x="787400" y="3683000"/>
-            <a:ext cx="2730500" cy="584775"/>
+            <a:off x="8636000" y="2425700"/>
+            <a:ext cx="2603500" cy="523220"/>
           </a:xfrm>
           <a:prstGeom prst="rect">
             <a:avLst/>
@@ -5998,72 +6635,54 @@
           <a:noFill/>
         </p:spPr>
         <p:txBody>
-          <a:bodyPr vert="horz" lIns="0" tIns="0" rIns="0" bIns="0" rtlCol="0" anchor="t">
+          <a:bodyPr vert="horz" lIns="0" tIns="0" rIns="0" bIns="0" anchor="t">
             <a:spAutoFit/>
           </a:bodyPr>
           <a:lstStyle/>
           <a:p>
             <a:r>
-              <a:rPr lang="en-US" sz="1900">
+              <a:rPr sz="1700">
                 <a:solidFill>
                   <a:srgbClr val="4C525B"/>
                 </a:solidFill>
-                <a:latin typeface="Arial" panose="020B0604020202020204" pitchFamily="34" charset="0"/>
+                <a:latin typeface="Arial"/>
+                <a:ea typeface="Arial"/>
+                <a:cs typeface="Arial"/>
               </a:rPr>
-              <a:t>2025 leases with
-a concession</a:t>
-            </a:r>
-            <a:endParaRPr lang="fr-CA" sz="1900">
-              <a:solidFill>
-                <a:srgbClr val="4C525B"/>
-              </a:solidFill>
-              <a:latin typeface="Arial" panose="020B0604020202020204" pitchFamily="34" charset="0"/>
-            </a:endParaRPr>
-          </a:p>
-        </p:txBody>
-      </p:sp>
-      <p:sp>
-        <p:nvSpPr>
-          <p:cNvPr id="7" name="Rectangle 6">
-            <a:extLst>
-              <a:ext uri="{FF2B5EF4-FFF2-40B4-BE49-F238E27FC236}">
-                <a16:creationId xmlns:a16="http://schemas.microsoft.com/office/drawing/2014/main" id="{CB0B4743-A1C0-24BC-519E-E984CFF16933}"/>
-              </a:ext>
-            </a:extLst>
-          </p:cNvPr>
-          <p:cNvSpPr/>
+              <a:t>2025 effective-rent growth</a:t>
+            </a:r>
+          </a:p>
+        </p:txBody>
+      </p:sp>
+      <p:sp>
+        <p:nvSpPr>
+          <p:cNvPr id="8" name="Rectangle 7">
+            <a:extLst>
+              <a:ext uri="{FF2B5EF4-FFF2-40B4-BE49-F238E27FC236}">
+                <a16:creationId xmlns:a16="http://schemas.microsoft.com/office/drawing/2014/main" id="{ECBE9265-FB12-04CB-B2D6-A1208BC4A9CE}"/>
+              </a:ext>
+            </a:extLst>
+          </p:cNvPr>
+          <p:cNvSpPr>
+            <a:spLocks noGrp="1"/>
+          </p:cNvSpPr>
           <p:nvPr/>
         </p:nvSpPr>
         <p:spPr>
           <a:xfrm>
-            <a:off x="4381500" y="2095500"/>
-            <a:ext cx="3302000" cy="2921000"/>
+            <a:off x="8382000" y="3302000"/>
+            <a:ext cx="3175000" cy="1460500"/>
           </a:xfrm>
           <a:prstGeom prst="rect">
             <a:avLst/>
           </a:prstGeom>
           <a:solidFill>
-            <a:srgbClr val="EDEDED"/>
+            <a:srgbClr val="D0EDFA"/>
           </a:solidFill>
-          <a:ln w="19050" cap="flat" cmpd="sng" algn="ctr">
+          <a:ln w="19050" cmpd="sng">
             <a:noFill/>
             <a:prstDash val="solid"/>
-            <a:miter lim="800000"/>
           </a:ln>
-          <a:effectLst/>
-          <a:extLst>
-            <a:ext uri="{91240B29-F687-4F45-9708-019B960494DF}">
-              <a14:hiddenLine xmlns:a14="http://schemas.microsoft.com/office/drawing/2010/main" w="19050" cap="flat" cmpd="sng" algn="ctr">
-                <a:solidFill>
-                  <a:schemeClr val="accent1">
-                    <a:shade val="15000"/>
-                  </a:schemeClr>
-                </a:solidFill>
-                <a:prstDash val="solid"/>
-                <a:miter lim="800000"/>
-              </a14:hiddenLine>
-            </a:ext>
-          </a:extLst>
         </p:spPr>
         <p:style>
           <a:lnRef idx="2">
@@ -6082,30 +6701,34 @@
           </a:fontRef>
         </p:style>
         <p:txBody>
-          <a:bodyPr rtlCol="0" anchor="ctr"/>
-          <a:lstStyle/>
-          <a:p>
-            <a:pPr algn="ctr"/>
-            <a:endParaRPr lang="fr-CA"/>
-          </a:p>
-        </p:txBody>
-      </p:sp>
-      <p:sp>
-        <p:nvSpPr>
-          <p:cNvPr id="8" name="TextBox 7">
-            <a:extLst>
-              <a:ext uri="{FF2B5EF4-FFF2-40B4-BE49-F238E27FC236}">
-                <a16:creationId xmlns:a16="http://schemas.microsoft.com/office/drawing/2014/main" id="{95FF9312-F4A9-8110-D0E2-277B3345A211}"/>
-              </a:ext>
-            </a:extLst>
-          </p:cNvPr>
-          <p:cNvSpPr txBox="1"/>
+          <a:bodyPr anchor="ctr"/>
+          <a:lstStyle/>
+          <a:p>
+            <a:pPr algn="ctr">
+              <a:buNone/>
+            </a:pPr>
+            <a:endParaRPr/>
+          </a:p>
+        </p:txBody>
+      </p:sp>
+      <p:sp>
+        <p:nvSpPr>
+          <p:cNvPr id="9" name="TextBox 8">
+            <a:extLst>
+              <a:ext uri="{FF2B5EF4-FFF2-40B4-BE49-F238E27FC236}">
+                <a16:creationId xmlns:a16="http://schemas.microsoft.com/office/drawing/2014/main" id="{AB3AAD59-7BD3-0E11-EC10-B370EF956AC4}"/>
+              </a:ext>
+            </a:extLst>
+          </p:cNvPr>
+          <p:cNvSpPr>
+            <a:spLocks noGrp="1"/>
+          </p:cNvSpPr>
           <p:nvPr/>
         </p:nvSpPr>
         <p:spPr>
           <a:xfrm>
-            <a:off x="4660900" y="2603500"/>
-            <a:ext cx="2730500" cy="584775"/>
+            <a:off x="8636000" y="3530600"/>
+            <a:ext cx="2540000" cy="523220"/>
           </a:xfrm>
           <a:prstGeom prst="rect">
             <a:avLst/>
@@ -6113,39 +6736,43 @@
           <a:noFill/>
         </p:spPr>
         <p:txBody>
-          <a:bodyPr vert="horz" lIns="0" tIns="0" rIns="0" bIns="0" rtlCol="0" anchor="t">
+          <a:bodyPr vert="horz" lIns="0" tIns="0" rIns="0" bIns="0" anchor="t">
             <a:spAutoFit/>
           </a:bodyPr>
           <a:lstStyle/>
           <a:p>
             <a:r>
-              <a:rPr lang="fr-CA" sz="3800" b="1">
+              <a:rPr sz="3400" b="1">
                 <a:solidFill>
                   <a:srgbClr val="000000"/>
                 </a:solidFill>
-                <a:latin typeface="Arial" panose="020B0604020202020204" pitchFamily="34" charset="0"/>
+                <a:latin typeface="Arial"/>
+                <a:ea typeface="Arial"/>
+                <a:cs typeface="Arial"/>
               </a:rPr>
-              <a:t>$219.92</a:t>
-            </a:r>
-          </a:p>
-        </p:txBody>
-      </p:sp>
-      <p:sp>
-        <p:nvSpPr>
-          <p:cNvPr id="9" name="TextBox 8">
-            <a:extLst>
-              <a:ext uri="{FF2B5EF4-FFF2-40B4-BE49-F238E27FC236}">
-                <a16:creationId xmlns:a16="http://schemas.microsoft.com/office/drawing/2014/main" id="{5E7370DB-A2B8-5791-C424-76A2B87A98C4}"/>
-              </a:ext>
-            </a:extLst>
-          </p:cNvPr>
-          <p:cNvSpPr txBox="1"/>
+              <a:t>1.77%</a:t>
+            </a:r>
+          </a:p>
+        </p:txBody>
+      </p:sp>
+      <p:sp>
+        <p:nvSpPr>
+          <p:cNvPr id="10" name="TextBox 9">
+            <a:extLst>
+              <a:ext uri="{FF2B5EF4-FFF2-40B4-BE49-F238E27FC236}">
+                <a16:creationId xmlns:a16="http://schemas.microsoft.com/office/drawing/2014/main" id="{F5B345C9-7EE9-3D7D-1779-2599DA642630}"/>
+              </a:ext>
+            </a:extLst>
+          </p:cNvPr>
+          <p:cNvSpPr>
+            <a:spLocks noGrp="1"/>
+          </p:cNvSpPr>
           <p:nvPr/>
         </p:nvSpPr>
         <p:spPr>
           <a:xfrm>
-            <a:off x="4660900" y="3683000"/>
-            <a:ext cx="2730500" cy="584775"/>
+            <a:off x="8636000" y="4140200"/>
+            <a:ext cx="2603500" cy="523220"/>
           </a:xfrm>
           <a:prstGeom prst="rect">
             <a:avLst/>
@@ -6153,114 +6780,43 @@
           <a:noFill/>
         </p:spPr>
         <p:txBody>
-          <a:bodyPr vert="horz" lIns="0" tIns="0" rIns="0" bIns="0" rtlCol="0" anchor="t">
+          <a:bodyPr vert="horz" lIns="0" tIns="0" rIns="0" bIns="0" anchor="t">
             <a:spAutoFit/>
           </a:bodyPr>
           <a:lstStyle/>
           <a:p>
             <a:r>
-              <a:rPr lang="en-US" sz="1900">
+              <a:rPr sz="1700">
                 <a:solidFill>
                   <a:srgbClr val="4C525B"/>
                 </a:solidFill>
-                <a:latin typeface="Arial" panose="020B0604020202020204" pitchFamily="34" charset="0"/>
+                <a:latin typeface="Arial"/>
+                <a:ea typeface="Arial"/>
+                <a:cs typeface="Arial"/>
               </a:rPr>
-              <a:t>Median monthly
-discount in 2025</a:t>
-            </a:r>
-            <a:endParaRPr lang="fr-CA" sz="1900">
-              <a:solidFill>
-                <a:srgbClr val="4C525B"/>
-              </a:solidFill>
-              <a:latin typeface="Arial" panose="020B0604020202020204" pitchFamily="34" charset="0"/>
-            </a:endParaRPr>
-          </a:p>
-        </p:txBody>
-      </p:sp>
-      <p:sp>
-        <p:nvSpPr>
-          <p:cNvPr id="10" name="Rectangle 9">
-            <a:extLst>
-              <a:ext uri="{FF2B5EF4-FFF2-40B4-BE49-F238E27FC236}">
-                <a16:creationId xmlns:a16="http://schemas.microsoft.com/office/drawing/2014/main" id="{723A8272-CAC2-457E-FAB9-4541C98D8F4D}"/>
-              </a:ext>
-            </a:extLst>
-          </p:cNvPr>
-          <p:cNvSpPr/>
+              <a:t>2024 low before the rebound</a:t>
+            </a:r>
+          </a:p>
+        </p:txBody>
+      </p:sp>
+      <p:sp>
+        <p:nvSpPr>
+          <p:cNvPr id="11" name="TextBox 10">
+            <a:extLst>
+              <a:ext uri="{FF2B5EF4-FFF2-40B4-BE49-F238E27FC236}">
+                <a16:creationId xmlns:a16="http://schemas.microsoft.com/office/drawing/2014/main" id="{596ADD79-D588-8361-864B-092C77B37BB8}"/>
+              </a:ext>
+            </a:extLst>
+          </p:cNvPr>
+          <p:cNvSpPr>
+            <a:spLocks noGrp="1"/>
+          </p:cNvSpPr>
           <p:nvPr/>
         </p:nvSpPr>
         <p:spPr>
           <a:xfrm>
-            <a:off x="8255000" y="2095500"/>
-            <a:ext cx="3302000" cy="2921000"/>
-          </a:xfrm>
-          <a:prstGeom prst="rect">
-            <a:avLst/>
-          </a:prstGeom>
-          <a:solidFill>
-            <a:srgbClr val="EDEDED"/>
-          </a:solidFill>
-          <a:ln w="19050" cap="flat" cmpd="sng" algn="ctr">
-            <a:noFill/>
-            <a:prstDash val="solid"/>
-            <a:miter lim="800000"/>
-          </a:ln>
-          <a:effectLst/>
-          <a:extLst>
-            <a:ext uri="{91240B29-F687-4F45-9708-019B960494DF}">
-              <a14:hiddenLine xmlns:a14="http://schemas.microsoft.com/office/drawing/2010/main" w="19050" cap="flat" cmpd="sng" algn="ctr">
-                <a:solidFill>
-                  <a:schemeClr val="accent1">
-                    <a:shade val="15000"/>
-                  </a:schemeClr>
-                </a:solidFill>
-                <a:prstDash val="solid"/>
-                <a:miter lim="800000"/>
-              </a14:hiddenLine>
-            </a:ext>
-          </a:extLst>
-        </p:spPr>
-        <p:style>
-          <a:lnRef idx="2">
-            <a:schemeClr val="accent1">
-              <a:shade val="15000"/>
-            </a:schemeClr>
-          </a:lnRef>
-          <a:fillRef idx="1">
-            <a:schemeClr val="accent1"/>
-          </a:fillRef>
-          <a:effectRef idx="0">
-            <a:schemeClr val="accent1"/>
-          </a:effectRef>
-          <a:fontRef idx="minor">
-            <a:schemeClr val="lt1"/>
-          </a:fontRef>
-        </p:style>
-        <p:txBody>
-          <a:bodyPr rtlCol="0" anchor="ctr"/>
-          <a:lstStyle/>
-          <a:p>
-            <a:pPr algn="ctr"/>
-            <a:endParaRPr lang="fr-CA"/>
-          </a:p>
-        </p:txBody>
-      </p:sp>
-      <p:sp>
-        <p:nvSpPr>
-          <p:cNvPr id="11" name="TextBox 10">
-            <a:extLst>
-              <a:ext uri="{FF2B5EF4-FFF2-40B4-BE49-F238E27FC236}">
-                <a16:creationId xmlns:a16="http://schemas.microsoft.com/office/drawing/2014/main" id="{3F29F4A3-D976-F3AB-67EA-B13DBDE0E601}"/>
-              </a:ext>
-            </a:extLst>
-          </p:cNvPr>
-          <p:cNvSpPr txBox="1"/>
-          <p:nvPr/>
-        </p:nvSpPr>
-        <p:spPr>
-          <a:xfrm>
-            <a:off x="8534400" y="2603500"/>
-            <a:ext cx="2730500" cy="584775"/>
+            <a:off x="381000" y="5651500"/>
+            <a:ext cx="9906000" cy="338554"/>
           </a:xfrm>
           <a:prstGeom prst="rect">
             <a:avLst/>
@@ -6268,19 +6824,21 @@
           <a:noFill/>
         </p:spPr>
         <p:txBody>
-          <a:bodyPr vert="horz" lIns="0" tIns="0" rIns="0" bIns="0" rtlCol="0" anchor="t">
+          <a:bodyPr vert="horz" lIns="0" tIns="0" rIns="0" bIns="0" anchor="t">
             <a:spAutoFit/>
           </a:bodyPr>
           <a:lstStyle/>
           <a:p>
             <a:r>
-              <a:rPr lang="fr-CA" sz="3800" b="1">
+              <a:rPr sz="2200" b="1">
                 <a:solidFill>
                   <a:srgbClr val="000000"/>
                 </a:solidFill>
-                <a:latin typeface="Arial" panose="020B0604020202020204" pitchFamily="34" charset="0"/>
+                <a:latin typeface="Arial"/>
+                <a:ea typeface="Arial"/>
+                <a:cs typeface="Arial"/>
               </a:rPr>
-              <a:t>5.74%</a:t>
+              <a:t>The rebound is real, but remains below the 4.59% reached in 2022.</a:t>
             </a:r>
           </a:p>
         </p:txBody>
@@ -6290,17 +6848,19 @@
           <p:cNvPr id="12" name="TextBox 11">
             <a:extLst>
               <a:ext uri="{FF2B5EF4-FFF2-40B4-BE49-F238E27FC236}">
-                <a16:creationId xmlns:a16="http://schemas.microsoft.com/office/drawing/2014/main" id="{A7B81D12-0019-9658-2F1D-099E5302721E}"/>
-              </a:ext>
-            </a:extLst>
-          </p:cNvPr>
-          <p:cNvSpPr txBox="1"/>
+                <a16:creationId xmlns:a16="http://schemas.microsoft.com/office/drawing/2014/main" id="{7203CCB5-D260-7457-9ACC-84CAFAAA726E}"/>
+              </a:ext>
+            </a:extLst>
+          </p:cNvPr>
+          <p:cNvSpPr>
+            <a:spLocks noGrp="1"/>
+          </p:cNvSpPr>
           <p:nvPr/>
         </p:nvSpPr>
         <p:spPr>
           <a:xfrm>
-            <a:off x="8534400" y="3683000"/>
-            <a:ext cx="2730500" cy="584775"/>
+            <a:off x="11493500" y="6502400"/>
+            <a:ext cx="254000" cy="138499"/>
           </a:xfrm>
           <a:prstGeom prst="rect">
             <a:avLst/>
@@ -6308,121 +6868,48 @@
           <a:noFill/>
         </p:spPr>
         <p:txBody>
-          <a:bodyPr vert="horz" lIns="0" tIns="0" rIns="0" bIns="0" rtlCol="0" anchor="t">
+          <a:bodyPr vert="horz" lIns="0" tIns="0" rIns="0" bIns="0" anchor="t">
             <a:spAutoFit/>
           </a:bodyPr>
           <a:lstStyle/>
           <a:p>
-            <a:r>
-              <a:rPr lang="en-US" sz="1900" dirty="0">
+            <a:pPr algn="r">
+              <a:buNone/>
+            </a:pPr>
+            <a:r>
+              <a:rPr sz="900">
                 <a:solidFill>
                   <a:srgbClr val="4C525B"/>
                 </a:solidFill>
-                <a:latin typeface="Arial" panose="020B0604020202020204" pitchFamily="34" charset="0"/>
-              </a:rPr>
-              <a:t>2025 turnover growth
-vs. 2.91% renewals</a:t>
-            </a:r>
-            <a:endParaRPr lang="fr-CA" sz="1900" dirty="0">
-              <a:solidFill>
-                <a:srgbClr val="4C525B"/>
-              </a:solidFill>
-              <a:latin typeface="Arial" panose="020B0604020202020204" pitchFamily="34" charset="0"/>
-            </a:endParaRPr>
-          </a:p>
-        </p:txBody>
-      </p:sp>
-      <p:sp>
-        <p:nvSpPr>
-          <p:cNvPr id="13" name="TextBox 12">
-            <a:extLst>
-              <a:ext uri="{FF2B5EF4-FFF2-40B4-BE49-F238E27FC236}">
-                <a16:creationId xmlns:a16="http://schemas.microsoft.com/office/drawing/2014/main" id="{48418038-2C06-B347-A424-2D3A595E14AB}"/>
-              </a:ext>
-            </a:extLst>
-          </p:cNvPr>
-          <p:cNvSpPr txBox="1"/>
-          <p:nvPr/>
-        </p:nvSpPr>
-        <p:spPr>
-          <a:xfrm>
-            <a:off x="508000" y="5588000"/>
-            <a:ext cx="10414000" cy="338554"/>
-          </a:xfrm>
-          <a:prstGeom prst="rect">
-            <a:avLst/>
-          </a:prstGeom>
-          <a:noFill/>
-        </p:spPr>
-        <p:txBody>
-          <a:bodyPr vert="horz" lIns="0" tIns="0" rIns="0" bIns="0" rtlCol="0" anchor="t">
-            <a:spAutoFit/>
-          </a:bodyPr>
-          <a:lstStyle/>
-          <a:p>
-            <a:r>
-              <a:rPr lang="en-US" sz="2200" b="1">
-                <a:solidFill>
-                  <a:srgbClr val="000000"/>
-                </a:solidFill>
-                <a:latin typeface="Arial" panose="020B0604020202020204" pitchFamily="34" charset="0"/>
-              </a:rPr>
-              <a:t>Effective growth in 2025 was 3.58%, compared with 7.04% using contract rent.</a:t>
-            </a:r>
-            <a:endParaRPr lang="fr-CA" sz="2200" b="1">
-              <a:solidFill>
-                <a:srgbClr val="000000"/>
-              </a:solidFill>
-              <a:latin typeface="Arial" panose="020B0604020202020204" pitchFamily="34" charset="0"/>
-            </a:endParaRPr>
-          </a:p>
-        </p:txBody>
-      </p:sp>
-      <p:sp>
-        <p:nvSpPr>
-          <p:cNvPr id="14" name="TextBox 13">
-            <a:extLst>
-              <a:ext uri="{FF2B5EF4-FFF2-40B4-BE49-F238E27FC236}">
-                <a16:creationId xmlns:a16="http://schemas.microsoft.com/office/drawing/2014/main" id="{1E08FDD0-DE8D-1C81-0386-770A0EF3CC4A}"/>
-              </a:ext>
-            </a:extLst>
-          </p:cNvPr>
-          <p:cNvSpPr txBox="1"/>
-          <p:nvPr/>
-        </p:nvSpPr>
-        <p:spPr>
-          <a:xfrm>
-            <a:off x="11493500" y="6502400"/>
-            <a:ext cx="254000" cy="138499"/>
-          </a:xfrm>
-          <a:prstGeom prst="rect">
-            <a:avLst/>
-          </a:prstGeom>
-          <a:noFill/>
-        </p:spPr>
-        <p:txBody>
-          <a:bodyPr vert="horz" lIns="0" tIns="0" rIns="0" bIns="0" rtlCol="0" anchor="t">
-            <a:spAutoFit/>
-          </a:bodyPr>
-          <a:lstStyle/>
-          <a:p>
-            <a:pPr algn="r"/>
-            <a:r>
-              <a:rPr lang="fr-CA" sz="900">
-                <a:solidFill>
-                  <a:srgbClr val="4C525B"/>
-                </a:solidFill>
-                <a:latin typeface="Arial" panose="020B0604020202020204" pitchFamily="34" charset="0"/>
+                <a:latin typeface="Arial"/>
+                <a:ea typeface="Arial"/>
+                <a:cs typeface="Arial"/>
               </a:rPr>
               <a:t>4</a:t>
             </a:r>
           </a:p>
         </p:txBody>
       </p:sp>
+      <p:graphicFrame>
+        <p:nvGraphicFramePr>
+          <p:cNvPr id="23" name="Historical effective-rent growth"/>
+          <p:cNvGraphicFramePr/>
+          <p:nvPr/>
+        </p:nvGraphicFramePr>
+        <p:xfrm>
+          <a:off x="523875" y="1428750"/>
+          <a:ext cx="7334250" cy="3714750"/>
+        </p:xfrm>
+        <a:graphic>
+          <a:graphicData uri="http://schemas.openxmlformats.org/drawingml/2006/chart">
+            <c:chart xmlns:c="http://schemas.openxmlformats.org/drawingml/2006/chart" xmlns:r="http://schemas.openxmlformats.org/officeDocument/2006/relationships" r:id="rId3"/>
+          </a:graphicData>
+        </a:graphic>
+      </p:graphicFrame>
     </p:spTree>
     <p:extLst>
       <p:ext uri="{BB962C8B-B14F-4D97-AF65-F5344CB8AC3E}">
-        <p14:creationId xmlns:p14="http://schemas.microsoft.com/office/powerpoint/2010/main" val="728337168"/>
+        <p14:creationId xmlns:p14="http://schemas.microsoft.com/office/powerpoint/2010/main" val="964788393"/>
       </p:ext>
     </p:extLst>
   </p:cSld>
@@ -6462,17 +6949,19 @@
           <p:cNvPr id="2" name="TextBox 1">
             <a:extLst>
               <a:ext uri="{FF2B5EF4-FFF2-40B4-BE49-F238E27FC236}">
-                <a16:creationId xmlns:a16="http://schemas.microsoft.com/office/drawing/2014/main" id="{6F75B7DC-DF23-9360-6311-E727518A6FCB}"/>
-              </a:ext>
-            </a:extLst>
-          </p:cNvPr>
-          <p:cNvSpPr txBox="1"/>
+                <a16:creationId xmlns:a16="http://schemas.microsoft.com/office/drawing/2014/main" id="{8DE0B6E5-AD54-E278-649E-B1D67E7FB81A}"/>
+              </a:ext>
+            </a:extLst>
+          </p:cNvPr>
+          <p:cNvSpPr>
+            <a:spLocks noGrp="1"/>
+          </p:cNvSpPr>
           <p:nvPr/>
         </p:nvSpPr>
         <p:spPr>
           <a:xfrm>
             <a:off x="381000" y="330200"/>
-            <a:ext cx="11430000" cy="553998"/>
+            <a:ext cx="11303000" cy="553998"/>
           </a:xfrm>
           <a:prstGeom prst="rect">
             <a:avLst/>
@@ -6480,26 +6969,22 @@
           <a:noFill/>
         </p:spPr>
         <p:txBody>
-          <a:bodyPr vert="horz" lIns="0" tIns="0" rIns="0" bIns="0" rtlCol="0" anchor="t">
+          <a:bodyPr vert="horz" lIns="0" tIns="0" rIns="0" bIns="0" anchor="t">
             <a:spAutoFit/>
           </a:bodyPr>
           <a:lstStyle/>
           <a:p>
             <a:r>
-              <a:rPr lang="en-US" sz="3600" b="1" dirty="0">
+              <a:rPr sz="3600" b="1">
                 <a:solidFill>
                   <a:srgbClr val="000000"/>
                 </a:solidFill>
-                <a:latin typeface="Arial" panose="020B0604020202020204" pitchFamily="34" charset="0"/>
+                <a:latin typeface="Arial"/>
+                <a:ea typeface="Arial"/>
+                <a:cs typeface="Arial"/>
               </a:rPr>
-              <a:t>External data checks the result</a:t>
-            </a:r>
-            <a:endParaRPr lang="fr-CA" sz="3600" b="1" dirty="0">
-              <a:solidFill>
-                <a:srgbClr val="000000"/>
-              </a:solidFill>
-              <a:latin typeface="Arial" panose="020B0604020202020204" pitchFamily="34" charset="0"/>
-            </a:endParaRPr>
+              <a:t>Concessions and turnover explain recent growth</a:t>
+            </a:r>
           </a:p>
         </p:txBody>
       </p:sp>
@@ -6508,17 +6993,19 @@
           <p:cNvPr id="3" name="TextBox 2">
             <a:extLst>
               <a:ext uri="{FF2B5EF4-FFF2-40B4-BE49-F238E27FC236}">
-                <a16:creationId xmlns:a16="http://schemas.microsoft.com/office/drawing/2014/main" id="{4C897955-2980-3AB8-AF30-72F3020F81BD}"/>
-              </a:ext>
-            </a:extLst>
-          </p:cNvPr>
-          <p:cNvSpPr txBox="1"/>
+                <a16:creationId xmlns:a16="http://schemas.microsoft.com/office/drawing/2014/main" id="{81B7C00F-D94D-127C-49CA-74DBC1CC8874}"/>
+              </a:ext>
+            </a:extLst>
+          </p:cNvPr>
+          <p:cNvSpPr>
+            <a:spLocks noGrp="1"/>
+          </p:cNvSpPr>
           <p:nvPr/>
         </p:nvSpPr>
         <p:spPr>
           <a:xfrm>
-            <a:off x="508000" y="1587500"/>
-            <a:ext cx="5334000" cy="1769715"/>
+            <a:off x="381000" y="1143000"/>
+            <a:ext cx="10033000" cy="323165"/>
           </a:xfrm>
           <a:prstGeom prst="rect">
             <a:avLst/>
@@ -6526,91 +7013,43 @@
           <a:noFill/>
         </p:spPr>
         <p:txBody>
-          <a:bodyPr vert="horz" lIns="0" tIns="0" rIns="0" bIns="0" rtlCol="0" anchor="t">
+          <a:bodyPr vert="horz" lIns="0" tIns="0" rIns="0" bIns="0" anchor="t">
             <a:spAutoFit/>
           </a:bodyPr>
           <a:lstStyle/>
           <a:p>
             <a:r>
-              <a:rPr lang="en-US" sz="2300" dirty="0">
+              <a:rPr sz="2100">
                 <a:solidFill>
-                  <a:srgbClr val="000000"/>
+                  <a:srgbClr val="4C525B"/>
                 </a:solidFill>
-                <a:latin typeface="Arial" panose="020B0604020202020204" pitchFamily="34" charset="0"/>
+                <a:latin typeface="Arial"/>
+                <a:ea typeface="Arial"/>
+                <a:cs typeface="Arial"/>
               </a:rPr>
-              <a:t>CMHC and rent CPI show market pressure, but only a few annual observations are available. We use them as checks instead of forcing them into the forecast.</a:t>
-            </a:r>
-            <a:endParaRPr lang="fr-CA" sz="2300" dirty="0">
-              <a:solidFill>
-                <a:srgbClr val="000000"/>
-              </a:solidFill>
-              <a:latin typeface="Arial" panose="020B0604020202020204" pitchFamily="34" charset="0"/>
-            </a:endParaRPr>
-          </a:p>
-        </p:txBody>
-      </p:sp>
-      <p:sp>
-        <p:nvSpPr>
-          <p:cNvPr id="4" name="TextBox 3">
-            <a:extLst>
-              <a:ext uri="{FF2B5EF4-FFF2-40B4-BE49-F238E27FC236}">
-                <a16:creationId xmlns:a16="http://schemas.microsoft.com/office/drawing/2014/main" id="{0B676DD0-441F-5204-7951-99A37084C77E}"/>
-              </a:ext>
-            </a:extLst>
-          </p:cNvPr>
-          <p:cNvSpPr txBox="1"/>
+              <a:t>Discounts widened, and turnover led the 2025 rebound.</a:t>
+            </a:r>
+          </a:p>
+        </p:txBody>
+      </p:sp>
+      <p:sp>
+        <p:nvSpPr>
+          <p:cNvPr id="4" name="Rectangle 3">
+            <a:extLst>
+              <a:ext uri="{FF2B5EF4-FFF2-40B4-BE49-F238E27FC236}">
+                <a16:creationId xmlns:a16="http://schemas.microsoft.com/office/drawing/2014/main" id="{9AC1681A-5622-97BE-F765-05EE0E8F20C0}"/>
+              </a:ext>
+            </a:extLst>
+          </p:cNvPr>
+          <p:cNvSpPr>
+            <a:spLocks noGrp="1"/>
+          </p:cNvSpPr>
           <p:nvPr/>
         </p:nvSpPr>
         <p:spPr>
           <a:xfrm>
-            <a:off x="508000" y="4254500"/>
-            <a:ext cx="5334000" cy="1015663"/>
-          </a:xfrm>
-          <a:prstGeom prst="rect">
-            <a:avLst/>
-          </a:prstGeom>
-          <a:noFill/>
-        </p:spPr>
-        <p:txBody>
-          <a:bodyPr vert="horz" lIns="0" tIns="0" rIns="0" bIns="0" rtlCol="0" anchor="t">
-            <a:spAutoFit/>
-          </a:bodyPr>
-          <a:lstStyle/>
-          <a:p>
-            <a:r>
-              <a:rPr lang="en-US" sz="2200" b="1">
-                <a:solidFill>
-                  <a:srgbClr val="3D8DFF"/>
-                </a:solidFill>
-                <a:latin typeface="Arial" panose="020B0604020202020204" pitchFamily="34" charset="0"/>
-              </a:rPr>
-              <a:t>This keeps the estimate easy to reproduce and avoids an arbitrary adjustment.</a:t>
-            </a:r>
-            <a:endParaRPr lang="fr-CA" sz="2200" b="1">
-              <a:solidFill>
-                <a:srgbClr val="3D8DFF"/>
-              </a:solidFill>
-              <a:latin typeface="Arial" panose="020B0604020202020204" pitchFamily="34" charset="0"/>
-            </a:endParaRPr>
-          </a:p>
-        </p:txBody>
-      </p:sp>
-      <p:sp>
-        <p:nvSpPr>
-          <p:cNvPr id="5" name="Rectangle 4">
-            <a:extLst>
-              <a:ext uri="{FF2B5EF4-FFF2-40B4-BE49-F238E27FC236}">
-                <a16:creationId xmlns:a16="http://schemas.microsoft.com/office/drawing/2014/main" id="{C5F262DC-2B3D-C8C2-55BA-BEB770DB372E}"/>
-              </a:ext>
-            </a:extLst>
-          </p:cNvPr>
-          <p:cNvSpPr/>
-          <p:nvPr/>
-        </p:nvSpPr>
-        <p:spPr>
-          <a:xfrm>
-            <a:off x="6604000" y="1460500"/>
-            <a:ext cx="4953000" cy="4064000"/>
+            <a:off x="508000" y="2095500"/>
+            <a:ext cx="3302000" cy="2921000"/>
           </a:xfrm>
           <a:prstGeom prst="rect">
             <a:avLst/>
@@ -6618,25 +7057,10 @@
           <a:solidFill>
             <a:srgbClr val="EDEDED"/>
           </a:solidFill>
-          <a:ln w="19050" cap="flat" cmpd="sng" algn="ctr">
+          <a:ln w="19050" cmpd="sng">
             <a:noFill/>
             <a:prstDash val="solid"/>
-            <a:miter lim="800000"/>
           </a:ln>
-          <a:effectLst/>
-          <a:extLst>
-            <a:ext uri="{91240B29-F687-4F45-9708-019B960494DF}">
-              <a14:hiddenLine xmlns:a14="http://schemas.microsoft.com/office/drawing/2010/main" w="19050" cap="flat" cmpd="sng" algn="ctr">
-                <a:solidFill>
-                  <a:schemeClr val="accent1">
-                    <a:shade val="15000"/>
-                  </a:schemeClr>
-                </a:solidFill>
-                <a:prstDash val="solid"/>
-                <a:miter lim="800000"/>
-              </a14:hiddenLine>
-            </a:ext>
-          </a:extLst>
         </p:spPr>
         <p:style>
           <a:lnRef idx="2">
@@ -6655,30 +7079,34 @@
           </a:fontRef>
         </p:style>
         <p:txBody>
-          <a:bodyPr rtlCol="0" anchor="ctr"/>
-          <a:lstStyle/>
-          <a:p>
-            <a:pPr algn="ctr"/>
-            <a:endParaRPr lang="fr-CA"/>
-          </a:p>
-        </p:txBody>
-      </p:sp>
-      <p:sp>
-        <p:nvSpPr>
-          <p:cNvPr id="6" name="TextBox 5">
-            <a:extLst>
-              <a:ext uri="{FF2B5EF4-FFF2-40B4-BE49-F238E27FC236}">
-                <a16:creationId xmlns:a16="http://schemas.microsoft.com/office/drawing/2014/main" id="{1B8FF6C8-AD82-A9F0-1D28-71CA5FE2B661}"/>
-              </a:ext>
-            </a:extLst>
-          </p:cNvPr>
-          <p:cNvSpPr txBox="1"/>
+          <a:bodyPr anchor="ctr"/>
+          <a:lstStyle/>
+          <a:p>
+            <a:pPr algn="ctr">
+              <a:buNone/>
+            </a:pPr>
+            <a:endParaRPr/>
+          </a:p>
+        </p:txBody>
+      </p:sp>
+      <p:sp>
+        <p:nvSpPr>
+          <p:cNvPr id="5" name="TextBox 4">
+            <a:extLst>
+              <a:ext uri="{FF2B5EF4-FFF2-40B4-BE49-F238E27FC236}">
+                <a16:creationId xmlns:a16="http://schemas.microsoft.com/office/drawing/2014/main" id="{679F13DB-2F76-6500-17CB-6123ADF763D7}"/>
+              </a:ext>
+            </a:extLst>
+          </p:cNvPr>
+          <p:cNvSpPr>
+            <a:spLocks noGrp="1"/>
+          </p:cNvSpPr>
           <p:nvPr/>
         </p:nvSpPr>
         <p:spPr>
           <a:xfrm>
-            <a:off x="6985000" y="1905000"/>
-            <a:ext cx="355600" cy="307777"/>
+            <a:off x="787400" y="2603500"/>
+            <a:ext cx="2730500" cy="584775"/>
           </a:xfrm>
           <a:prstGeom prst="rect">
             <a:avLst/>
@@ -6686,39 +7114,43 @@
           <a:noFill/>
         </p:spPr>
         <p:txBody>
-          <a:bodyPr vert="horz" lIns="0" tIns="0" rIns="0" bIns="0" rtlCol="0" anchor="t">
+          <a:bodyPr vert="horz" lIns="0" tIns="0" rIns="0" bIns="0" anchor="t">
             <a:spAutoFit/>
           </a:bodyPr>
           <a:lstStyle/>
           <a:p>
             <a:r>
-              <a:rPr lang="fr-CA" sz="2000" b="1">
+              <a:rPr sz="3800" b="1">
                 <a:solidFill>
-                  <a:srgbClr val="3D8DFF"/>
+                  <a:srgbClr val="000000"/>
                 </a:solidFill>
-                <a:latin typeface="Arial" panose="020B0604020202020204" pitchFamily="34" charset="0"/>
+                <a:latin typeface="Arial"/>
+                <a:ea typeface="Arial"/>
+                <a:cs typeface="Arial"/>
               </a:rPr>
-              <a:t>&gt;</a:t>
-            </a:r>
-          </a:p>
-        </p:txBody>
-      </p:sp>
-      <p:sp>
-        <p:nvSpPr>
-          <p:cNvPr id="7" name="TextBox 6">
-            <a:extLst>
-              <a:ext uri="{FF2B5EF4-FFF2-40B4-BE49-F238E27FC236}">
-                <a16:creationId xmlns:a16="http://schemas.microsoft.com/office/drawing/2014/main" id="{B24300F3-EAF9-4E29-1AA7-FAB879630A23}"/>
-              </a:ext>
-            </a:extLst>
-          </p:cNvPr>
-          <p:cNvSpPr txBox="1"/>
+              <a:t>85.39%</a:t>
+            </a:r>
+          </a:p>
+        </p:txBody>
+      </p:sp>
+      <p:sp>
+        <p:nvSpPr>
+          <p:cNvPr id="6" name="TextBox 5">
+            <a:extLst>
+              <a:ext uri="{FF2B5EF4-FFF2-40B4-BE49-F238E27FC236}">
+                <a16:creationId xmlns:a16="http://schemas.microsoft.com/office/drawing/2014/main" id="{A01AD95F-5490-ABD8-AEAA-9FA2FBC87A36}"/>
+              </a:ext>
+            </a:extLst>
+          </p:cNvPr>
+          <p:cNvSpPr>
+            <a:spLocks noGrp="1"/>
+          </p:cNvSpPr>
           <p:nvPr/>
         </p:nvSpPr>
         <p:spPr>
           <a:xfrm>
-            <a:off x="7493000" y="1879600"/>
-            <a:ext cx="3492500" cy="553998"/>
+            <a:off x="787400" y="3683000"/>
+            <a:ext cx="2730500" cy="584775"/>
           </a:xfrm>
           <a:prstGeom prst="rect">
             <a:avLst/>
@@ -6726,26 +7158,80 @@
           <a:noFill/>
         </p:spPr>
         <p:txBody>
-          <a:bodyPr vert="horz" lIns="0" tIns="0" rIns="0" bIns="0" rtlCol="0" anchor="t">
+          <a:bodyPr vert="horz" lIns="0" tIns="0" rIns="0" bIns="0" anchor="t">
             <a:spAutoFit/>
           </a:bodyPr>
           <a:lstStyle/>
           <a:p>
             <a:r>
-              <a:rPr lang="en-US">
+              <a:rPr sz="1900">
                 <a:solidFill>
-                  <a:srgbClr val="000000"/>
+                  <a:srgbClr val="4C525B"/>
                 </a:solidFill>
-                <a:latin typeface="Arial" panose="020B0604020202020204" pitchFamily="34" charset="0"/>
+                <a:latin typeface="Arial"/>
+                <a:ea typeface="Arial"/>
+                <a:cs typeface="Arial"/>
               </a:rPr>
-              <a:t>CMHC Montreal and Ottawa market tables</a:t>
-            </a:r>
-            <a:endParaRPr lang="fr-CA">
-              <a:solidFill>
-                <a:srgbClr val="000000"/>
-              </a:solidFill>
-              <a:latin typeface="Arial" panose="020B0604020202020204" pitchFamily="34" charset="0"/>
-            </a:endParaRPr>
+              <a:t>2025 leases with
+a concession</a:t>
+            </a:r>
+          </a:p>
+        </p:txBody>
+      </p:sp>
+      <p:sp>
+        <p:nvSpPr>
+          <p:cNvPr id="7" name="Rectangle 6">
+            <a:extLst>
+              <a:ext uri="{FF2B5EF4-FFF2-40B4-BE49-F238E27FC236}">
+                <a16:creationId xmlns:a16="http://schemas.microsoft.com/office/drawing/2014/main" id="{CB0B4743-A1C0-24BC-519E-E984CFF16933}"/>
+              </a:ext>
+            </a:extLst>
+          </p:cNvPr>
+          <p:cNvSpPr>
+            <a:spLocks noGrp="1"/>
+          </p:cNvSpPr>
+          <p:nvPr/>
+        </p:nvSpPr>
+        <p:spPr>
+          <a:xfrm>
+            <a:off x="4381500" y="2095500"/>
+            <a:ext cx="3302000" cy="2921000"/>
+          </a:xfrm>
+          <a:prstGeom prst="rect">
+            <a:avLst/>
+          </a:prstGeom>
+          <a:solidFill>
+            <a:srgbClr val="EDEDED"/>
+          </a:solidFill>
+          <a:ln w="19050" cmpd="sng">
+            <a:noFill/>
+            <a:prstDash val="solid"/>
+          </a:ln>
+        </p:spPr>
+        <p:style>
+          <a:lnRef idx="2">
+            <a:schemeClr val="accent1">
+              <a:shade val="15000"/>
+            </a:schemeClr>
+          </a:lnRef>
+          <a:fillRef idx="1">
+            <a:schemeClr val="accent1"/>
+          </a:fillRef>
+          <a:effectRef idx="0">
+            <a:schemeClr val="accent1"/>
+          </a:effectRef>
+          <a:fontRef idx="minor">
+            <a:schemeClr val="lt1"/>
+          </a:fontRef>
+        </p:style>
+        <p:txBody>
+          <a:bodyPr anchor="ctr"/>
+          <a:lstStyle/>
+          <a:p>
+            <a:pPr algn="ctr">
+              <a:buNone/>
+            </a:pPr>
+            <a:endParaRPr/>
           </a:p>
         </p:txBody>
       </p:sp>
@@ -6754,17 +7240,19 @@
           <p:cNvPr id="8" name="TextBox 7">
             <a:extLst>
               <a:ext uri="{FF2B5EF4-FFF2-40B4-BE49-F238E27FC236}">
-                <a16:creationId xmlns:a16="http://schemas.microsoft.com/office/drawing/2014/main" id="{21C3394A-E69E-54F5-56B3-D67A59A7E7CC}"/>
-              </a:ext>
-            </a:extLst>
-          </p:cNvPr>
-          <p:cNvSpPr txBox="1"/>
+                <a16:creationId xmlns:a16="http://schemas.microsoft.com/office/drawing/2014/main" id="{95FF9312-F4A9-8110-D0E2-277B3345A211}"/>
+              </a:ext>
+            </a:extLst>
+          </p:cNvPr>
+          <p:cNvSpPr>
+            <a:spLocks noGrp="1"/>
+          </p:cNvSpPr>
           <p:nvPr/>
         </p:nvSpPr>
         <p:spPr>
           <a:xfrm>
-            <a:off x="6985000" y="2730500"/>
-            <a:ext cx="355600" cy="307777"/>
+            <a:off x="4660900" y="2603500"/>
+            <a:ext cx="2730500" cy="584775"/>
           </a:xfrm>
           <a:prstGeom prst="rect">
             <a:avLst/>
@@ -6772,19 +7260,21 @@
           <a:noFill/>
         </p:spPr>
         <p:txBody>
-          <a:bodyPr vert="horz" lIns="0" tIns="0" rIns="0" bIns="0" rtlCol="0" anchor="t">
+          <a:bodyPr vert="horz" lIns="0" tIns="0" rIns="0" bIns="0" anchor="t">
             <a:spAutoFit/>
           </a:bodyPr>
           <a:lstStyle/>
           <a:p>
             <a:r>
-              <a:rPr lang="fr-CA" sz="2000" b="1">
+              <a:rPr sz="3800" b="1">
                 <a:solidFill>
-                  <a:srgbClr val="3D8DFF"/>
+                  <a:srgbClr val="000000"/>
                 </a:solidFill>
-                <a:latin typeface="Arial" panose="020B0604020202020204" pitchFamily="34" charset="0"/>
+                <a:latin typeface="Arial"/>
+                <a:ea typeface="Arial"/>
+                <a:cs typeface="Arial"/>
               </a:rPr>
-              <a:t>&gt;</a:t>
+              <a:t>$219.92</a:t>
             </a:r>
           </a:p>
         </p:txBody>
@@ -6794,17 +7284,19 @@
           <p:cNvPr id="9" name="TextBox 8">
             <a:extLst>
               <a:ext uri="{FF2B5EF4-FFF2-40B4-BE49-F238E27FC236}">
-                <a16:creationId xmlns:a16="http://schemas.microsoft.com/office/drawing/2014/main" id="{23151603-7FFA-2ACE-6990-7B4FF3E084F2}"/>
-              </a:ext>
-            </a:extLst>
-          </p:cNvPr>
-          <p:cNvSpPr txBox="1"/>
+                <a16:creationId xmlns:a16="http://schemas.microsoft.com/office/drawing/2014/main" id="{5E7370DB-A2B8-5791-C424-76A2B87A98C4}"/>
+              </a:ext>
+            </a:extLst>
+          </p:cNvPr>
+          <p:cNvSpPr>
+            <a:spLocks noGrp="1"/>
+          </p:cNvSpPr>
           <p:nvPr/>
         </p:nvSpPr>
         <p:spPr>
           <a:xfrm>
-            <a:off x="7493000" y="2705100"/>
-            <a:ext cx="3492500" cy="276999"/>
+            <a:off x="4660900" y="3683000"/>
+            <a:ext cx="2730500" cy="584775"/>
           </a:xfrm>
           <a:prstGeom prst="rect">
             <a:avLst/>
@@ -6812,45 +7304,101 @@
           <a:noFill/>
         </p:spPr>
         <p:txBody>
-          <a:bodyPr vert="horz" lIns="0" tIns="0" rIns="0" bIns="0" rtlCol="0" anchor="t">
+          <a:bodyPr vert="horz" lIns="0" tIns="0" rIns="0" bIns="0" anchor="t">
             <a:spAutoFit/>
           </a:bodyPr>
           <a:lstStyle/>
           <a:p>
             <a:r>
-              <a:rPr lang="en-US">
+              <a:rPr sz="1900">
                 <a:solidFill>
-                  <a:srgbClr val="000000"/>
+                  <a:srgbClr val="4C525B"/>
                 </a:solidFill>
-                <a:latin typeface="Arial" panose="020B0604020202020204" pitchFamily="34" charset="0"/>
+                <a:latin typeface="Arial"/>
+                <a:ea typeface="Arial"/>
+                <a:cs typeface="Arial"/>
               </a:rPr>
-              <a:t>Quebec and Ontario rent CPI</a:t>
-            </a:r>
-            <a:endParaRPr lang="fr-CA">
-              <a:solidFill>
-                <a:srgbClr val="000000"/>
-              </a:solidFill>
-              <a:latin typeface="Arial" panose="020B0604020202020204" pitchFamily="34" charset="0"/>
-            </a:endParaRPr>
-          </a:p>
-        </p:txBody>
-      </p:sp>
-      <p:sp>
-        <p:nvSpPr>
-          <p:cNvPr id="10" name="TextBox 9">
-            <a:extLst>
-              <a:ext uri="{FF2B5EF4-FFF2-40B4-BE49-F238E27FC236}">
-                <a16:creationId xmlns:a16="http://schemas.microsoft.com/office/drawing/2014/main" id="{DD8582AA-B30D-A3A8-F780-AE627BA96CEE}"/>
-              </a:ext>
-            </a:extLst>
-          </p:cNvPr>
-          <p:cNvSpPr txBox="1"/>
+              <a:t>Median monthly
+discount in 2025</a:t>
+            </a:r>
+          </a:p>
+        </p:txBody>
+      </p:sp>
+      <p:sp>
+        <p:nvSpPr>
+          <p:cNvPr id="10" name="Rectangle 9">
+            <a:extLst>
+              <a:ext uri="{FF2B5EF4-FFF2-40B4-BE49-F238E27FC236}">
+                <a16:creationId xmlns:a16="http://schemas.microsoft.com/office/drawing/2014/main" id="{723A8272-CAC2-457E-FAB9-4541C98D8F4D}"/>
+              </a:ext>
+            </a:extLst>
+          </p:cNvPr>
+          <p:cNvSpPr>
+            <a:spLocks noGrp="1"/>
+          </p:cNvSpPr>
           <p:nvPr/>
         </p:nvSpPr>
         <p:spPr>
           <a:xfrm>
-            <a:off x="6985000" y="3556000"/>
-            <a:ext cx="355600" cy="307777"/>
+            <a:off x="8255000" y="2095500"/>
+            <a:ext cx="3302000" cy="2921000"/>
+          </a:xfrm>
+          <a:prstGeom prst="rect">
+            <a:avLst/>
+          </a:prstGeom>
+          <a:solidFill>
+            <a:srgbClr val="EDEDED"/>
+          </a:solidFill>
+          <a:ln w="19050" cmpd="sng">
+            <a:noFill/>
+            <a:prstDash val="solid"/>
+          </a:ln>
+        </p:spPr>
+        <p:style>
+          <a:lnRef idx="2">
+            <a:schemeClr val="accent1">
+              <a:shade val="15000"/>
+            </a:schemeClr>
+          </a:lnRef>
+          <a:fillRef idx="1">
+            <a:schemeClr val="accent1"/>
+          </a:fillRef>
+          <a:effectRef idx="0">
+            <a:schemeClr val="accent1"/>
+          </a:effectRef>
+          <a:fontRef idx="minor">
+            <a:schemeClr val="lt1"/>
+          </a:fontRef>
+        </p:style>
+        <p:txBody>
+          <a:bodyPr anchor="ctr"/>
+          <a:lstStyle/>
+          <a:p>
+            <a:pPr algn="ctr">
+              <a:buNone/>
+            </a:pPr>
+            <a:endParaRPr/>
+          </a:p>
+        </p:txBody>
+      </p:sp>
+      <p:sp>
+        <p:nvSpPr>
+          <p:cNvPr id="11" name="TextBox 10">
+            <a:extLst>
+              <a:ext uri="{FF2B5EF4-FFF2-40B4-BE49-F238E27FC236}">
+                <a16:creationId xmlns:a16="http://schemas.microsoft.com/office/drawing/2014/main" id="{3F29F4A3-D976-F3AB-67EA-B13DBDE0E601}"/>
+              </a:ext>
+            </a:extLst>
+          </p:cNvPr>
+          <p:cNvSpPr>
+            <a:spLocks noGrp="1"/>
+          </p:cNvSpPr>
+          <p:nvPr/>
+        </p:nvSpPr>
+        <p:spPr>
+          <a:xfrm>
+            <a:off x="8534400" y="2603500"/>
+            <a:ext cx="2730500" cy="584775"/>
           </a:xfrm>
           <a:prstGeom prst="rect">
             <a:avLst/>
@@ -6858,39 +7406,43 @@
           <a:noFill/>
         </p:spPr>
         <p:txBody>
-          <a:bodyPr vert="horz" lIns="0" tIns="0" rIns="0" bIns="0" rtlCol="0" anchor="t">
+          <a:bodyPr vert="horz" lIns="0" tIns="0" rIns="0" bIns="0" anchor="t">
             <a:spAutoFit/>
           </a:bodyPr>
           <a:lstStyle/>
           <a:p>
             <a:r>
-              <a:rPr lang="fr-CA" sz="2000" b="1">
+              <a:rPr sz="3800" b="1">
                 <a:solidFill>
-                  <a:srgbClr val="3D8DFF"/>
+                  <a:srgbClr val="000000"/>
                 </a:solidFill>
-                <a:latin typeface="Arial" panose="020B0604020202020204" pitchFamily="34" charset="0"/>
+                <a:latin typeface="Arial"/>
+                <a:ea typeface="Arial"/>
+                <a:cs typeface="Arial"/>
               </a:rPr>
-              <a:t>&gt;</a:t>
-            </a:r>
-          </a:p>
-        </p:txBody>
-      </p:sp>
-      <p:sp>
-        <p:nvSpPr>
-          <p:cNvPr id="11" name="TextBox 10">
-            <a:extLst>
-              <a:ext uri="{FF2B5EF4-FFF2-40B4-BE49-F238E27FC236}">
-                <a16:creationId xmlns:a16="http://schemas.microsoft.com/office/drawing/2014/main" id="{32A01605-8D20-2240-7D06-ACB98BD80E9D}"/>
-              </a:ext>
-            </a:extLst>
-          </p:cNvPr>
-          <p:cNvSpPr txBox="1"/>
+              <a:t>5.74%</a:t>
+            </a:r>
+          </a:p>
+        </p:txBody>
+      </p:sp>
+      <p:sp>
+        <p:nvSpPr>
+          <p:cNvPr id="12" name="TextBox 11">
+            <a:extLst>
+              <a:ext uri="{FF2B5EF4-FFF2-40B4-BE49-F238E27FC236}">
+                <a16:creationId xmlns:a16="http://schemas.microsoft.com/office/drawing/2014/main" id="{A7B81D12-0019-9658-2F1D-099E5302721E}"/>
+              </a:ext>
+            </a:extLst>
+          </p:cNvPr>
+          <p:cNvSpPr>
+            <a:spLocks noGrp="1"/>
+          </p:cNvSpPr>
           <p:nvPr/>
         </p:nvSpPr>
         <p:spPr>
           <a:xfrm>
-            <a:off x="7493000" y="3530600"/>
-            <a:ext cx="3492500" cy="553998"/>
+            <a:off x="8534400" y="3683000"/>
+            <a:ext cx="2730500" cy="584775"/>
           </a:xfrm>
           <a:prstGeom prst="rect">
             <a:avLst/>
@@ -6898,45 +7450,44 @@
           <a:noFill/>
         </p:spPr>
         <p:txBody>
-          <a:bodyPr vert="horz" lIns="0" tIns="0" rIns="0" bIns="0" rtlCol="0" anchor="t">
+          <a:bodyPr vert="horz" lIns="0" tIns="0" rIns="0" bIns="0" anchor="t">
             <a:spAutoFit/>
           </a:bodyPr>
           <a:lstStyle/>
           <a:p>
             <a:r>
-              <a:rPr lang="en-US">
+              <a:rPr sz="1900">
                 <a:solidFill>
-                  <a:srgbClr val="000000"/>
+                  <a:srgbClr val="4C525B"/>
                 </a:solidFill>
-                <a:latin typeface="Arial" panose="020B0604020202020204" pitchFamily="34" charset="0"/>
+                <a:latin typeface="Arial"/>
+                <a:ea typeface="Arial"/>
+                <a:cs typeface="Arial"/>
               </a:rPr>
-              <a:t>The Met reviewed separately from Quebec</a:t>
-            </a:r>
-            <a:endParaRPr lang="fr-CA">
-              <a:solidFill>
-                <a:srgbClr val="000000"/>
-              </a:solidFill>
-              <a:latin typeface="Arial" panose="020B0604020202020204" pitchFamily="34" charset="0"/>
-            </a:endParaRPr>
-          </a:p>
-        </p:txBody>
-      </p:sp>
-      <p:sp>
-        <p:nvSpPr>
-          <p:cNvPr id="12" name="TextBox 11">
-            <a:extLst>
-              <a:ext uri="{FF2B5EF4-FFF2-40B4-BE49-F238E27FC236}">
-                <a16:creationId xmlns:a16="http://schemas.microsoft.com/office/drawing/2014/main" id="{6EE61A43-BC7F-5976-B379-7A6F80347579}"/>
-              </a:ext>
-            </a:extLst>
-          </p:cNvPr>
-          <p:cNvSpPr txBox="1"/>
+              <a:t>2025 turnover growth
+vs. 2.91% renewals</a:t>
+            </a:r>
+          </a:p>
+        </p:txBody>
+      </p:sp>
+      <p:sp>
+        <p:nvSpPr>
+          <p:cNvPr id="13" name="TextBox 12">
+            <a:extLst>
+              <a:ext uri="{FF2B5EF4-FFF2-40B4-BE49-F238E27FC236}">
+                <a16:creationId xmlns:a16="http://schemas.microsoft.com/office/drawing/2014/main" id="{48418038-2C06-B347-A424-2D3A595E14AB}"/>
+              </a:ext>
+            </a:extLst>
+          </p:cNvPr>
+          <p:cNvSpPr>
+            <a:spLocks noGrp="1"/>
+          </p:cNvSpPr>
           <p:nvPr/>
         </p:nvSpPr>
         <p:spPr>
           <a:xfrm>
-            <a:off x="6985000" y="4381500"/>
-            <a:ext cx="355600" cy="307777"/>
+            <a:off x="508000" y="5588000"/>
+            <a:ext cx="10414000" cy="338554"/>
           </a:xfrm>
           <a:prstGeom prst="rect">
             <a:avLst/>
@@ -6944,39 +7495,43 @@
           <a:noFill/>
         </p:spPr>
         <p:txBody>
-          <a:bodyPr vert="horz" lIns="0" tIns="0" rIns="0" bIns="0" rtlCol="0" anchor="t">
+          <a:bodyPr vert="horz" lIns="0" tIns="0" rIns="0" bIns="0" anchor="t">
             <a:spAutoFit/>
           </a:bodyPr>
           <a:lstStyle/>
           <a:p>
             <a:r>
-              <a:rPr lang="fr-CA" sz="2000" b="1">
+              <a:rPr sz="2200" b="1">
                 <a:solidFill>
-                  <a:srgbClr val="3D8DFF"/>
+                  <a:srgbClr val="000000"/>
                 </a:solidFill>
-                <a:latin typeface="Arial" panose="020B0604020202020204" pitchFamily="34" charset="0"/>
+                <a:latin typeface="Arial"/>
+                <a:ea typeface="Arial"/>
+                <a:cs typeface="Arial"/>
               </a:rPr>
-              <a:t>&gt;</a:t>
-            </a:r>
-          </a:p>
-        </p:txBody>
-      </p:sp>
-      <p:sp>
-        <p:nvSpPr>
-          <p:cNvPr id="13" name="TextBox 12">
-            <a:extLst>
-              <a:ext uri="{FF2B5EF4-FFF2-40B4-BE49-F238E27FC236}">
-                <a16:creationId xmlns:a16="http://schemas.microsoft.com/office/drawing/2014/main" id="{2CA43829-8FAD-0A17-4F14-40E44C1BA212}"/>
-              </a:ext>
-            </a:extLst>
-          </p:cNvPr>
-          <p:cNvSpPr txBox="1"/>
+              <a:t>Effective growth in 2025 was 3.58%, compared with 7.04% using contract rent.</a:t>
+            </a:r>
+          </a:p>
+        </p:txBody>
+      </p:sp>
+      <p:sp>
+        <p:nvSpPr>
+          <p:cNvPr id="14" name="TextBox 13">
+            <a:extLst>
+              <a:ext uri="{FF2B5EF4-FFF2-40B4-BE49-F238E27FC236}">
+                <a16:creationId xmlns:a16="http://schemas.microsoft.com/office/drawing/2014/main" id="{1E08FDD0-DE8D-1C81-0386-770A0EF3CC4A}"/>
+              </a:ext>
+            </a:extLst>
+          </p:cNvPr>
+          <p:cNvSpPr>
+            <a:spLocks noGrp="1"/>
+          </p:cNvSpPr>
           <p:nvPr/>
         </p:nvSpPr>
         <p:spPr>
           <a:xfrm>
-            <a:off x="7493000" y="4356100"/>
-            <a:ext cx="3492500" cy="276999"/>
+            <a:off x="11493500" y="6502400"/>
+            <a:ext cx="254000" cy="138499"/>
           </a:xfrm>
           <a:prstGeom prst="rect">
             <a:avLst/>
@@ -6984,64 +7539,22 @@
           <a:noFill/>
         </p:spPr>
         <p:txBody>
-          <a:bodyPr vert="horz" lIns="0" tIns="0" rIns="0" bIns="0" rtlCol="0" anchor="t">
+          <a:bodyPr vert="horz" lIns="0" tIns="0" rIns="0" bIns="0" anchor="t">
             <a:spAutoFit/>
           </a:bodyPr>
           <a:lstStyle/>
           <a:p>
-            <a:r>
-              <a:rPr lang="en-US">
-                <a:solidFill>
-                  <a:srgbClr val="000000"/>
-                </a:solidFill>
-                <a:latin typeface="Arial" panose="020B0604020202020204" pitchFamily="34" charset="0"/>
-              </a:rPr>
-              <a:t>The Met first occupied in 2022</a:t>
-            </a:r>
-            <a:endParaRPr lang="fr-CA">
-              <a:solidFill>
-                <a:srgbClr val="000000"/>
-              </a:solidFill>
-              <a:latin typeface="Arial" panose="020B0604020202020204" pitchFamily="34" charset="0"/>
-            </a:endParaRPr>
-          </a:p>
-        </p:txBody>
-      </p:sp>
-      <p:sp>
-        <p:nvSpPr>
-          <p:cNvPr id="14" name="TextBox 13">
-            <a:extLst>
-              <a:ext uri="{FF2B5EF4-FFF2-40B4-BE49-F238E27FC236}">
-                <a16:creationId xmlns:a16="http://schemas.microsoft.com/office/drawing/2014/main" id="{37D6E54A-0FAE-B92E-2B40-B771F36DB074}"/>
-              </a:ext>
-            </a:extLst>
-          </p:cNvPr>
-          <p:cNvSpPr txBox="1"/>
-          <p:nvPr/>
-        </p:nvSpPr>
-        <p:spPr>
-          <a:xfrm>
-            <a:off x="11493500" y="6502400"/>
-            <a:ext cx="254000" cy="138499"/>
-          </a:xfrm>
-          <a:prstGeom prst="rect">
-            <a:avLst/>
-          </a:prstGeom>
-          <a:noFill/>
-        </p:spPr>
-        <p:txBody>
-          <a:bodyPr vert="horz" lIns="0" tIns="0" rIns="0" bIns="0" rtlCol="0" anchor="t">
-            <a:spAutoFit/>
-          </a:bodyPr>
-          <a:lstStyle/>
-          <a:p>
-            <a:pPr algn="r"/>
-            <a:r>
-              <a:rPr lang="fr-CA" sz="900">
+            <a:pPr algn="r">
+              <a:buNone/>
+            </a:pPr>
+            <a:r>
+              <a:rPr sz="900">
                 <a:solidFill>
                   <a:srgbClr val="4C525B"/>
                 </a:solidFill>
-                <a:latin typeface="Arial" panose="020B0604020202020204" pitchFamily="34" charset="0"/>
+                <a:latin typeface="Arial"/>
+                <a:ea typeface="Arial"/>
+                <a:cs typeface="Arial"/>
               </a:rPr>
               <a:t>5</a:t>
             </a:r>
@@ -7051,7 +7564,7 @@
     </p:spTree>
     <p:extLst>
       <p:ext uri="{BB962C8B-B14F-4D97-AF65-F5344CB8AC3E}">
-        <p14:creationId xmlns:p14="http://schemas.microsoft.com/office/powerpoint/2010/main" val="711523816"/>
+        <p14:creationId xmlns:p14="http://schemas.microsoft.com/office/powerpoint/2010/main" val="728337168"/>
       </p:ext>
     </p:extLst>
   </p:cSld>
@@ -7091,17 +7604,19 @@
           <p:cNvPr id="2" name="TextBox 1">
             <a:extLst>
               <a:ext uri="{FF2B5EF4-FFF2-40B4-BE49-F238E27FC236}">
-                <a16:creationId xmlns:a16="http://schemas.microsoft.com/office/drawing/2014/main" id="{C3E5146B-9667-888C-D9B8-51DA7F0658CA}"/>
-              </a:ext>
-            </a:extLst>
-          </p:cNvPr>
-          <p:cNvSpPr txBox="1"/>
+                <a16:creationId xmlns:a16="http://schemas.microsoft.com/office/drawing/2014/main" id="{6F75B7DC-DF23-9360-6311-E727518A6FCB}"/>
+              </a:ext>
+            </a:extLst>
+          </p:cNvPr>
+          <p:cNvSpPr>
+            <a:spLocks noGrp="1"/>
+          </p:cNvSpPr>
           <p:nvPr/>
         </p:nvSpPr>
         <p:spPr>
           <a:xfrm>
             <a:off x="381000" y="330200"/>
-            <a:ext cx="11303000" cy="553998"/>
+            <a:ext cx="11430000" cy="553998"/>
           </a:xfrm>
           <a:prstGeom prst="rect">
             <a:avLst/>
@@ -7109,81 +7624,43 @@
           <a:noFill/>
         </p:spPr>
         <p:txBody>
-          <a:bodyPr vert="horz" lIns="0" tIns="0" rIns="0" bIns="0" rtlCol="0" anchor="t">
+          <a:bodyPr vert="horz" lIns="0" tIns="0" rIns="0" bIns="0" anchor="t">
             <a:spAutoFit/>
           </a:bodyPr>
           <a:lstStyle/>
           <a:p>
             <a:r>
-              <a:rPr lang="en-US" sz="3600" b="1">
+              <a:rPr sz="3600" b="1">
                 <a:solidFill>
                   <a:srgbClr val="000000"/>
                 </a:solidFill>
-                <a:latin typeface="Arial" panose="020B0604020202020204" pitchFamily="34" charset="0"/>
+                <a:latin typeface="Arial"/>
+                <a:ea typeface="Arial"/>
+                <a:cs typeface="Arial"/>
               </a:rPr>
-              <a:t>Use 2.46% as the 2026 planning baseline</a:t>
-            </a:r>
-            <a:endParaRPr lang="fr-CA" sz="3600" b="1">
-              <a:solidFill>
-                <a:srgbClr val="000000"/>
-              </a:solidFill>
-              <a:latin typeface="Arial" panose="020B0604020202020204" pitchFamily="34" charset="0"/>
-            </a:endParaRPr>
-          </a:p>
-        </p:txBody>
-      </p:sp>
-      <p:pic>
-        <p:nvPicPr>
-          <p:cNvPr id="4" name="Picture 3">
-            <a:extLst>
-              <a:ext uri="{FF2B5EF4-FFF2-40B4-BE49-F238E27FC236}">
-                <a16:creationId xmlns:a16="http://schemas.microsoft.com/office/drawing/2014/main" id="{267D4375-2C55-8660-E6A5-741CDB221849}"/>
-              </a:ext>
-            </a:extLst>
-          </p:cNvPr>
-          <p:cNvPicPr>
-            <a:picLocks/>
-          </p:cNvPicPr>
+              <a:t>Market data supports a cautious forecast</a:t>
+            </a:r>
+          </a:p>
+        </p:txBody>
+      </p:sp>
+      <p:sp>
+        <p:nvSpPr>
+          <p:cNvPr id="3" name="TextBox 2">
+            <a:extLst>
+              <a:ext uri="{FF2B5EF4-FFF2-40B4-BE49-F238E27FC236}">
+                <a16:creationId xmlns:a16="http://schemas.microsoft.com/office/drawing/2014/main" id="{4C897955-2980-3AB8-AF30-72F3020F81BD}"/>
+              </a:ext>
+            </a:extLst>
+          </p:cNvPr>
+          <p:cNvSpPr>
+            <a:spLocks noGrp="1"/>
+          </p:cNvSpPr>
           <p:nvPr/>
-        </p:nvPicPr>
-        <p:blipFill>
-          <a:blip r:embed="rId3">
-            <a:extLst>
-              <a:ext uri="{28A0092B-C50C-407E-A947-70E740481C1C}">
-                <a14:useLocalDpi xmlns:a14="http://schemas.microsoft.com/office/drawing/2010/main" val="0"/>
-              </a:ext>
-            </a:extLst>
-          </a:blip>
-          <a:stretch>
-            <a:fillRect/>
-          </a:stretch>
-        </p:blipFill>
-        <p:spPr>
-          <a:xfrm>
-            <a:off x="381000" y="1295400"/>
-            <a:ext cx="7556500" cy="4140200"/>
-          </a:xfrm>
-          <a:prstGeom prst="rect">
-            <a:avLst/>
-          </a:prstGeom>
-        </p:spPr>
-      </p:pic>
-      <p:sp>
-        <p:nvSpPr>
-          <p:cNvPr id="5" name="TextBox 4">
-            <a:extLst>
-              <a:ext uri="{FF2B5EF4-FFF2-40B4-BE49-F238E27FC236}">
-                <a16:creationId xmlns:a16="http://schemas.microsoft.com/office/drawing/2014/main" id="{919DF10C-956C-F7C2-E0C1-7871678568ED}"/>
-              </a:ext>
-            </a:extLst>
-          </p:cNvPr>
-          <p:cNvSpPr txBox="1"/>
-          <p:nvPr/>
-        </p:nvSpPr>
-        <p:spPr>
-          <a:xfrm>
-            <a:off x="8445500" y="1524000"/>
-            <a:ext cx="2921000" cy="615553"/>
+        </p:nvSpPr>
+        <p:spPr>
+          <a:xfrm>
+            <a:off x="508000" y="1587500"/>
+            <a:ext cx="5334000" cy="1415772"/>
           </a:xfrm>
           <a:prstGeom prst="rect">
             <a:avLst/>
@@ -7191,39 +7668,84 @@
           <a:noFill/>
         </p:spPr>
         <p:txBody>
-          <a:bodyPr vert="horz" lIns="0" tIns="0" rIns="0" bIns="0" rtlCol="0" anchor="t">
+          <a:bodyPr vert="horz" lIns="0" tIns="0" rIns="0" bIns="0" anchor="t">
             <a:spAutoFit/>
           </a:bodyPr>
           <a:lstStyle/>
           <a:p>
             <a:r>
-              <a:rPr lang="fr-CA" sz="4000" b="1">
+              <a:rPr sz="2300" dirty="0">
                 <a:solidFill>
                   <a:srgbClr val="000000"/>
                 </a:solidFill>
-                <a:latin typeface="Arial" panose="020B0604020202020204" pitchFamily="34" charset="0"/>
+                <a:latin typeface="Arial"/>
+                <a:ea typeface="Arial"/>
+                <a:cs typeface="Arial"/>
               </a:rPr>
-              <a:t>2.46%</a:t>
-            </a:r>
-          </a:p>
-        </p:txBody>
-      </p:sp>
-      <p:sp>
-        <p:nvSpPr>
-          <p:cNvPr id="6" name="TextBox 5">
-            <a:extLst>
-              <a:ext uri="{FF2B5EF4-FFF2-40B4-BE49-F238E27FC236}">
-                <a16:creationId xmlns:a16="http://schemas.microsoft.com/office/drawing/2014/main" id="{C953D815-E4F7-8B1A-2310-2A34C7B77053}"/>
-              </a:ext>
-            </a:extLst>
-          </p:cNvPr>
-          <p:cNvSpPr txBox="1"/>
+              <a:t>Published market rents grew faster than </a:t>
+            </a:r>
+            <a:r>
+              <a:rPr lang="en-US" sz="2300" dirty="0" err="1">
+                <a:solidFill>
+                  <a:srgbClr val="000000"/>
+                </a:solidFill>
+                <a:latin typeface="Arial"/>
+                <a:ea typeface="Arial"/>
+                <a:cs typeface="Arial"/>
+              </a:rPr>
+              <a:t>Jadco’s</a:t>
+            </a:r>
+            <a:r>
+              <a:rPr sz="2300" dirty="0">
+                <a:solidFill>
+                  <a:srgbClr val="000000"/>
+                </a:solidFill>
+                <a:latin typeface="Arial"/>
+                <a:ea typeface="Arial"/>
+                <a:cs typeface="Arial"/>
+              </a:rPr>
+              <a:t> portfolio, but vacancy also increased. </a:t>
+            </a:r>
+            <a:r>
+              <a:rPr lang="en-US" sz="2300" dirty="0">
+                <a:solidFill>
+                  <a:srgbClr val="000000"/>
+                </a:solidFill>
+                <a:latin typeface="Arial"/>
+                <a:ea typeface="Arial"/>
+                <a:cs typeface="Arial"/>
+              </a:rPr>
+              <a:t>Market data is used as a check.</a:t>
+            </a:r>
+            <a:endParaRPr sz="2300" dirty="0">
+              <a:solidFill>
+                <a:srgbClr val="000000"/>
+              </a:solidFill>
+              <a:latin typeface="Arial"/>
+              <a:ea typeface="Arial"/>
+              <a:cs typeface="Arial"/>
+            </a:endParaRPr>
+          </a:p>
+        </p:txBody>
+      </p:sp>
+      <p:sp>
+        <p:nvSpPr>
+          <p:cNvPr id="4" name="TextBox 3">
+            <a:extLst>
+              <a:ext uri="{FF2B5EF4-FFF2-40B4-BE49-F238E27FC236}">
+                <a16:creationId xmlns:a16="http://schemas.microsoft.com/office/drawing/2014/main" id="{0B676DD0-441F-5204-7951-99A37084C77E}"/>
+              </a:ext>
+            </a:extLst>
+          </p:cNvPr>
+          <p:cNvSpPr>
+            <a:spLocks noGrp="1"/>
+          </p:cNvSpPr>
           <p:nvPr/>
         </p:nvSpPr>
         <p:spPr>
           <a:xfrm>
-            <a:off x="8445500" y="2222500"/>
-            <a:ext cx="2921000" cy="276999"/>
+            <a:off x="508000" y="4254500"/>
+            <a:ext cx="5334000" cy="1015663"/>
           </a:xfrm>
           <a:prstGeom prst="rect">
             <a:avLst/>
@@ -7231,35 +7753,665 @@
           <a:noFill/>
         </p:spPr>
         <p:txBody>
-          <a:bodyPr vert="horz" lIns="0" tIns="0" rIns="0" bIns="0" rtlCol="0" anchor="t">
+          <a:bodyPr vert="horz" lIns="0" tIns="0" rIns="0" bIns="0" anchor="t">
             <a:spAutoFit/>
           </a:bodyPr>
           <a:lstStyle/>
           <a:p>
             <a:r>
-              <a:rPr lang="fr-CA">
+              <a:rPr sz="2200" b="1">
+                <a:solidFill>
+                  <a:srgbClr val="3D8DFF"/>
+                </a:solidFill>
+                <a:latin typeface="Arial"/>
+                <a:ea typeface="Arial"/>
+                <a:cs typeface="Arial"/>
+              </a:rPr>
+              <a:t>The Met is reviewed separately because Ontario rules and its short history are different.</a:t>
+            </a:r>
+          </a:p>
+        </p:txBody>
+      </p:sp>
+      <p:sp>
+        <p:nvSpPr>
+          <p:cNvPr id="5" name="Rectangle 4">
+            <a:extLst>
+              <a:ext uri="{FF2B5EF4-FFF2-40B4-BE49-F238E27FC236}">
+                <a16:creationId xmlns:a16="http://schemas.microsoft.com/office/drawing/2014/main" id="{C5F262DC-2B3D-C8C2-55BA-BEB770DB372E}"/>
+              </a:ext>
+            </a:extLst>
+          </p:cNvPr>
+          <p:cNvSpPr>
+            <a:spLocks noGrp="1"/>
+          </p:cNvSpPr>
+          <p:nvPr/>
+        </p:nvSpPr>
+        <p:spPr>
+          <a:xfrm>
+            <a:off x="6604000" y="1460500"/>
+            <a:ext cx="4953000" cy="4064000"/>
+          </a:xfrm>
+          <a:prstGeom prst="rect">
+            <a:avLst/>
+          </a:prstGeom>
+          <a:solidFill>
+            <a:srgbClr val="EDEDED"/>
+          </a:solidFill>
+          <a:ln w="19050" cmpd="sng">
+            <a:noFill/>
+            <a:prstDash val="solid"/>
+          </a:ln>
+        </p:spPr>
+        <p:style>
+          <a:lnRef idx="2">
+            <a:schemeClr val="accent1">
+              <a:shade val="15000"/>
+            </a:schemeClr>
+          </a:lnRef>
+          <a:fillRef idx="1">
+            <a:schemeClr val="accent1"/>
+          </a:fillRef>
+          <a:effectRef idx="0">
+            <a:schemeClr val="accent1"/>
+          </a:effectRef>
+          <a:fontRef idx="minor">
+            <a:schemeClr val="lt1"/>
+          </a:fontRef>
+        </p:style>
+        <p:txBody>
+          <a:bodyPr anchor="ctr"/>
+          <a:lstStyle/>
+          <a:p>
+            <a:pPr algn="ctr">
+              <a:buNone/>
+            </a:pPr>
+            <a:endParaRPr/>
+          </a:p>
+        </p:txBody>
+      </p:sp>
+      <p:sp>
+        <p:nvSpPr>
+          <p:cNvPr id="6" name="TextBox 5">
+            <a:extLst>
+              <a:ext uri="{FF2B5EF4-FFF2-40B4-BE49-F238E27FC236}">
+                <a16:creationId xmlns:a16="http://schemas.microsoft.com/office/drawing/2014/main" id="{1B8FF6C8-AD82-A9F0-1D28-71CA5FE2B661}"/>
+              </a:ext>
+            </a:extLst>
+          </p:cNvPr>
+          <p:cNvSpPr>
+            <a:spLocks noGrp="1"/>
+          </p:cNvSpPr>
+          <p:nvPr/>
+        </p:nvSpPr>
+        <p:spPr>
+          <a:xfrm>
+            <a:off x="6985000" y="1905000"/>
+            <a:ext cx="355600" cy="307777"/>
+          </a:xfrm>
+          <a:prstGeom prst="rect">
+            <a:avLst/>
+          </a:prstGeom>
+          <a:noFill/>
+        </p:spPr>
+        <p:txBody>
+          <a:bodyPr vert="horz" lIns="0" tIns="0" rIns="0" bIns="0" anchor="t">
+            <a:spAutoFit/>
+          </a:bodyPr>
+          <a:lstStyle/>
+          <a:p>
+            <a:r>
+              <a:rPr sz="2000" b="1">
+                <a:solidFill>
+                  <a:srgbClr val="3D8DFF"/>
+                </a:solidFill>
+                <a:latin typeface="Arial"/>
+                <a:ea typeface="Arial"/>
+                <a:cs typeface="Arial"/>
+              </a:rPr>
+              <a:t>&gt;</a:t>
+            </a:r>
+          </a:p>
+        </p:txBody>
+      </p:sp>
+      <p:sp>
+        <p:nvSpPr>
+          <p:cNvPr id="7" name="TextBox 6">
+            <a:extLst>
+              <a:ext uri="{FF2B5EF4-FFF2-40B4-BE49-F238E27FC236}">
+                <a16:creationId xmlns:a16="http://schemas.microsoft.com/office/drawing/2014/main" id="{B24300F3-EAF9-4E29-1AA7-FAB879630A23}"/>
+              </a:ext>
+            </a:extLst>
+          </p:cNvPr>
+          <p:cNvSpPr>
+            <a:spLocks noGrp="1"/>
+          </p:cNvSpPr>
+          <p:nvPr/>
+        </p:nvSpPr>
+        <p:spPr>
+          <a:xfrm>
+            <a:off x="7493000" y="1879600"/>
+            <a:ext cx="3492500" cy="553998"/>
+          </a:xfrm>
+          <a:prstGeom prst="rect">
+            <a:avLst/>
+          </a:prstGeom>
+          <a:noFill/>
+        </p:spPr>
+        <p:txBody>
+          <a:bodyPr vert="horz" lIns="0" tIns="0" rIns="0" bIns="0" anchor="t">
+            <a:spAutoFit/>
+          </a:bodyPr>
+          <a:lstStyle/>
+          <a:p>
+            <a:r>
+              <a:rPr>
+                <a:solidFill>
+                  <a:srgbClr val="000000"/>
+                </a:solidFill>
+                <a:latin typeface="Arial"/>
+                <a:ea typeface="Arial"/>
+                <a:cs typeface="Arial"/>
+              </a:rPr>
+              <a:t>Montréal: 7.4% CMHC rent growth in 2025</a:t>
+            </a:r>
+          </a:p>
+        </p:txBody>
+      </p:sp>
+      <p:sp>
+        <p:nvSpPr>
+          <p:cNvPr id="8" name="TextBox 7">
+            <a:extLst>
+              <a:ext uri="{FF2B5EF4-FFF2-40B4-BE49-F238E27FC236}">
+                <a16:creationId xmlns:a16="http://schemas.microsoft.com/office/drawing/2014/main" id="{21C3394A-E69E-54F5-56B3-D67A59A7E7CC}"/>
+              </a:ext>
+            </a:extLst>
+          </p:cNvPr>
+          <p:cNvSpPr>
+            <a:spLocks noGrp="1"/>
+          </p:cNvSpPr>
+          <p:nvPr/>
+        </p:nvSpPr>
+        <p:spPr>
+          <a:xfrm>
+            <a:off x="6985000" y="2730500"/>
+            <a:ext cx="355600" cy="307777"/>
+          </a:xfrm>
+          <a:prstGeom prst="rect">
+            <a:avLst/>
+          </a:prstGeom>
+          <a:noFill/>
+        </p:spPr>
+        <p:txBody>
+          <a:bodyPr vert="horz" lIns="0" tIns="0" rIns="0" bIns="0" anchor="t">
+            <a:spAutoFit/>
+          </a:bodyPr>
+          <a:lstStyle/>
+          <a:p>
+            <a:r>
+              <a:rPr sz="2000" b="1">
+                <a:solidFill>
+                  <a:srgbClr val="3D8DFF"/>
+                </a:solidFill>
+                <a:latin typeface="Arial"/>
+                <a:ea typeface="Arial"/>
+                <a:cs typeface="Arial"/>
+              </a:rPr>
+              <a:t>&gt;</a:t>
+            </a:r>
+          </a:p>
+        </p:txBody>
+      </p:sp>
+      <p:sp>
+        <p:nvSpPr>
+          <p:cNvPr id="9" name="TextBox 8">
+            <a:extLst>
+              <a:ext uri="{FF2B5EF4-FFF2-40B4-BE49-F238E27FC236}">
+                <a16:creationId xmlns:a16="http://schemas.microsoft.com/office/drawing/2014/main" id="{23151603-7FFA-2ACE-6990-7B4FF3E084F2}"/>
+              </a:ext>
+            </a:extLst>
+          </p:cNvPr>
+          <p:cNvSpPr>
+            <a:spLocks noGrp="1"/>
+          </p:cNvSpPr>
+          <p:nvPr/>
+        </p:nvSpPr>
+        <p:spPr>
+          <a:xfrm>
+            <a:off x="7493000" y="2705100"/>
+            <a:ext cx="3492500" cy="548640"/>
+          </a:xfrm>
+          <a:prstGeom prst="rect">
+            <a:avLst/>
+          </a:prstGeom>
+          <a:noFill/>
+        </p:spPr>
+        <p:txBody>
+          <a:bodyPr vert="horz" lIns="0" tIns="0" rIns="0" bIns="0" anchor="t">
+            <a:spAutoFit/>
+          </a:bodyPr>
+          <a:lstStyle/>
+          <a:p>
+            <a:r>
+              <a:rPr>
+                <a:solidFill>
+                  <a:srgbClr val="000000"/>
+                </a:solidFill>
+                <a:latin typeface="Arial"/>
+                <a:ea typeface="Arial"/>
+                <a:cs typeface="Arial"/>
+              </a:rPr>
+              <a:t>Vacancy: 1.5% → 2.9% from 2023 to 2025</a:t>
+            </a:r>
+          </a:p>
+        </p:txBody>
+      </p:sp>
+      <p:sp>
+        <p:nvSpPr>
+          <p:cNvPr id="10" name="TextBox 9">
+            <a:extLst>
+              <a:ext uri="{FF2B5EF4-FFF2-40B4-BE49-F238E27FC236}">
+                <a16:creationId xmlns:a16="http://schemas.microsoft.com/office/drawing/2014/main" id="{DD8582AA-B30D-A3A8-F780-AE627BA96CEE}"/>
+              </a:ext>
+            </a:extLst>
+          </p:cNvPr>
+          <p:cNvSpPr>
+            <a:spLocks noGrp="1"/>
+          </p:cNvSpPr>
+          <p:nvPr/>
+        </p:nvSpPr>
+        <p:spPr>
+          <a:xfrm>
+            <a:off x="6985000" y="3556000"/>
+            <a:ext cx="355600" cy="307777"/>
+          </a:xfrm>
+          <a:prstGeom prst="rect">
+            <a:avLst/>
+          </a:prstGeom>
+          <a:noFill/>
+        </p:spPr>
+        <p:txBody>
+          <a:bodyPr vert="horz" lIns="0" tIns="0" rIns="0" bIns="0" anchor="t">
+            <a:spAutoFit/>
+          </a:bodyPr>
+          <a:lstStyle/>
+          <a:p>
+            <a:r>
+              <a:rPr sz="2000" b="1">
+                <a:solidFill>
+                  <a:srgbClr val="3D8DFF"/>
+                </a:solidFill>
+                <a:latin typeface="Arial"/>
+                <a:ea typeface="Arial"/>
+                <a:cs typeface="Arial"/>
+              </a:rPr>
+              <a:t>&gt;</a:t>
+            </a:r>
+          </a:p>
+        </p:txBody>
+      </p:sp>
+      <p:sp>
+        <p:nvSpPr>
+          <p:cNvPr id="11" name="TextBox 10">
+            <a:extLst>
+              <a:ext uri="{FF2B5EF4-FFF2-40B4-BE49-F238E27FC236}">
+                <a16:creationId xmlns:a16="http://schemas.microsoft.com/office/drawing/2014/main" id="{32A01605-8D20-2240-7D06-ACB98BD80E9D}"/>
+              </a:ext>
+            </a:extLst>
+          </p:cNvPr>
+          <p:cNvSpPr>
+            <a:spLocks noGrp="1"/>
+          </p:cNvSpPr>
+          <p:nvPr/>
+        </p:nvSpPr>
+        <p:spPr>
+          <a:xfrm>
+            <a:off x="7493000" y="3530600"/>
+            <a:ext cx="3492500" cy="822960"/>
+          </a:xfrm>
+          <a:prstGeom prst="rect">
+            <a:avLst/>
+          </a:prstGeom>
+          <a:noFill/>
+        </p:spPr>
+        <p:txBody>
+          <a:bodyPr vert="horz" lIns="0" tIns="0" rIns="0" bIns="0" anchor="t">
+            <a:spAutoFit/>
+          </a:bodyPr>
+          <a:lstStyle/>
+          <a:p>
+            <a:r>
+              <a:rPr>
+                <a:solidFill>
+                  <a:srgbClr val="000000"/>
+                </a:solidFill>
+                <a:latin typeface="Arial"/>
+                <a:ea typeface="Arial"/>
+                <a:cs typeface="Arial"/>
+              </a:rPr>
+              <a:t>The Met opened in 2022; Ontario's guideline generally does not apply</a:t>
+            </a:r>
+          </a:p>
+        </p:txBody>
+      </p:sp>
+      <p:sp>
+        <p:nvSpPr>
+          <p:cNvPr id="12" name="TextBox 11">
+            <a:extLst>
+              <a:ext uri="{FF2B5EF4-FFF2-40B4-BE49-F238E27FC236}">
+                <a16:creationId xmlns:a16="http://schemas.microsoft.com/office/drawing/2014/main" id="{6EE61A43-BC7F-5976-B379-7A6F80347579}"/>
+              </a:ext>
+            </a:extLst>
+          </p:cNvPr>
+          <p:cNvSpPr>
+            <a:spLocks noGrp="1"/>
+          </p:cNvSpPr>
+          <p:nvPr/>
+        </p:nvSpPr>
+        <p:spPr>
+          <a:xfrm>
+            <a:off x="6985000" y="4381500"/>
+            <a:ext cx="355600" cy="307777"/>
+          </a:xfrm>
+          <a:prstGeom prst="rect">
+            <a:avLst/>
+          </a:prstGeom>
+          <a:noFill/>
+        </p:spPr>
+        <p:txBody>
+          <a:bodyPr vert="horz" lIns="0" tIns="0" rIns="0" bIns="0" anchor="t">
+            <a:spAutoFit/>
+          </a:bodyPr>
+          <a:lstStyle/>
+          <a:p>
+            <a:r>
+              <a:rPr sz="2000" b="1">
+                <a:solidFill>
+                  <a:srgbClr val="3D8DFF"/>
+                </a:solidFill>
+                <a:latin typeface="Arial"/>
+                <a:ea typeface="Arial"/>
+                <a:cs typeface="Arial"/>
+              </a:rPr>
+              <a:t>&gt;</a:t>
+            </a:r>
+          </a:p>
+        </p:txBody>
+      </p:sp>
+      <p:sp>
+        <p:nvSpPr>
+          <p:cNvPr id="13" name="TextBox 12">
+            <a:extLst>
+              <a:ext uri="{FF2B5EF4-FFF2-40B4-BE49-F238E27FC236}">
+                <a16:creationId xmlns:a16="http://schemas.microsoft.com/office/drawing/2014/main" id="{2CA43829-8FAD-0A17-4F14-40E44C1BA212}"/>
+              </a:ext>
+            </a:extLst>
+          </p:cNvPr>
+          <p:cNvSpPr>
+            <a:spLocks noGrp="1"/>
+          </p:cNvSpPr>
+          <p:nvPr/>
+        </p:nvSpPr>
+        <p:spPr>
+          <a:xfrm>
+            <a:off x="7493000" y="4356100"/>
+            <a:ext cx="3492500" cy="276999"/>
+          </a:xfrm>
+          <a:prstGeom prst="rect">
+            <a:avLst/>
+          </a:prstGeom>
+          <a:noFill/>
+        </p:spPr>
+        <p:txBody>
+          <a:bodyPr vert="horz" lIns="0" tIns="0" rIns="0" bIns="0" anchor="t">
+            <a:spAutoFit/>
+          </a:bodyPr>
+          <a:lstStyle/>
+          <a:p>
+            <a:r>
+              <a:rPr>
+                <a:solidFill>
+                  <a:srgbClr val="000000"/>
+                </a:solidFill>
+                <a:latin typeface="Arial"/>
+                <a:ea typeface="Arial"/>
+                <a:cs typeface="Arial"/>
+              </a:rPr>
+              <a:t>Two years—no separate forecast</a:t>
+            </a:r>
+          </a:p>
+        </p:txBody>
+      </p:sp>
+      <p:sp>
+        <p:nvSpPr>
+          <p:cNvPr id="14" name="TextBox 13">
+            <a:extLst>
+              <a:ext uri="{FF2B5EF4-FFF2-40B4-BE49-F238E27FC236}">
+                <a16:creationId xmlns:a16="http://schemas.microsoft.com/office/drawing/2014/main" id="{37D6E54A-0FAE-B92E-2B40-B771F36DB074}"/>
+              </a:ext>
+            </a:extLst>
+          </p:cNvPr>
+          <p:cNvSpPr>
+            <a:spLocks noGrp="1"/>
+          </p:cNvSpPr>
+          <p:nvPr/>
+        </p:nvSpPr>
+        <p:spPr>
+          <a:xfrm>
+            <a:off x="11493500" y="6502400"/>
+            <a:ext cx="254000" cy="138499"/>
+          </a:xfrm>
+          <a:prstGeom prst="rect">
+            <a:avLst/>
+          </a:prstGeom>
+          <a:noFill/>
+        </p:spPr>
+        <p:txBody>
+          <a:bodyPr vert="horz" lIns="0" tIns="0" rIns="0" bIns="0" anchor="t">
+            <a:spAutoFit/>
+          </a:bodyPr>
+          <a:lstStyle/>
+          <a:p>
+            <a:pPr algn="r">
+              <a:buNone/>
+            </a:pPr>
+            <a:r>
+              <a:rPr sz="900">
                 <a:solidFill>
                   <a:srgbClr val="4C525B"/>
                 </a:solidFill>
-                <a:latin typeface="Arial" panose="020B0604020202020204" pitchFamily="34" charset="0"/>
+                <a:latin typeface="Arial"/>
+                <a:ea typeface="Arial"/>
+                <a:cs typeface="Arial"/>
+              </a:rPr>
+              <a:t>6</a:t>
+            </a:r>
+          </a:p>
+        </p:txBody>
+      </p:sp>
+    </p:spTree>
+    <p:extLst>
+      <p:ext uri="{BB962C8B-B14F-4D97-AF65-F5344CB8AC3E}">
+        <p14:creationId xmlns:p14="http://schemas.microsoft.com/office/powerpoint/2010/main" val="711523816"/>
+      </p:ext>
+    </p:extLst>
+  </p:cSld>
+  <p:clrMapOvr>
+    <a:masterClrMapping/>
+  </p:clrMapOvr>
+</p:sld>
+</file>
+
+<file path=ppt/slides/slide7.xml><?xml version="1.0" encoding="utf-8"?>
+<p:sld xmlns:a="http://schemas.openxmlformats.org/drawingml/2006/main" xmlns:r="http://schemas.openxmlformats.org/officeDocument/2006/relationships" xmlns:p="http://schemas.openxmlformats.org/presentationml/2006/main">
+  <p:cSld>
+    <p:bg>
+      <p:bgPr>
+        <a:solidFill>
+          <a:srgbClr val="FFFFFF"/>
+        </a:solidFill>
+        <a:effectLst/>
+      </p:bgPr>
+    </p:bg>
+    <p:spTree>
+      <p:nvGrpSpPr>
+        <p:cNvPr id="1" name=""/>
+        <p:cNvGrpSpPr/>
+        <p:nvPr/>
+      </p:nvGrpSpPr>
+      <p:grpSpPr>
+        <a:xfrm>
+          <a:off x="0" y="0"/>
+          <a:ext cx="0" cy="0"/>
+          <a:chOff x="0" y="0"/>
+          <a:chExt cx="0" cy="0"/>
+        </a:xfrm>
+      </p:grpSpPr>
+      <p:sp>
+        <p:nvSpPr>
+          <p:cNvPr id="2" name="TextBox 1">
+            <a:extLst>
+              <a:ext uri="{FF2B5EF4-FFF2-40B4-BE49-F238E27FC236}">
+                <a16:creationId xmlns:a16="http://schemas.microsoft.com/office/drawing/2014/main" id="{C3E5146B-9667-888C-D9B8-51DA7F0658CA}"/>
+              </a:ext>
+            </a:extLst>
+          </p:cNvPr>
+          <p:cNvSpPr>
+            <a:spLocks noGrp="1"/>
+          </p:cNvSpPr>
+          <p:nvPr/>
+        </p:nvSpPr>
+        <p:spPr>
+          <a:xfrm>
+            <a:off x="381000" y="330200"/>
+            <a:ext cx="11303000" cy="553998"/>
+          </a:xfrm>
+          <a:prstGeom prst="rect">
+            <a:avLst/>
+          </a:prstGeom>
+          <a:noFill/>
+        </p:spPr>
+        <p:txBody>
+          <a:bodyPr vert="horz" lIns="0" tIns="0" rIns="0" bIns="0" anchor="t">
+            <a:spAutoFit/>
+          </a:bodyPr>
+          <a:lstStyle/>
+          <a:p>
+            <a:r>
+              <a:rPr sz="3600" b="1">
+                <a:solidFill>
+                  <a:srgbClr val="000000"/>
+                </a:solidFill>
+                <a:latin typeface="Arial"/>
+                <a:ea typeface="Arial"/>
+                <a:cs typeface="Arial"/>
+              </a:rPr>
+              <a:t>Use 2.46% as the 2026 planning baseline</a:t>
+            </a:r>
+          </a:p>
+        </p:txBody>
+      </p:sp>
+      <p:sp>
+        <p:nvSpPr>
+          <p:cNvPr id="5" name="TextBox 4">
+            <a:extLst>
+              <a:ext uri="{FF2B5EF4-FFF2-40B4-BE49-F238E27FC236}">
+                <a16:creationId xmlns:a16="http://schemas.microsoft.com/office/drawing/2014/main" id="{919DF10C-956C-F7C2-E0C1-7871678568ED}"/>
+              </a:ext>
+            </a:extLst>
+          </p:cNvPr>
+          <p:cNvSpPr>
+            <a:spLocks noGrp="1"/>
+          </p:cNvSpPr>
+          <p:nvPr/>
+        </p:nvSpPr>
+        <p:spPr>
+          <a:xfrm>
+            <a:off x="8445500" y="1524000"/>
+            <a:ext cx="2921000" cy="615553"/>
+          </a:xfrm>
+          <a:prstGeom prst="rect">
+            <a:avLst/>
+          </a:prstGeom>
+          <a:noFill/>
+        </p:spPr>
+        <p:txBody>
+          <a:bodyPr vert="horz" lIns="0" tIns="0" rIns="0" bIns="0" anchor="t">
+            <a:spAutoFit/>
+          </a:bodyPr>
+          <a:lstStyle/>
+          <a:p>
+            <a:r>
+              <a:rPr sz="4000" b="1">
+                <a:solidFill>
+                  <a:srgbClr val="000000"/>
+                </a:solidFill>
+                <a:latin typeface="Arial"/>
+                <a:ea typeface="Arial"/>
+                <a:cs typeface="Arial"/>
+              </a:rPr>
+              <a:t>2.46%</a:t>
+            </a:r>
+          </a:p>
+        </p:txBody>
+      </p:sp>
+      <p:sp>
+        <p:nvSpPr>
+          <p:cNvPr id="6" name="TextBox 5">
+            <a:extLst>
+              <a:ext uri="{FF2B5EF4-FFF2-40B4-BE49-F238E27FC236}">
+                <a16:creationId xmlns:a16="http://schemas.microsoft.com/office/drawing/2014/main" id="{C953D815-E4F7-8B1A-2310-2A34C7B77053}"/>
+              </a:ext>
+            </a:extLst>
+          </p:cNvPr>
+          <p:cNvSpPr>
+            <a:spLocks noGrp="1"/>
+          </p:cNvSpPr>
+          <p:nvPr/>
+        </p:nvSpPr>
+        <p:spPr>
+          <a:xfrm>
+            <a:off x="8445500" y="2222500"/>
+            <a:ext cx="2921000" cy="276999"/>
+          </a:xfrm>
+          <a:prstGeom prst="rect">
+            <a:avLst/>
+          </a:prstGeom>
+          <a:noFill/>
+        </p:spPr>
+        <p:txBody>
+          <a:bodyPr vert="horz" lIns="0" tIns="0" rIns="0" bIns="0" anchor="t">
+            <a:spAutoFit/>
+          </a:bodyPr>
+          <a:lstStyle/>
+          <a:p>
+            <a:r>
+              <a:rPr>
+                <a:solidFill>
+                  <a:srgbClr val="4C525B"/>
+                </a:solidFill>
+                <a:latin typeface="Arial"/>
+                <a:ea typeface="Arial"/>
+                <a:cs typeface="Arial"/>
               </a:rPr>
               <a:t>Central forecast</a:t>
             </a:r>
           </a:p>
         </p:txBody>
       </p:sp>
-      <p:cxnSp>
-        <p:nvCxnSpPr>
+      <p:sp>
+        <p:nvSpPr>
           <p:cNvPr id="7" name="Straight Connector 6">
             <a:extLst>
               <a:ext uri="{FF2B5EF4-FFF2-40B4-BE49-F238E27FC236}">
-                <a16:creationId xmlns:a16="http://schemas.microsoft.com/office/drawing/2014/main" id="{8A5B0E96-D66A-0A1E-A4EC-E826E7C5F6DE}"/>
-              </a:ext>
-            </a:extLst>
-          </p:cNvPr>
-          <p:cNvCxnSpPr/>
+                <a16:creationId xmlns:a16="http://schemas.microsoft.com/office/drawing/2014/main" id="{2C90CBD8-E3CB-487F-91CB-9DC36CEDA315}"/>
+              </a:ext>
+            </a:extLst>
+          </p:cNvPr>
+          <p:cNvSpPr>
+            <a:spLocks noGrp="1"/>
+          </p:cNvSpPr>
           <p:nvPr/>
-        </p:nvCxnSpPr>
+        </p:nvSpPr>
         <p:spPr>
           <a:xfrm>
             <a:off x="8445500" y="2857500"/>
@@ -7288,7 +8440,14 @@
             <a:schemeClr val="tx1"/>
           </a:fontRef>
         </p:style>
-      </p:cxnSp>
+        <p:txBody>
+          <a:bodyPr/>
+          <a:lstStyle/>
+          <a:p>
+            <a:endParaRPr lang="fr-CA"/>
+          </a:p>
+        </p:txBody>
+      </p:sp>
       <p:sp>
         <p:nvSpPr>
           <p:cNvPr id="8" name="TextBox 7">
@@ -7298,7 +8457,9 @@
               </a:ext>
             </a:extLst>
           </p:cNvPr>
-          <p:cNvSpPr txBox="1"/>
+          <p:cNvSpPr>
+            <a:spLocks noGrp="1"/>
+          </p:cNvSpPr>
           <p:nvPr/>
         </p:nvSpPr>
         <p:spPr>
@@ -7312,17 +8473,19 @@
           <a:noFill/>
         </p:spPr>
         <p:txBody>
-          <a:bodyPr vert="horz" lIns="0" tIns="0" rIns="0" bIns="0" rtlCol="0" anchor="t">
+          <a:bodyPr vert="horz" lIns="0" tIns="0" rIns="0" bIns="0" anchor="t">
             <a:spAutoFit/>
           </a:bodyPr>
           <a:lstStyle/>
           <a:p>
             <a:r>
-              <a:rPr lang="fr-CA" sz="2900" b="1">
+              <a:rPr sz="2900" b="1">
                 <a:solidFill>
                   <a:srgbClr val="000000"/>
                 </a:solidFill>
-                <a:latin typeface="Arial" panose="020B0604020202020204" pitchFamily="34" charset="0"/>
+                <a:latin typeface="Arial"/>
+                <a:ea typeface="Arial"/>
+                <a:cs typeface="Arial"/>
               </a:rPr>
               <a:t>1.09% to 3.82%</a:t>
             </a:r>
@@ -7338,7 +8501,9 @@
               </a:ext>
             </a:extLst>
           </p:cNvPr>
-          <p:cNvSpPr txBox="1"/>
+          <p:cNvSpPr>
+            <a:spLocks noGrp="1"/>
+          </p:cNvSpPr>
           <p:nvPr/>
         </p:nvSpPr>
         <p:spPr>
@@ -7352,35 +8517,39 @@
           <a:noFill/>
         </p:spPr>
         <p:txBody>
-          <a:bodyPr vert="horz" lIns="0" tIns="0" rIns="0" bIns="0" rtlCol="0" anchor="t">
+          <a:bodyPr vert="horz" lIns="0" tIns="0" rIns="0" bIns="0" anchor="t">
             <a:spAutoFit/>
           </a:bodyPr>
           <a:lstStyle/>
           <a:p>
             <a:r>
-              <a:rPr lang="fr-CA">
+              <a:rPr>
                 <a:solidFill>
                   <a:srgbClr val="4C525B"/>
                 </a:solidFill>
-                <a:latin typeface="Arial" panose="020B0604020202020204" pitchFamily="34" charset="0"/>
+                <a:latin typeface="Arial"/>
+                <a:ea typeface="Arial"/>
+                <a:cs typeface="Arial"/>
               </a:rPr>
               <a:t>Planning range</a:t>
             </a:r>
           </a:p>
         </p:txBody>
       </p:sp>
-      <p:cxnSp>
-        <p:nvCxnSpPr>
+      <p:sp>
+        <p:nvSpPr>
           <p:cNvPr id="10" name="Straight Connector 9">
             <a:extLst>
               <a:ext uri="{FF2B5EF4-FFF2-40B4-BE49-F238E27FC236}">
-                <a16:creationId xmlns:a16="http://schemas.microsoft.com/office/drawing/2014/main" id="{28B33AA3-CC30-6BAD-F26E-614F4343C4B1}"/>
-              </a:ext>
-            </a:extLst>
-          </p:cNvPr>
-          <p:cNvCxnSpPr/>
+                <a16:creationId xmlns:a16="http://schemas.microsoft.com/office/drawing/2014/main" id="{BFDBC410-694E-4D7C-830D-FD2D0931F79A}"/>
+              </a:ext>
+            </a:extLst>
+          </p:cNvPr>
+          <p:cNvSpPr>
+            <a:spLocks noGrp="1"/>
+          </p:cNvSpPr>
           <p:nvPr/>
-        </p:nvCxnSpPr>
+        </p:nvSpPr>
         <p:spPr>
           <a:xfrm>
             <a:off x="8445500" y="4368800"/>
@@ -7409,7 +8578,14 @@
             <a:schemeClr val="tx1"/>
           </a:fontRef>
         </p:style>
-      </p:cxnSp>
+        <p:txBody>
+          <a:bodyPr/>
+          <a:lstStyle/>
+          <a:p>
+            <a:endParaRPr lang="fr-CA"/>
+          </a:p>
+        </p:txBody>
+      </p:sp>
       <p:sp>
         <p:nvSpPr>
           <p:cNvPr id="11" name="TextBox 10">
@@ -7419,7 +8595,9 @@
               </a:ext>
             </a:extLst>
           </p:cNvPr>
-          <p:cNvSpPr txBox="1"/>
+          <p:cNvSpPr>
+            <a:spLocks noGrp="1"/>
+          </p:cNvSpPr>
           <p:nvPr/>
         </p:nvSpPr>
         <p:spPr>
@@ -7433,17 +8611,19 @@
           <a:noFill/>
         </p:spPr>
         <p:txBody>
-          <a:bodyPr vert="horz" lIns="0" tIns="0" rIns="0" bIns="0" rtlCol="0" anchor="t">
+          <a:bodyPr vert="horz" lIns="0" tIns="0" rIns="0" bIns="0" anchor="t">
             <a:spAutoFit/>
           </a:bodyPr>
           <a:lstStyle/>
           <a:p>
             <a:r>
-              <a:rPr lang="fr-CA" sz="2900" b="1">
+              <a:rPr sz="2900" b="1">
                 <a:solidFill>
                   <a:srgbClr val="000000"/>
                 </a:solidFill>
-                <a:latin typeface="Arial" panose="020B0604020202020204" pitchFamily="34" charset="0"/>
+                <a:latin typeface="Arial"/>
+                <a:ea typeface="Arial"/>
+                <a:cs typeface="Arial"/>
               </a:rPr>
               <a:t>1.36 pp</a:t>
             </a:r>
@@ -7459,7 +8639,9 @@
               </a:ext>
             </a:extLst>
           </p:cNvPr>
-          <p:cNvSpPr txBox="1"/>
+          <p:cNvSpPr>
+            <a:spLocks noGrp="1"/>
+          </p:cNvSpPr>
           <p:nvPr/>
         </p:nvSpPr>
         <p:spPr>
@@ -7473,17 +8655,19 @@
           <a:noFill/>
         </p:spPr>
         <p:txBody>
-          <a:bodyPr vert="horz" lIns="0" tIns="0" rIns="0" bIns="0" rtlCol="0" anchor="t">
+          <a:bodyPr vert="horz" lIns="0" tIns="0" rIns="0" bIns="0" anchor="t">
             <a:spAutoFit/>
           </a:bodyPr>
           <a:lstStyle/>
           <a:p>
             <a:r>
-              <a:rPr lang="fr-CA">
+              <a:rPr>
                 <a:solidFill>
                   <a:srgbClr val="4C525B"/>
                 </a:solidFill>
-                <a:latin typeface="Arial" panose="020B0604020202020204" pitchFamily="34" charset="0"/>
+                <a:latin typeface="Arial"/>
+                <a:ea typeface="Arial"/>
+                <a:cs typeface="Arial"/>
               </a:rPr>
               <a:t>Backtest MAE, 2023-2025</a:t>
             </a:r>
@@ -7492,20 +8676,22 @@
       </p:sp>
       <p:sp>
         <p:nvSpPr>
-          <p:cNvPr id="13" name="TextBox 12">
-            <a:extLst>
-              <a:ext uri="{FF2B5EF4-FFF2-40B4-BE49-F238E27FC236}">
-                <a16:creationId xmlns:a16="http://schemas.microsoft.com/office/drawing/2014/main" id="{859CD754-43AF-6429-F4B0-6D7A19B0E066}"/>
-              </a:ext>
-            </a:extLst>
-          </p:cNvPr>
-          <p:cNvSpPr txBox="1"/>
+          <p:cNvPr id="14" name="TextBox 13">
+            <a:extLst>
+              <a:ext uri="{FF2B5EF4-FFF2-40B4-BE49-F238E27FC236}">
+                <a16:creationId xmlns:a16="http://schemas.microsoft.com/office/drawing/2014/main" id="{ECB0830F-3434-2857-C4D0-7A6DA679DA6C}"/>
+              </a:ext>
+            </a:extLst>
+          </p:cNvPr>
+          <p:cNvSpPr>
+            <a:spLocks noGrp="1"/>
+          </p:cNvSpPr>
           <p:nvPr/>
         </p:nvSpPr>
         <p:spPr>
           <a:xfrm>
-            <a:off x="381000" y="5918200"/>
-            <a:ext cx="10541000" cy="646331"/>
+            <a:off x="11493500" y="6502400"/>
+            <a:ext cx="254000" cy="138499"/>
           </a:xfrm>
           <a:prstGeom prst="rect">
             <a:avLst/>
@@ -7513,70 +8699,44 @@
           <a:noFill/>
         </p:spPr>
         <p:txBody>
-          <a:bodyPr vert="horz" lIns="0" tIns="0" rIns="0" bIns="0" rtlCol="0" anchor="t">
+          <a:bodyPr vert="horz" lIns="0" tIns="0" rIns="0" bIns="0" anchor="t">
             <a:spAutoFit/>
           </a:bodyPr>
           <a:lstStyle/>
           <a:p>
-            <a:r>
-              <a:rPr lang="en-US" sz="2100" b="1">
-                <a:solidFill>
-                  <a:srgbClr val="3D8DFF"/>
-                </a:solidFill>
-                <a:latin typeface="Arial" panose="020B0604020202020204" pitchFamily="34" charset="0"/>
-              </a:rPr>
-              <a:t>Recommendation: use 2.46% for planning, while monitoring concessions and turnover results.</a:t>
-            </a:r>
-            <a:endParaRPr lang="fr-CA" sz="2100" b="1">
-              <a:solidFill>
-                <a:srgbClr val="3D8DFF"/>
-              </a:solidFill>
-              <a:latin typeface="Arial" panose="020B0604020202020204" pitchFamily="34" charset="0"/>
-            </a:endParaRPr>
-          </a:p>
-        </p:txBody>
-      </p:sp>
-      <p:sp>
-        <p:nvSpPr>
-          <p:cNvPr id="14" name="TextBox 13">
-            <a:extLst>
-              <a:ext uri="{FF2B5EF4-FFF2-40B4-BE49-F238E27FC236}">
-                <a16:creationId xmlns:a16="http://schemas.microsoft.com/office/drawing/2014/main" id="{ECB0830F-3434-2857-C4D0-7A6DA679DA6C}"/>
-              </a:ext>
-            </a:extLst>
-          </p:cNvPr>
-          <p:cNvSpPr txBox="1"/>
-          <p:nvPr/>
-        </p:nvSpPr>
-        <p:spPr>
-          <a:xfrm>
-            <a:off x="11493500" y="6502400"/>
-            <a:ext cx="254000" cy="138499"/>
-          </a:xfrm>
-          <a:prstGeom prst="rect">
-            <a:avLst/>
-          </a:prstGeom>
-          <a:noFill/>
-        </p:spPr>
-        <p:txBody>
-          <a:bodyPr vert="horz" lIns="0" tIns="0" rIns="0" bIns="0" rtlCol="0" anchor="t">
-            <a:spAutoFit/>
-          </a:bodyPr>
-          <a:lstStyle/>
-          <a:p>
-            <a:pPr algn="r"/>
-            <a:r>
-              <a:rPr lang="fr-CA" sz="900">
+            <a:pPr algn="r">
+              <a:buNone/>
+            </a:pPr>
+            <a:r>
+              <a:rPr sz="900">
                 <a:solidFill>
                   <a:srgbClr val="4C525B"/>
                 </a:solidFill>
-                <a:latin typeface="Arial" panose="020B0604020202020204" pitchFamily="34" charset="0"/>
+                <a:latin typeface="Arial"/>
+                <a:ea typeface="Arial"/>
+                <a:cs typeface="Arial"/>
               </a:rPr>
-              <a:t>6</a:t>
-            </a:r>
-          </a:p>
-        </p:txBody>
-      </p:sp>
+              <a:t>7</a:t>
+            </a:r>
+          </a:p>
+        </p:txBody>
+      </p:sp>
+      <p:graphicFrame>
+        <p:nvGraphicFramePr>
+          <p:cNvPr id="27" name="Backtest predicted versus actual"/>
+          <p:cNvGraphicFramePr/>
+          <p:nvPr/>
+        </p:nvGraphicFramePr>
+        <p:xfrm>
+          <a:off x="523875" y="1381125"/>
+          <a:ext cx="7191375" cy="3905250"/>
+        </p:xfrm>
+        <a:graphic>
+          <a:graphicData uri="http://schemas.openxmlformats.org/drawingml/2006/chart">
+            <c:chart xmlns:c="http://schemas.openxmlformats.org/drawingml/2006/chart" xmlns:r="http://schemas.openxmlformats.org/officeDocument/2006/relationships" r:id="rId3"/>
+          </a:graphicData>
+        </a:graphic>
+      </p:graphicFrame>
     </p:spTree>
     <p:extLst>
       <p:ext uri="{BB962C8B-B14F-4D97-AF65-F5344CB8AC3E}">
@@ -7633,7 +8793,7 @@
     </a:clrScheme>
     <a:fontScheme name="Office">
       <a:majorFont>
-        <a:latin typeface="Aptos Display" panose="02110004020202020204"/>
+        <a:latin typeface="Aptos Display"/>
         <a:ea typeface=""/>
         <a:cs typeface=""/>
         <a:font script="Jpan" typeface="游ゴシック Light"/>
@@ -7685,7 +8845,7 @@
         <a:font script="Tfng" typeface="Ebrima"/>
       </a:majorFont>
       <a:minorFont>
-        <a:latin typeface="Aptos" panose="02110004020202020204"/>
+        <a:latin typeface="Aptos"/>
         <a:ea typeface=""/>
         <a:cs typeface=""/>
         <a:font script="Jpan" typeface="游ゴシック"/>
@@ -7746,23 +8906,23 @@
           <a:gsLst>
             <a:gs pos="0">
               <a:schemeClr val="phClr">
+                <a:tint val="67000"/>
                 <a:lumMod val="110000"/>
                 <a:satMod val="105000"/>
-                <a:tint val="67000"/>
               </a:schemeClr>
             </a:gs>
             <a:gs pos="50000">
               <a:schemeClr val="phClr">
+                <a:tint val="73000"/>
                 <a:lumMod val="105000"/>
                 <a:satMod val="103000"/>
-                <a:tint val="73000"/>
               </a:schemeClr>
             </a:gs>
             <a:gs pos="100000">
               <a:schemeClr val="phClr">
+                <a:tint val="81000"/>
                 <a:lumMod val="105000"/>
                 <a:satMod val="109000"/>
-                <a:tint val="81000"/>
               </a:schemeClr>
             </a:gs>
           </a:gsLst>
@@ -7772,23 +8932,23 @@
           <a:gsLst>
             <a:gs pos="0">
               <a:schemeClr val="phClr">
+                <a:tint val="94000"/>
+                <a:lumMod val="102000"/>
                 <a:satMod val="103000"/>
-                <a:lumMod val="102000"/>
-                <a:tint val="94000"/>
               </a:schemeClr>
             </a:gs>
             <a:gs pos="50000">
               <a:schemeClr val="phClr">
+                <a:shade val="100000"/>
+                <a:lumMod val="100000"/>
                 <a:satMod val="110000"/>
-                <a:lumMod val="100000"/>
-                <a:shade val="100000"/>
               </a:schemeClr>
             </a:gs>
             <a:gs pos="100000">
               <a:schemeClr val="phClr">
+                <a:shade val="78000"/>
                 <a:lumMod val="99000"/>
                 <a:satMod val="120000"/>
-                <a:shade val="78000"/>
               </a:schemeClr>
             </a:gs>
           </a:gsLst>
@@ -7796,26 +8956,23 @@
         </a:gradFill>
       </a:fillStyleLst>
       <a:lnStyleLst>
-        <a:ln w="12700" cap="flat" cmpd="sng" algn="ctr">
+        <a:ln w="12700">
           <a:solidFill>
             <a:schemeClr val="phClr"/>
           </a:solidFill>
           <a:prstDash val="solid"/>
-          <a:miter lim="800000"/>
         </a:ln>
-        <a:ln w="19050" cap="flat" cmpd="sng" algn="ctr">
+        <a:ln w="19050">
           <a:solidFill>
             <a:schemeClr val="phClr"/>
           </a:solidFill>
           <a:prstDash val="solid"/>
-          <a:miter lim="800000"/>
         </a:ln>
-        <a:ln w="25400" cap="flat" cmpd="sng" algn="ctr">
+        <a:ln w="25400">
           <a:solidFill>
             <a:schemeClr val="phClr"/>
           </a:solidFill>
           <a:prstDash val="solid"/>
-          <a:miter lim="800000"/>
         </a:ln>
       </a:lnStyleLst>
       <a:effectStyleLst>
@@ -7850,17 +9007,17 @@
             <a:gs pos="0">
               <a:schemeClr val="phClr">
                 <a:tint val="93000"/>
-                <a:satMod val="150000"/>
                 <a:shade val="98000"/>
                 <a:lumMod val="102000"/>
+                <a:satMod val="150000"/>
               </a:schemeClr>
             </a:gs>
             <a:gs pos="50000">
               <a:schemeClr val="phClr">
                 <a:tint val="98000"/>
-                <a:satMod val="130000"/>
                 <a:shade val="90000"/>
                 <a:lumMod val="103000"/>
+                <a:satMod val="130000"/>
               </a:schemeClr>
             </a:gs>
             <a:gs pos="100000">
@@ -7875,33 +9032,8 @@
       </a:bgFillStyleLst>
     </a:fmtScheme>
   </a:themeElements>
-  <a:objectDefaults>
-    <a:lnDef>
-      <a:spPr/>
-      <a:bodyPr/>
-      <a:lstStyle/>
-      <a:style>
-        <a:lnRef idx="2">
-          <a:schemeClr val="accent1"/>
-        </a:lnRef>
-        <a:fillRef idx="0">
-          <a:schemeClr val="accent1"/>
-        </a:fillRef>
-        <a:effectRef idx="1">
-          <a:schemeClr val="accent1"/>
-        </a:effectRef>
-        <a:fontRef idx="minor">
-          <a:schemeClr val="tx1"/>
-        </a:fontRef>
-      </a:style>
-    </a:lnDef>
-  </a:objectDefaults>
+  <a:objectDefaults/>
   <a:extraClrSchemeLst/>
-  <a:extLst>
-    <a:ext uri="{05A4C25C-085E-4340-85A3-A5531E510DB2}">
-      <thm15:themeFamily xmlns:thm15="http://schemas.microsoft.com/office/thememl/2012/main" name="Office Theme" id="{2E142A2C-CD16-42D6-873A-C26D2A0506FA}" vid="{1BDDFF52-6CD6-40A5-AB3C-68EB2F1E4D0A}"/>
-    </a:ext>
-  </a:extLst>
 </a:theme>
 </file>
 
@@ -7948,7 +9080,7 @@
     </a:clrScheme>
     <a:fontScheme name="Office">
       <a:majorFont>
-        <a:latin typeface="Aptos Display" panose="02110004020202020204"/>
+        <a:latin typeface="Aptos Display"/>
         <a:ea typeface=""/>
         <a:cs typeface=""/>
         <a:font script="Jpan" typeface="游ゴシック Light"/>
@@ -8000,7 +9132,7 @@
         <a:font script="Tfng" typeface="Ebrima"/>
       </a:majorFont>
       <a:minorFont>
-        <a:latin typeface="Aptos" panose="02110004020202020204"/>
+        <a:latin typeface="Aptos"/>
         <a:ea typeface=""/>
         <a:cs typeface=""/>
         <a:font script="Jpan" typeface="游ゴシック"/>
@@ -8061,23 +9193,23 @@
           <a:gsLst>
             <a:gs pos="0">
               <a:schemeClr val="phClr">
+                <a:tint val="67000"/>
                 <a:lumMod val="110000"/>
                 <a:satMod val="105000"/>
-                <a:tint val="67000"/>
               </a:schemeClr>
             </a:gs>
             <a:gs pos="50000">
               <a:schemeClr val="phClr">
+                <a:tint val="73000"/>
                 <a:lumMod val="105000"/>
                 <a:satMod val="103000"/>
-                <a:tint val="73000"/>
               </a:schemeClr>
             </a:gs>
             <a:gs pos="100000">
               <a:schemeClr val="phClr">
+                <a:tint val="81000"/>
                 <a:lumMod val="105000"/>
                 <a:satMod val="109000"/>
-                <a:tint val="81000"/>
               </a:schemeClr>
             </a:gs>
           </a:gsLst>
@@ -8087,23 +9219,23 @@
           <a:gsLst>
             <a:gs pos="0">
               <a:schemeClr val="phClr">
+                <a:tint val="94000"/>
+                <a:lumMod val="102000"/>
                 <a:satMod val="103000"/>
-                <a:lumMod val="102000"/>
-                <a:tint val="94000"/>
               </a:schemeClr>
             </a:gs>
             <a:gs pos="50000">
               <a:schemeClr val="phClr">
+                <a:shade val="100000"/>
+                <a:lumMod val="100000"/>
                 <a:satMod val="110000"/>
-                <a:lumMod val="100000"/>
-                <a:shade val="100000"/>
               </a:schemeClr>
             </a:gs>
             <a:gs pos="100000">
               <a:schemeClr val="phClr">
+                <a:shade val="78000"/>
                 <a:lumMod val="99000"/>
                 <a:satMod val="120000"/>
-                <a:shade val="78000"/>
               </a:schemeClr>
             </a:gs>
           </a:gsLst>
@@ -8111,26 +9243,23 @@
         </a:gradFill>
       </a:fillStyleLst>
       <a:lnStyleLst>
-        <a:ln w="12700" cap="flat" cmpd="sng" algn="ctr">
+        <a:ln w="12700">
           <a:solidFill>
             <a:schemeClr val="phClr"/>
           </a:solidFill>
           <a:prstDash val="solid"/>
-          <a:miter lim="800000"/>
         </a:ln>
-        <a:ln w="19050" cap="flat" cmpd="sng" algn="ctr">
+        <a:ln w="19050">
           <a:solidFill>
             <a:schemeClr val="phClr"/>
           </a:solidFill>
           <a:prstDash val="solid"/>
-          <a:miter lim="800000"/>
         </a:ln>
-        <a:ln w="25400" cap="flat" cmpd="sng" algn="ctr">
+        <a:ln w="25400">
           <a:solidFill>
             <a:schemeClr val="phClr"/>
           </a:solidFill>
           <a:prstDash val="solid"/>
-          <a:miter lim="800000"/>
         </a:ln>
       </a:lnStyleLst>
       <a:effectStyleLst>
@@ -8165,17 +9294,17 @@
             <a:gs pos="0">
               <a:schemeClr val="phClr">
                 <a:tint val="93000"/>
-                <a:satMod val="150000"/>
                 <a:shade val="98000"/>
                 <a:lumMod val="102000"/>
+                <a:satMod val="150000"/>
               </a:schemeClr>
             </a:gs>
             <a:gs pos="50000">
               <a:schemeClr val="phClr">
                 <a:tint val="98000"/>
-                <a:satMod val="130000"/>
                 <a:shade val="90000"/>
                 <a:lumMod val="103000"/>
+                <a:satMod val="130000"/>
               </a:schemeClr>
             </a:gs>
             <a:gs pos="100000">
@@ -8190,32 +9319,7 @@
       </a:bgFillStyleLst>
     </a:fmtScheme>
   </a:themeElements>
-  <a:objectDefaults>
-    <a:lnDef>
-      <a:spPr/>
-      <a:bodyPr/>
-      <a:lstStyle/>
-      <a:style>
-        <a:lnRef idx="2">
-          <a:schemeClr val="accent1"/>
-        </a:lnRef>
-        <a:fillRef idx="0">
-          <a:schemeClr val="accent1"/>
-        </a:fillRef>
-        <a:effectRef idx="1">
-          <a:schemeClr val="accent1"/>
-        </a:effectRef>
-        <a:fontRef idx="minor">
-          <a:schemeClr val="tx1"/>
-        </a:fontRef>
-      </a:style>
-    </a:lnDef>
-  </a:objectDefaults>
+  <a:objectDefaults/>
   <a:extraClrSchemeLst/>
-  <a:extLst>
-    <a:ext uri="{05A4C25C-085E-4340-85A3-A5531E510DB2}">
-      <thm15:themeFamily xmlns:thm15="http://schemas.microsoft.com/office/thememl/2012/main" name="Office Theme" id="{2E142A2C-CD16-42D6-873A-C26D2A0506FA}" vid="{1BDDFF52-6CD6-40A5-AB3C-68EB2F1E4D0A}"/>
-    </a:ext>
-  </a:extLst>
 </a:theme>
 </file>